--- a/ppt_form.pptx
+++ b/ppt_form.pptx
@@ -3143,7 +3143,7 @@
           <a:solidFill>
             <a:srgbClr val="FFFFFF"/>
           </a:solidFill>
-          <a:ln w="9525">
+          <a:ln w="15240">
             <a:solidFill>
               <a:srgbClr val="D9DEE8"/>
             </a:solidFill>
@@ -3205,7 +3205,7 @@
           <a:solidFill>
             <a:srgbClr val="FFFFFF"/>
           </a:solidFill>
-          <a:ln w="6350">
+          <a:ln w="10160">
             <a:solidFill>
               <a:srgbClr val="D0D6E0"/>
             </a:solidFill>
@@ -3267,7 +3267,7 @@
           <a:solidFill>
             <a:srgbClr val="F3FAF4"/>
           </a:solidFill>
-          <a:ln w="12700">
+          <a:ln w="20320">
             <a:solidFill>
               <a:srgbClr val="1E7B34"/>
             </a:solidFill>
@@ -3320,13 +3320,14 @@
         </p:nvSpPr>
         <p:spPr>
           <a:xfrm>
-            <a:off x="558000" y="2609999"/>
+            <a:off x="558000" y="2852999"/>
             <a:ext cx="1440000" cy="234000"/>
           </a:xfrm>
           <a:prstGeom prst="rect">
             <a:avLst/>
           </a:prstGeom>
           <a:noFill/>
+          <a:ln/>
         </p:spPr>
         <p:txBody>
           <a:bodyPr wrap="none" anchor="ctr" lIns="18000" rIns="18000" tIns="21600" bIns="21600">
@@ -3335,7 +3336,7 @@
           <a:lstStyle/>
           <a:p>
             <a:r>
-              <a:rPr sz="1470" b="1">
+              <a:rPr sz="1700" b="1">
                 <a:solidFill>
                   <a:srgbClr val="0E1E52"/>
                 </a:solidFill>
@@ -3354,7 +3355,7 @@
         </p:nvSpPr>
         <p:spPr>
           <a:xfrm>
-            <a:off x="1998000" y="2628000"/>
+            <a:off x="1998000" y="2871000"/>
             <a:ext cx="1368000" cy="198000"/>
           </a:xfrm>
           <a:prstGeom prst="rect">
@@ -3363,7 +3364,7 @@
           <a:solidFill>
             <a:srgbClr val="FFFFFF"/>
           </a:solidFill>
-          <a:ln w="6350">
+          <a:ln w="10160">
             <a:solidFill>
               <a:srgbClr val="D0D6E0"/>
             </a:solidFill>
@@ -3375,142 +3376,6 @@
           <a:lstStyle/>
           <a:p>
             <a:pPr algn="ctr"/>
-          </a:p>
-        </p:txBody>
-      </p:sp>
-      <p:sp>
-        <p:nvSpPr>
-          <p:cNvPr id="22" name="TIER_L"/>
-          <p:cNvSpPr txBox="1"/>
-          <p:nvPr/>
-        </p:nvSpPr>
-        <p:spPr>
-          <a:xfrm>
-            <a:off x="558000" y="2861999"/>
-            <a:ext cx="2880000" cy="162000"/>
-          </a:xfrm>
-          <a:prstGeom prst="rect">
-            <a:avLst/>
-          </a:prstGeom>
-          <a:noFill/>
-        </p:spPr>
-        <p:txBody>
-          <a:bodyPr wrap="none" anchor="t" lIns="18000" rIns="18000" tIns="21600" bIns="21600">
-            <a:noAutofit/>
-          </a:bodyPr>
-          <a:lstStyle/>
-          <a:p>
-            <a:r>
-              <a:rPr sz="910" b="0">
-                <a:solidFill>
-                  <a:srgbClr val="4A556B"/>
-                </a:solidFill>
-                <a:latin typeface="HY엽서M"/>
-              </a:rPr>
-              <a:t>뇌혈관 질환의 후유증</a:t>
-            </a:r>
-          </a:p>
-        </p:txBody>
-      </p:sp>
-      <p:sp>
-        <p:nvSpPr>
-          <p:cNvPr id="23" name="TIER_L"/>
-          <p:cNvSpPr txBox="1"/>
-          <p:nvPr/>
-        </p:nvSpPr>
-        <p:spPr>
-          <a:xfrm>
-            <a:off x="558000" y="2984399"/>
-            <a:ext cx="2880000" cy="162000"/>
-          </a:xfrm>
-          <a:prstGeom prst="rect">
-            <a:avLst/>
-          </a:prstGeom>
-          <a:noFill/>
-        </p:spPr>
-        <p:txBody>
-          <a:bodyPr wrap="none" anchor="t" lIns="18000" rIns="18000" tIns="21600" bIns="21600">
-            <a:noAutofit/>
-          </a:bodyPr>
-          <a:lstStyle/>
-          <a:p>
-            <a:r>
-              <a:rPr sz="910" b="0">
-                <a:solidFill>
-                  <a:srgbClr val="4A556B"/>
-                </a:solidFill>
-                <a:latin typeface="HY엽서M"/>
-              </a:rPr>
-              <a:t>달리 분류된 질환에서의 뇌혈관 장애</a:t>
-            </a:r>
-          </a:p>
-        </p:txBody>
-      </p:sp>
-      <p:sp>
-        <p:nvSpPr>
-          <p:cNvPr id="24" name="TIER_L"/>
-          <p:cNvSpPr txBox="1"/>
-          <p:nvPr/>
-        </p:nvSpPr>
-        <p:spPr>
-          <a:xfrm>
-            <a:off x="558000" y="3106799"/>
-            <a:ext cx="2880000" cy="162000"/>
-          </a:xfrm>
-          <a:prstGeom prst="rect">
-            <a:avLst/>
-          </a:prstGeom>
-          <a:noFill/>
-        </p:spPr>
-        <p:txBody>
-          <a:bodyPr wrap="none" anchor="t" lIns="18000" rIns="18000" tIns="21600" bIns="21600">
-            <a:noAutofit/>
-          </a:bodyPr>
-          <a:lstStyle/>
-          <a:p>
-            <a:r>
-              <a:rPr sz="910" b="0">
-                <a:solidFill>
-                  <a:srgbClr val="4A556B"/>
-                </a:solidFill>
-                <a:latin typeface="HY엽서M"/>
-              </a:rPr>
-              <a:t>기타 뇌혈관 질환</a:t>
-            </a:r>
-          </a:p>
-        </p:txBody>
-      </p:sp>
-      <p:sp>
-        <p:nvSpPr>
-          <p:cNvPr id="25" name="TIER_L"/>
-          <p:cNvSpPr txBox="1"/>
-          <p:nvPr/>
-        </p:nvSpPr>
-        <p:spPr>
-          <a:xfrm>
-            <a:off x="558000" y="3229199"/>
-            <a:ext cx="2880000" cy="162000"/>
-          </a:xfrm>
-          <a:prstGeom prst="rect">
-            <a:avLst/>
-          </a:prstGeom>
-          <a:noFill/>
-        </p:spPr>
-        <p:txBody>
-          <a:bodyPr wrap="none" anchor="t" lIns="18000" rIns="18000" tIns="21600" bIns="21600">
-            <a:noAutofit/>
-          </a:bodyPr>
-          <a:lstStyle/>
-          <a:p>
-            <a:r>
-              <a:rPr sz="910" b="0">
-                <a:solidFill>
-                  <a:srgbClr val="4A556B"/>
-                </a:solidFill>
-                <a:latin typeface="HY엽서M"/>
-              </a:rPr>
-              <a:t>출혈 또는 경색증으로 명시되지 않은 뇌졸중</a:t>
-            </a:r>
           </a:p>
         </p:txBody>
       </p:sp>
@@ -3552,13 +3417,14 @@
         </p:nvSpPr>
         <p:spPr>
           <a:xfrm>
-            <a:off x="684000" y="3401999"/>
+            <a:off x="684000" y="3591000"/>
             <a:ext cx="1260000" cy="234000"/>
           </a:xfrm>
           <a:prstGeom prst="rect">
             <a:avLst/>
           </a:prstGeom>
           <a:noFill/>
+          <a:ln/>
         </p:spPr>
         <p:txBody>
           <a:bodyPr wrap="none" anchor="ctr" lIns="18000" rIns="18000" tIns="21600" bIns="21600">
@@ -3567,7 +3433,7 @@
           <a:lstStyle/>
           <a:p>
             <a:r>
-              <a:rPr sz="1470" b="1">
+              <a:rPr sz="1700" b="1">
                 <a:solidFill>
                   <a:srgbClr val="0E1E52"/>
                 </a:solidFill>
@@ -3586,7 +3452,7 @@
         </p:nvSpPr>
         <p:spPr>
           <a:xfrm>
-            <a:off x="1944000" y="3420000"/>
+            <a:off x="1944000" y="3609000"/>
             <a:ext cx="1296000" cy="198000"/>
           </a:xfrm>
           <a:prstGeom prst="rect">
@@ -3595,7 +3461,7 @@
           <a:solidFill>
             <a:srgbClr val="FFFFFF"/>
           </a:solidFill>
-          <a:ln w="6350">
+          <a:ln w="10160">
             <a:solidFill>
               <a:srgbClr val="D0D6E0"/>
             </a:solidFill>
@@ -3607,108 +3473,6 @@
           <a:lstStyle/>
           <a:p>
             <a:pPr algn="ctr"/>
-          </a:p>
-        </p:txBody>
-      </p:sp>
-      <p:sp>
-        <p:nvSpPr>
-          <p:cNvPr id="30" name="TIER_L"/>
-          <p:cNvSpPr txBox="1"/>
-          <p:nvPr/>
-        </p:nvSpPr>
-        <p:spPr>
-          <a:xfrm>
-            <a:off x="684000" y="3654000"/>
-            <a:ext cx="2628000" cy="162000"/>
-          </a:xfrm>
-          <a:prstGeom prst="rect">
-            <a:avLst/>
-          </a:prstGeom>
-          <a:noFill/>
-        </p:spPr>
-        <p:txBody>
-          <a:bodyPr wrap="none" anchor="t" lIns="18000" rIns="18000" tIns="21600" bIns="21600">
-            <a:noAutofit/>
-          </a:bodyPr>
-          <a:lstStyle/>
-          <a:p>
-            <a:r>
-              <a:rPr sz="910" b="0">
-                <a:solidFill>
-                  <a:srgbClr val="4A556B"/>
-                </a:solidFill>
-                <a:latin typeface="HY엽서M"/>
-              </a:rPr>
-              <a:t>대뇌동맥의 폐쇄 및 협착</a:t>
-            </a:r>
-          </a:p>
-        </p:txBody>
-      </p:sp>
-      <p:sp>
-        <p:nvSpPr>
-          <p:cNvPr id="31" name="TIER_L"/>
-          <p:cNvSpPr txBox="1"/>
-          <p:nvPr/>
-        </p:nvSpPr>
-        <p:spPr>
-          <a:xfrm>
-            <a:off x="684000" y="3776400"/>
-            <a:ext cx="2628000" cy="162000"/>
-          </a:xfrm>
-          <a:prstGeom prst="rect">
-            <a:avLst/>
-          </a:prstGeom>
-          <a:noFill/>
-        </p:spPr>
-        <p:txBody>
-          <a:bodyPr wrap="none" anchor="t" lIns="18000" rIns="18000" tIns="21600" bIns="21600">
-            <a:noAutofit/>
-          </a:bodyPr>
-          <a:lstStyle/>
-          <a:p>
-            <a:r>
-              <a:rPr sz="910" b="0">
-                <a:solidFill>
-                  <a:srgbClr val="4A556B"/>
-                </a:solidFill>
-                <a:latin typeface="HY엽서M"/>
-              </a:rPr>
-              <a:t>뇌전동맥의 폐쇄 및 협착</a:t>
-            </a:r>
-          </a:p>
-        </p:txBody>
-      </p:sp>
-      <p:sp>
-        <p:nvSpPr>
-          <p:cNvPr id="32" name="TIER_L"/>
-          <p:cNvSpPr txBox="1"/>
-          <p:nvPr/>
-        </p:nvSpPr>
-        <p:spPr>
-          <a:xfrm>
-            <a:off x="684000" y="3898800"/>
-            <a:ext cx="2628000" cy="162000"/>
-          </a:xfrm>
-          <a:prstGeom prst="rect">
-            <a:avLst/>
-          </a:prstGeom>
-          <a:noFill/>
-        </p:spPr>
-        <p:txBody>
-          <a:bodyPr wrap="none" anchor="t" lIns="18000" rIns="18000" tIns="21600" bIns="21600">
-            <a:noAutofit/>
-          </a:bodyPr>
-          <a:lstStyle/>
-          <a:p>
-            <a:r>
-              <a:rPr sz="910" b="0">
-                <a:solidFill>
-                  <a:srgbClr val="4A556B"/>
-                </a:solidFill>
-                <a:latin typeface="HY엽서M"/>
-              </a:rPr>
-              <a:t>뇌경색증</a:t>
-            </a:r>
           </a:p>
         </p:txBody>
       </p:sp>
@@ -3750,13 +3514,14 @@
         </p:nvSpPr>
         <p:spPr>
           <a:xfrm>
-            <a:off x="810000" y="4086000"/>
+            <a:off x="810000" y="4230000"/>
             <a:ext cx="1080000" cy="234000"/>
           </a:xfrm>
           <a:prstGeom prst="rect">
             <a:avLst/>
           </a:prstGeom>
           <a:noFill/>
+          <a:ln/>
         </p:spPr>
         <p:txBody>
           <a:bodyPr wrap="none" anchor="ctr" lIns="18000" rIns="18000" tIns="21600" bIns="21600">
@@ -3765,7 +3530,7 @@
           <a:lstStyle/>
           <a:p>
             <a:r>
-              <a:rPr sz="1470" b="1">
+              <a:rPr sz="1700" b="1">
                 <a:solidFill>
                   <a:srgbClr val="0E1E52"/>
                 </a:solidFill>
@@ -3784,7 +3549,7 @@
         </p:nvSpPr>
         <p:spPr>
           <a:xfrm>
-            <a:off x="1889999" y="4104000"/>
+            <a:off x="1889999" y="4248000"/>
             <a:ext cx="1224000" cy="198000"/>
           </a:xfrm>
           <a:prstGeom prst="rect">
@@ -3793,7 +3558,7 @@
           <a:solidFill>
             <a:srgbClr val="FFFFFF"/>
           </a:solidFill>
-          <a:ln w="6350">
+          <a:ln w="10160">
             <a:solidFill>
               <a:srgbClr val="D0D6E0"/>
             </a:solidFill>
@@ -3810,40 +3575,6 @@
       </p:sp>
       <p:sp>
         <p:nvSpPr>
-          <p:cNvPr id="37" name="TIER_L"/>
-          <p:cNvSpPr txBox="1"/>
-          <p:nvPr/>
-        </p:nvSpPr>
-        <p:spPr>
-          <a:xfrm>
-            <a:off x="810000" y="4338000"/>
-            <a:ext cx="2376000" cy="162000"/>
-          </a:xfrm>
-          <a:prstGeom prst="rect">
-            <a:avLst/>
-          </a:prstGeom>
-          <a:noFill/>
-        </p:spPr>
-        <p:txBody>
-          <a:bodyPr wrap="none" anchor="t" lIns="18000" rIns="18000" tIns="21600" bIns="21600">
-            <a:noAutofit/>
-          </a:bodyPr>
-          <a:lstStyle/>
-          <a:p>
-            <a:r>
-              <a:rPr sz="910" b="0">
-                <a:solidFill>
-                  <a:srgbClr val="4A556B"/>
-                </a:solidFill>
-                <a:latin typeface="HY엽서M"/>
-              </a:rPr>
-              <a:t>기타 비외상성 머리내 출혈 · 뇌내출혈 · 지주막하 출혈</a:t>
-            </a:r>
-          </a:p>
-        </p:txBody>
-      </p:sp>
-      <p:sp>
-        <p:nvSpPr>
           <p:cNvPr id="38" name="CARD"/>
           <p:cNvSpPr/>
           <p:nvPr/>
@@ -3859,7 +3590,7 @@
           <a:solidFill>
             <a:srgbClr val="F3FAF4"/>
           </a:solidFill>
-          <a:ln w="12700">
+          <a:ln w="20320">
             <a:solidFill>
               <a:srgbClr val="1E7B34"/>
             </a:solidFill>
@@ -3912,13 +3643,14 @@
         </p:nvSpPr>
         <p:spPr>
           <a:xfrm>
-            <a:off x="558000" y="5454000"/>
+            <a:off x="558000" y="5444965"/>
             <a:ext cx="2808000" cy="234000"/>
           </a:xfrm>
           <a:prstGeom prst="rect">
             <a:avLst/>
           </a:prstGeom>
           <a:noFill/>
+          <a:ln/>
         </p:spPr>
         <p:txBody>
           <a:bodyPr wrap="none" anchor="ctr" lIns="18000" rIns="18000" tIns="21600" bIns="21600">
@@ -3927,7 +3659,7 @@
           <a:lstStyle/>
           <a:p>
             <a:r>
-              <a:rPr sz="1470" b="1">
+              <a:rPr sz="1700" b="1">
                 <a:solidFill>
                   <a:srgbClr val="0E1E52"/>
                 </a:solidFill>
@@ -3946,8 +3678,8 @@
         </p:nvSpPr>
         <p:spPr>
           <a:xfrm>
-            <a:off x="1944000" y="5720400"/>
-            <a:ext cx="1440000" cy="115200"/>
+            <a:off x="1944000" y="5721350"/>
+            <a:ext cx="1440000" cy="146050"/>
           </a:xfrm>
           <a:prstGeom prst="rect">
             <a:avLst/>
@@ -3955,7 +3687,7 @@
           <a:solidFill>
             <a:srgbClr val="FFFFFF"/>
           </a:solidFill>
-          <a:ln w="6350">
+          <a:ln w="10160">
             <a:solidFill>
               <a:srgbClr val="D0D6E0"/>
             </a:solidFill>
@@ -3978,8 +3710,8 @@
         </p:nvSpPr>
         <p:spPr>
           <a:xfrm>
-            <a:off x="1944000" y="5857200"/>
-            <a:ext cx="1440000" cy="115200"/>
+            <a:off x="1944000" y="5901690"/>
+            <a:ext cx="1440000" cy="146050"/>
           </a:xfrm>
           <a:prstGeom prst="rect">
             <a:avLst/>
@@ -3987,7 +3719,7 @@
           <a:solidFill>
             <a:srgbClr val="FFFFFF"/>
           </a:solidFill>
-          <a:ln w="6350">
+          <a:ln w="10160">
             <a:solidFill>
               <a:srgbClr val="D0D6E0"/>
             </a:solidFill>
@@ -4010,8 +3742,8 @@
         </p:nvSpPr>
         <p:spPr>
           <a:xfrm>
-            <a:off x="1944000" y="5993999"/>
-            <a:ext cx="1440000" cy="115200"/>
+            <a:off x="1944000" y="6082030"/>
+            <a:ext cx="1440000" cy="146050"/>
           </a:xfrm>
           <a:prstGeom prst="rect">
             <a:avLst/>
@@ -4019,7 +3751,7 @@
           <a:solidFill>
             <a:srgbClr val="FFFFFF"/>
           </a:solidFill>
-          <a:ln w="6350">
+          <a:ln w="10160">
             <a:solidFill>
               <a:srgbClr val="D0D6E0"/>
             </a:solidFill>
@@ -4042,8 +3774,8 @@
         </p:nvSpPr>
         <p:spPr>
           <a:xfrm>
-            <a:off x="1944000" y="6130799"/>
-            <a:ext cx="1440000" cy="115200"/>
+            <a:off x="1944000" y="6262370"/>
+            <a:ext cx="1440000" cy="146050"/>
           </a:xfrm>
           <a:prstGeom prst="rect">
             <a:avLst/>
@@ -4051,7 +3783,7 @@
           <a:solidFill>
             <a:srgbClr val="FFFFFF"/>
           </a:solidFill>
-          <a:ln w="6350">
+          <a:ln w="10160">
             <a:solidFill>
               <a:srgbClr val="D0D6E0"/>
             </a:solidFill>
@@ -4074,8 +3806,8 @@
         </p:nvSpPr>
         <p:spPr>
           <a:xfrm>
-            <a:off x="1944000" y="6267599"/>
-            <a:ext cx="1440000" cy="115200"/>
+            <a:off x="1944000" y="6442710"/>
+            <a:ext cx="1440000" cy="146050"/>
           </a:xfrm>
           <a:prstGeom prst="rect">
             <a:avLst/>
@@ -4083,7 +3815,7 @@
           <a:solidFill>
             <a:srgbClr val="FFFFFF"/>
           </a:solidFill>
-          <a:ln w="6350">
+          <a:ln w="10160">
             <a:solidFill>
               <a:srgbClr val="D0D6E0"/>
             </a:solidFill>
@@ -4106,8 +3838,8 @@
         </p:nvSpPr>
         <p:spPr>
           <a:xfrm>
-            <a:off x="1944000" y="6404399"/>
-            <a:ext cx="1440000" cy="115200"/>
+            <a:off x="1944000" y="6623050"/>
+            <a:ext cx="1440000" cy="146050"/>
           </a:xfrm>
           <a:prstGeom prst="rect">
             <a:avLst/>
@@ -4115,7 +3847,7 @@
           <a:solidFill>
             <a:srgbClr val="FFFFFF"/>
           </a:solidFill>
-          <a:ln w="6350">
+          <a:ln w="10160">
             <a:solidFill>
               <a:srgbClr val="D0D6E0"/>
             </a:solidFill>
@@ -4138,8 +3870,8 @@
         </p:nvSpPr>
         <p:spPr>
           <a:xfrm>
-            <a:off x="1944000" y="6541199"/>
-            <a:ext cx="1440000" cy="115200"/>
+            <a:off x="1944000" y="6803390"/>
+            <a:ext cx="1440000" cy="146050"/>
           </a:xfrm>
           <a:prstGeom prst="rect">
             <a:avLst/>
@@ -4147,7 +3879,7 @@
           <a:solidFill>
             <a:srgbClr val="FFFFFF"/>
           </a:solidFill>
-          <a:ln w="6350">
+          <a:ln w="10160">
             <a:solidFill>
               <a:srgbClr val="D0D6E0"/>
             </a:solidFill>
@@ -4170,8 +3902,8 @@
         </p:nvSpPr>
         <p:spPr>
           <a:xfrm>
-            <a:off x="576000" y="6714000"/>
-            <a:ext cx="2772000" cy="1260000"/>
+            <a:off x="576000" y="7046899"/>
+            <a:ext cx="2772000" cy="927100"/>
           </a:xfrm>
           <a:prstGeom prst="rect">
             <a:avLst/>
@@ -4200,13 +3932,14 @@
         </p:nvSpPr>
         <p:spPr>
           <a:xfrm>
-            <a:off x="684000" y="6750000"/>
+            <a:off x="684000" y="7145799"/>
             <a:ext cx="1260000" cy="234000"/>
           </a:xfrm>
           <a:prstGeom prst="rect">
             <a:avLst/>
           </a:prstGeom>
           <a:noFill/>
+          <a:ln/>
         </p:spPr>
         <p:txBody>
           <a:bodyPr wrap="none" anchor="ctr" lIns="18000" rIns="18000" tIns="21600" bIns="21600">
@@ -4215,7 +3948,7 @@
           <a:lstStyle/>
           <a:p>
             <a:r>
-              <a:rPr sz="1470" b="1">
+              <a:rPr sz="1700" b="1">
                 <a:solidFill>
                   <a:srgbClr val="0E1E52"/>
                 </a:solidFill>
@@ -4234,7 +3967,7 @@
         </p:nvSpPr>
         <p:spPr>
           <a:xfrm>
-            <a:off x="1944000" y="6768000"/>
+            <a:off x="1944000" y="7163798"/>
             <a:ext cx="1296000" cy="198000"/>
           </a:xfrm>
           <a:prstGeom prst="rect">
@@ -4243,7 +3976,7 @@
           <a:solidFill>
             <a:srgbClr val="FFFFFF"/>
           </a:solidFill>
-          <a:ln w="6350">
+          <a:ln w="10160">
             <a:solidFill>
               <a:srgbClr val="D0D6E0"/>
             </a:solidFill>
@@ -4260,48 +3993,14 @@
       </p:sp>
       <p:sp>
         <p:nvSpPr>
-          <p:cNvPr id="69" name="TIER_L"/>
-          <p:cNvSpPr txBox="1"/>
-          <p:nvPr/>
-        </p:nvSpPr>
-        <p:spPr>
-          <a:xfrm>
-            <a:off x="684000" y="7002000"/>
-            <a:ext cx="2628000" cy="162000"/>
-          </a:xfrm>
-          <a:prstGeom prst="rect">
-            <a:avLst/>
-          </a:prstGeom>
-          <a:noFill/>
-        </p:spPr>
-        <p:txBody>
-          <a:bodyPr wrap="none" anchor="t" lIns="18000" rIns="18000" tIns="21600" bIns="21600">
-            <a:noAutofit/>
-          </a:bodyPr>
-          <a:lstStyle/>
-          <a:p>
-            <a:r>
-              <a:rPr sz="910" b="0">
-                <a:solidFill>
-                  <a:srgbClr val="4A556B"/>
-                </a:solidFill>
-                <a:latin typeface="HY엽서M"/>
-              </a:rPr>
-              <a:t>협심증 · 기타 급성 허혈성심장질환 · 만성 허혈심장병</a:t>
-            </a:r>
-          </a:p>
-        </p:txBody>
-      </p:sp>
-      <p:sp>
-        <p:nvSpPr>
           <p:cNvPr id="70" name="TIER"/>
           <p:cNvSpPr/>
           <p:nvPr/>
         </p:nvSpPr>
         <p:spPr>
           <a:xfrm>
-            <a:off x="702000" y="7416000"/>
-            <a:ext cx="2520000" cy="503999"/>
+            <a:off x="702000" y="7478699"/>
+            <a:ext cx="2520000" cy="431800"/>
           </a:xfrm>
           <a:prstGeom prst="rect">
             <a:avLst/>
@@ -4330,13 +4029,14 @@
         </p:nvSpPr>
         <p:spPr>
           <a:xfrm>
-            <a:off x="810000" y="7452000"/>
-            <a:ext cx="1152000" cy="234000"/>
-          </a:xfrm>
-          <a:prstGeom prst="rect">
-            <a:avLst/>
-          </a:prstGeom>
-          <a:noFill/>
+            <a:off x="810000" y="7577599"/>
+            <a:ext cx="1371600" cy="234000"/>
+          </a:xfrm>
+          <a:prstGeom prst="rect">
+            <a:avLst/>
+          </a:prstGeom>
+          <a:noFill/>
+          <a:ln/>
         </p:spPr>
         <p:txBody>
           <a:bodyPr wrap="none" anchor="ctr" lIns="18000" rIns="18000" tIns="21600" bIns="21600">
@@ -4345,7 +4045,7 @@
           <a:lstStyle/>
           <a:p>
             <a:r>
-              <a:rPr sz="1400" b="1">
+              <a:rPr sz="1700" b="1">
                 <a:solidFill>
                   <a:srgbClr val="0E1E52"/>
                 </a:solidFill>
@@ -4364,8 +4064,8 @@
         </p:nvSpPr>
         <p:spPr>
           <a:xfrm>
-            <a:off x="1961999" y="7470000"/>
-            <a:ext cx="1152000" cy="198000"/>
+            <a:off x="2133600" y="7595598"/>
+            <a:ext cx="990600" cy="198000"/>
           </a:xfrm>
           <a:prstGeom prst="rect">
             <a:avLst/>
@@ -4373,7 +4073,7 @@
           <a:solidFill>
             <a:srgbClr val="FFFFFF"/>
           </a:solidFill>
-          <a:ln w="6350">
+          <a:ln w="10160">
             <a:solidFill>
               <a:srgbClr val="D0D6E0"/>
             </a:solidFill>
@@ -4390,40 +4090,6 @@
       </p:sp>
       <p:sp>
         <p:nvSpPr>
-          <p:cNvPr id="74" name="TIER_L"/>
-          <p:cNvSpPr txBox="1"/>
-          <p:nvPr/>
-        </p:nvSpPr>
-        <p:spPr>
-          <a:xfrm>
-            <a:off x="810000" y="7704000"/>
-            <a:ext cx="2376000" cy="162000"/>
-          </a:xfrm>
-          <a:prstGeom prst="rect">
-            <a:avLst/>
-          </a:prstGeom>
-          <a:noFill/>
-        </p:spPr>
-        <p:txBody>
-          <a:bodyPr wrap="none" anchor="t" lIns="18000" rIns="18000" tIns="21600" bIns="21600">
-            <a:noAutofit/>
-          </a:bodyPr>
-          <a:lstStyle/>
-          <a:p>
-            <a:r>
-              <a:rPr sz="910" b="0">
-                <a:solidFill>
-                  <a:srgbClr val="4A556B"/>
-                </a:solidFill>
-                <a:latin typeface="HY엽서M"/>
-              </a:rPr>
-              <a:t>급성심근경색증 · 속발성 심근경색증 · 특정 합병증</a:t>
-            </a:r>
-          </a:p>
-        </p:txBody>
-      </p:sp>
-      <p:sp>
-        <p:nvSpPr>
           <p:cNvPr id="75" name="CARD"/>
           <p:cNvSpPr/>
           <p:nvPr/>
@@ -4439,7 +4105,7 @@
           <a:solidFill>
             <a:srgbClr val="EAF2FD"/>
           </a:solidFill>
-          <a:ln w="12700">
+          <a:ln w="20320">
             <a:solidFill>
               <a:srgbClr val="1E7B34"/>
             </a:solidFill>
@@ -4462,7 +4128,7 @@
         </p:nvSpPr>
         <p:spPr>
           <a:xfrm>
-            <a:off x="2088000" y="8708400"/>
+            <a:off x="2088000" y="8633200"/>
             <a:ext cx="1440000" cy="180000"/>
           </a:xfrm>
           <a:prstGeom prst="rect">
@@ -4471,7 +4137,7 @@
           <a:solidFill>
             <a:srgbClr val="FFFFFF"/>
           </a:solidFill>
-          <a:ln w="6350">
+          <a:ln w="10160">
             <a:solidFill>
               <a:srgbClr val="D0D6E0"/>
             </a:solidFill>
@@ -4494,7 +4160,7 @@
         </p:nvSpPr>
         <p:spPr>
           <a:xfrm>
-            <a:off x="2088000" y="8910000"/>
+            <a:off x="2088000" y="8861300"/>
             <a:ext cx="1440000" cy="180000"/>
           </a:xfrm>
           <a:prstGeom prst="rect">
@@ -4503,7 +4169,7 @@
           <a:solidFill>
             <a:srgbClr val="FFFFFF"/>
           </a:solidFill>
-          <a:ln w="6350">
+          <a:ln w="10160">
             <a:solidFill>
               <a:srgbClr val="D0D6E0"/>
             </a:solidFill>
@@ -4526,7 +4192,7 @@
         </p:nvSpPr>
         <p:spPr>
           <a:xfrm>
-            <a:off x="2088000" y="9111600"/>
+            <a:off x="2088000" y="9089400"/>
             <a:ext cx="1440000" cy="180000"/>
           </a:xfrm>
           <a:prstGeom prst="rect">
@@ -4535,7 +4201,7 @@
           <a:solidFill>
             <a:srgbClr val="FFFFFF"/>
           </a:solidFill>
-          <a:ln w="6350">
+          <a:ln w="10160">
             <a:solidFill>
               <a:srgbClr val="D0D6E0"/>
             </a:solidFill>
@@ -4567,7 +4233,7 @@
           <a:solidFill>
             <a:srgbClr val="FDEDED"/>
           </a:solidFill>
-          <a:ln w="12700">
+          <a:ln w="20320">
             <a:solidFill>
               <a:srgbClr val="1E7B34"/>
             </a:solidFill>
@@ -4590,7 +4256,7 @@
         </p:nvSpPr>
         <p:spPr>
           <a:xfrm>
-            <a:off x="2088000" y="9932400"/>
+            <a:off x="2088000" y="9857200"/>
             <a:ext cx="1440000" cy="180000"/>
           </a:xfrm>
           <a:prstGeom prst="rect">
@@ -4599,7 +4265,7 @@
           <a:solidFill>
             <a:srgbClr val="FFFFFF"/>
           </a:solidFill>
-          <a:ln w="6350">
+          <a:ln w="10160">
             <a:solidFill>
               <a:srgbClr val="D0D6E0"/>
             </a:solidFill>
@@ -4622,7 +4288,7 @@
         </p:nvSpPr>
         <p:spPr>
           <a:xfrm>
-            <a:off x="2088000" y="10134000"/>
+            <a:off x="2088000" y="10085300"/>
             <a:ext cx="1440000" cy="180000"/>
           </a:xfrm>
           <a:prstGeom prst="rect">
@@ -4631,7 +4297,7 @@
           <a:solidFill>
             <a:srgbClr val="FFFFFF"/>
           </a:solidFill>
-          <a:ln w="6350">
+          <a:ln w="10160">
             <a:solidFill>
               <a:srgbClr val="D0D6E0"/>
             </a:solidFill>
@@ -4654,7 +4320,7 @@
         </p:nvSpPr>
         <p:spPr>
           <a:xfrm>
-            <a:off x="2088000" y="10335600"/>
+            <a:off x="2088000" y="10313400"/>
             <a:ext cx="1440000" cy="180000"/>
           </a:xfrm>
           <a:prstGeom prst="rect">
@@ -4663,7 +4329,7 @@
           <a:solidFill>
             <a:srgbClr val="FFFFFF"/>
           </a:solidFill>
-          <a:ln w="6350">
+          <a:ln w="10160">
             <a:solidFill>
               <a:srgbClr val="D0D6E0"/>
             </a:solidFill>
@@ -4725,7 +4391,7 @@
           <a:solidFill>
             <a:srgbClr val="FFFFFF"/>
           </a:solidFill>
-          <a:ln w="9525">
+          <a:ln w="15240">
             <a:solidFill>
               <a:srgbClr val="D9DEE8"/>
             </a:solidFill>
@@ -4748,7 +4414,7 @@
         </p:nvSpPr>
         <p:spPr>
           <a:xfrm>
-            <a:off x="2088000" y="11606400"/>
+            <a:off x="2088000" y="11531200"/>
             <a:ext cx="1440000" cy="180000"/>
           </a:xfrm>
           <a:prstGeom prst="rect">
@@ -4757,7 +4423,7 @@
           <a:solidFill>
             <a:srgbClr val="FFFFFF"/>
           </a:solidFill>
-          <a:ln w="6350">
+          <a:ln w="10160">
             <a:solidFill>
               <a:srgbClr val="D0D6E0"/>
             </a:solidFill>
@@ -4780,7 +4446,7 @@
         </p:nvSpPr>
         <p:spPr>
           <a:xfrm>
-            <a:off x="2088000" y="11808000"/>
+            <a:off x="2088000" y="11752760"/>
             <a:ext cx="1440000" cy="180000"/>
           </a:xfrm>
           <a:prstGeom prst="rect">
@@ -4789,7 +4455,7 @@
           <a:solidFill>
             <a:srgbClr val="FFFFFF"/>
           </a:solidFill>
-          <a:ln w="6350">
+          <a:ln w="10160">
             <a:solidFill>
               <a:srgbClr val="D0D6E0"/>
             </a:solidFill>
@@ -4812,7 +4478,7 @@
         </p:nvSpPr>
         <p:spPr>
           <a:xfrm>
-            <a:off x="2088000" y="12009600"/>
+            <a:off x="2088000" y="11974320"/>
             <a:ext cx="1440000" cy="180000"/>
           </a:xfrm>
           <a:prstGeom prst="rect">
@@ -4821,7 +4487,7 @@
           <a:solidFill>
             <a:srgbClr val="FFFFFF"/>
           </a:solidFill>
-          <a:ln w="6350">
+          <a:ln w="10160">
             <a:solidFill>
               <a:srgbClr val="D0D6E0"/>
             </a:solidFill>
@@ -4844,7 +4510,7 @@
         </p:nvSpPr>
         <p:spPr>
           <a:xfrm>
-            <a:off x="2088000" y="12211200"/>
+            <a:off x="2088000" y="12195880"/>
             <a:ext cx="1440000" cy="180000"/>
           </a:xfrm>
           <a:prstGeom prst="rect">
@@ -4853,7 +4519,7 @@
           <a:solidFill>
             <a:srgbClr val="FFFFFF"/>
           </a:solidFill>
-          <a:ln w="6350">
+          <a:ln w="10160">
             <a:solidFill>
               <a:srgbClr val="D0D6E0"/>
             </a:solidFill>
@@ -4876,7 +4542,7 @@
         </p:nvSpPr>
         <p:spPr>
           <a:xfrm>
-            <a:off x="2088000" y="12412800"/>
+            <a:off x="2088000" y="12417439"/>
             <a:ext cx="1440000" cy="180000"/>
           </a:xfrm>
           <a:prstGeom prst="rect">
@@ -4885,7 +4551,7 @@
           <a:solidFill>
             <a:srgbClr val="FFFFFF"/>
           </a:solidFill>
-          <a:ln w="6350">
+          <a:ln w="10160">
             <a:solidFill>
               <a:srgbClr val="D0D6E0"/>
             </a:solidFill>
@@ -4908,7 +4574,7 @@
         </p:nvSpPr>
         <p:spPr>
           <a:xfrm>
-            <a:off x="2088000" y="12614400"/>
+            <a:off x="2088000" y="12639000"/>
             <a:ext cx="1440000" cy="180000"/>
           </a:xfrm>
           <a:prstGeom prst="rect">
@@ -4917,7 +4583,7 @@
           <a:solidFill>
             <a:srgbClr val="FFFFFF"/>
           </a:solidFill>
-          <a:ln w="6350">
+          <a:ln w="10160">
             <a:solidFill>
               <a:srgbClr val="D0D6E0"/>
             </a:solidFill>
@@ -4979,7 +4645,7 @@
           <a:solidFill>
             <a:srgbClr val="FFFFFF"/>
           </a:solidFill>
-          <a:ln w="9525">
+          <a:ln w="15240">
             <a:solidFill>
               <a:srgbClr val="D9DEE8"/>
             </a:solidFill>
@@ -5002,7 +4668,7 @@
         </p:nvSpPr>
         <p:spPr>
           <a:xfrm>
-            <a:off x="2088000" y="13932000"/>
+            <a:off x="2088000" y="13856800"/>
             <a:ext cx="1440000" cy="180000"/>
           </a:xfrm>
           <a:prstGeom prst="rect">
@@ -5011,7 +4677,7 @@
           <a:solidFill>
             <a:srgbClr val="FFFFFF"/>
           </a:solidFill>
-          <a:ln w="6350">
+          <a:ln w="10160">
             <a:solidFill>
               <a:srgbClr val="D0D6E0"/>
             </a:solidFill>
@@ -5034,7 +4700,7 @@
         </p:nvSpPr>
         <p:spPr>
           <a:xfrm>
-            <a:off x="2088000" y="14133600"/>
+            <a:off x="2088000" y="14091666"/>
             <a:ext cx="1440000" cy="180000"/>
           </a:xfrm>
           <a:prstGeom prst="rect">
@@ -5043,7 +4709,7 @@
           <a:solidFill>
             <a:srgbClr val="FFFFFF"/>
           </a:solidFill>
-          <a:ln w="6350">
+          <a:ln w="10160">
             <a:solidFill>
               <a:srgbClr val="D0D6E0"/>
             </a:solidFill>
@@ -5066,7 +4732,7 @@
         </p:nvSpPr>
         <p:spPr>
           <a:xfrm>
-            <a:off x="2088000" y="14335200"/>
+            <a:off x="2088000" y="14326533"/>
             <a:ext cx="1440000" cy="180000"/>
           </a:xfrm>
           <a:prstGeom prst="rect">
@@ -5075,7 +4741,7 @@
           <a:solidFill>
             <a:srgbClr val="FFFFFF"/>
           </a:solidFill>
-          <a:ln w="6350">
+          <a:ln w="10160">
             <a:solidFill>
               <a:srgbClr val="D0D6E0"/>
             </a:solidFill>
@@ -5098,7 +4764,7 @@
         </p:nvSpPr>
         <p:spPr>
           <a:xfrm>
-            <a:off x="2088000" y="14536800"/>
+            <a:off x="2088000" y="14561400"/>
             <a:ext cx="1440000" cy="180000"/>
           </a:xfrm>
           <a:prstGeom prst="rect">
@@ -5107,7 +4773,7 @@
           <a:solidFill>
             <a:srgbClr val="FFFFFF"/>
           </a:solidFill>
-          <a:ln w="6350">
+          <a:ln w="10160">
             <a:solidFill>
               <a:srgbClr val="D0D6E0"/>
             </a:solidFill>
@@ -5169,7 +4835,7 @@
           <a:solidFill>
             <a:srgbClr val="F3FAF4"/>
           </a:solidFill>
-          <a:ln w="12700">
+          <a:ln w="20320">
             <a:solidFill>
               <a:srgbClr val="1E7B34"/>
             </a:solidFill>
@@ -5222,13 +4888,14 @@
         </p:nvSpPr>
         <p:spPr>
           <a:xfrm>
-            <a:off x="3942000" y="2627999"/>
+            <a:off x="3942000" y="2735999"/>
             <a:ext cx="1296000" cy="234000"/>
           </a:xfrm>
           <a:prstGeom prst="rect">
             <a:avLst/>
           </a:prstGeom>
           <a:noFill/>
+          <a:ln/>
         </p:spPr>
         <p:txBody>
           <a:bodyPr wrap="none" anchor="ctr" lIns="18000" rIns="18000" tIns="21600" bIns="21600">
@@ -5237,7 +4904,7 @@
           <a:lstStyle/>
           <a:p>
             <a:r>
-              <a:rPr sz="1609" b="1">
+              <a:rPr sz="1700" b="1">
                 <a:solidFill>
                   <a:srgbClr val="0E1E52"/>
                 </a:solidFill>
@@ -5256,7 +4923,7 @@
         </p:nvSpPr>
         <p:spPr>
           <a:xfrm>
-            <a:off x="5238000" y="2646000"/>
+            <a:off x="5238000" y="2753999"/>
             <a:ext cx="1512000" cy="198000"/>
           </a:xfrm>
           <a:prstGeom prst="rect">
@@ -5265,7 +4932,7 @@
           <a:solidFill>
             <a:srgbClr val="FFFFFF"/>
           </a:solidFill>
-          <a:ln w="6350">
+          <a:ln w="10160">
             <a:solidFill>
               <a:srgbClr val="D0D6E0"/>
             </a:solidFill>
@@ -5277,40 +4944,6 @@
           <a:lstStyle/>
           <a:p>
             <a:pPr algn="ctr"/>
-          </a:p>
-        </p:txBody>
-      </p:sp>
-      <p:sp>
-        <p:nvSpPr>
-          <p:cNvPr id="148" name="TIER_L"/>
-          <p:cNvSpPr txBox="1"/>
-          <p:nvPr/>
-        </p:nvSpPr>
-        <p:spPr>
-          <a:xfrm>
-            <a:off x="3942000" y="2879999"/>
-            <a:ext cx="2880000" cy="162000"/>
-          </a:xfrm>
-          <a:prstGeom prst="rect">
-            <a:avLst/>
-          </a:prstGeom>
-          <a:noFill/>
-        </p:spPr>
-        <p:txBody>
-          <a:bodyPr wrap="none" anchor="t" lIns="18000" rIns="18000" tIns="21600" bIns="21600">
-            <a:noAutofit/>
-          </a:bodyPr>
-          <a:lstStyle/>
-          <a:p>
-            <a:r>
-              <a:rPr sz="1050" b="0">
-                <a:solidFill>
-                  <a:srgbClr val="4A556B"/>
-                </a:solidFill>
-                <a:latin typeface="HY엽서M"/>
-              </a:rPr>
-              <a:t>유사암 제외 모든 암 · 폐·위·간·췌장 등 · 100%</a:t>
-            </a:r>
           </a:p>
         </p:txBody>
       </p:sp>
@@ -5352,13 +4985,14 @@
         </p:nvSpPr>
         <p:spPr>
           <a:xfrm>
-            <a:off x="4068000" y="3149999"/>
+            <a:off x="4068000" y="3410998"/>
             <a:ext cx="1116000" cy="234000"/>
           </a:xfrm>
           <a:prstGeom prst="rect">
             <a:avLst/>
           </a:prstGeom>
           <a:noFill/>
+          <a:ln/>
         </p:spPr>
         <p:txBody>
           <a:bodyPr wrap="none" anchor="ctr" lIns="18000" rIns="18000" tIns="21600" bIns="21600">
@@ -5367,7 +5001,7 @@
           <a:lstStyle/>
           <a:p>
             <a:r>
-              <a:rPr sz="1539" b="1">
+              <a:rPr sz="1700" b="1">
                 <a:solidFill>
                   <a:srgbClr val="0E1E52"/>
                 </a:solidFill>
@@ -5386,7 +5020,7 @@
         </p:nvSpPr>
         <p:spPr>
           <a:xfrm>
-            <a:off x="5183999" y="3167999"/>
+            <a:off x="5183999" y="3428998"/>
             <a:ext cx="1440000" cy="198000"/>
           </a:xfrm>
           <a:prstGeom prst="rect">
@@ -5395,7 +5029,7 @@
           <a:solidFill>
             <a:srgbClr val="FFFFFF"/>
           </a:solidFill>
-          <a:ln w="6350">
+          <a:ln w="10160">
             <a:solidFill>
               <a:srgbClr val="D0D6E0"/>
             </a:solidFill>
@@ -5407,74 +5041,6 @@
           <a:lstStyle/>
           <a:p>
             <a:pPr algn="ctr"/>
-          </a:p>
-        </p:txBody>
-      </p:sp>
-      <p:sp>
-        <p:nvSpPr>
-          <p:cNvPr id="153" name="TIER_L"/>
-          <p:cNvSpPr txBox="1"/>
-          <p:nvPr/>
-        </p:nvSpPr>
-        <p:spPr>
-          <a:xfrm>
-            <a:off x="4068000" y="3401999"/>
-            <a:ext cx="2628000" cy="162000"/>
-          </a:xfrm>
-          <a:prstGeom prst="rect">
-            <a:avLst/>
-          </a:prstGeom>
-          <a:noFill/>
-        </p:spPr>
-        <p:txBody>
-          <a:bodyPr wrap="none" anchor="t" lIns="18000" rIns="18000" tIns="21600" bIns="21600">
-            <a:noAutofit/>
-          </a:bodyPr>
-          <a:lstStyle/>
-          <a:p>
-            <a:r>
-              <a:rPr sz="1050" b="0">
-                <a:solidFill>
-                  <a:srgbClr val="4A556B"/>
-                </a:solidFill>
-                <a:latin typeface="HY엽서M"/>
-              </a:rPr>
-              <a:t>백혈병 · 뇌암 · 골수암 · 식도암 · 췌장암 등</a:t>
-            </a:r>
-          </a:p>
-        </p:txBody>
-      </p:sp>
-      <p:sp>
-        <p:nvSpPr>
-          <p:cNvPr id="154" name="TIER_L"/>
-          <p:cNvSpPr txBox="1"/>
-          <p:nvPr/>
-        </p:nvSpPr>
-        <p:spPr>
-          <a:xfrm>
-            <a:off x="4068000" y="3553199"/>
-            <a:ext cx="2628000" cy="162000"/>
-          </a:xfrm>
-          <a:prstGeom prst="rect">
-            <a:avLst/>
-          </a:prstGeom>
-          <a:noFill/>
-        </p:spPr>
-        <p:txBody>
-          <a:bodyPr wrap="none" anchor="t" lIns="18000" rIns="18000" tIns="21600" bIns="21600">
-            <a:noAutofit/>
-          </a:bodyPr>
-          <a:lstStyle/>
-          <a:p>
-            <a:r>
-              <a:rPr sz="1050" b="0">
-                <a:solidFill>
-                  <a:srgbClr val="4A556B"/>
-                </a:solidFill>
-                <a:latin typeface="HY엽서M"/>
-              </a:rPr>
-              <a:t>(회사별 범위 상이)</a:t>
-            </a:r>
           </a:p>
         </p:txBody>
       </p:sp>
@@ -5516,13 +5082,14 @@
         </p:nvSpPr>
         <p:spPr>
           <a:xfrm>
-            <a:off x="3942000" y="4121999"/>
+            <a:off x="3942000" y="4230000"/>
             <a:ext cx="1728000" cy="234000"/>
           </a:xfrm>
           <a:prstGeom prst="rect">
             <a:avLst/>
           </a:prstGeom>
           <a:noFill/>
+          <a:ln/>
         </p:spPr>
         <p:txBody>
           <a:bodyPr wrap="none" anchor="ctr" lIns="18000" rIns="18000" tIns="21600" bIns="21600">
@@ -5531,7 +5098,7 @@
           <a:lstStyle/>
           <a:p>
             <a:r>
-              <a:rPr sz="1539" b="1">
+              <a:rPr sz="1700" b="1">
                 <a:solidFill>
                   <a:srgbClr val="0E1E52"/>
                 </a:solidFill>
@@ -5550,7 +5117,7 @@
         </p:nvSpPr>
         <p:spPr>
           <a:xfrm>
-            <a:off x="5670000" y="4140000"/>
+            <a:off x="5670000" y="4248000"/>
             <a:ext cx="1080000" cy="198000"/>
           </a:xfrm>
           <a:prstGeom prst="rect">
@@ -5559,7 +5126,7 @@
           <a:solidFill>
             <a:srgbClr val="FFFFFF"/>
           </a:solidFill>
-          <a:ln w="6350">
+          <a:ln w="10160">
             <a:solidFill>
               <a:srgbClr val="D0D6E0"/>
             </a:solidFill>
@@ -5571,40 +5138,6 @@
           <a:lstStyle/>
           <a:p>
             <a:pPr algn="ctr"/>
-          </a:p>
-        </p:txBody>
-      </p:sp>
-      <p:sp>
-        <p:nvSpPr>
-          <p:cNvPr id="159" name="TIER_L"/>
-          <p:cNvSpPr txBox="1"/>
-          <p:nvPr/>
-        </p:nvSpPr>
-        <p:spPr>
-          <a:xfrm>
-            <a:off x="3942000" y="4374000"/>
-            <a:ext cx="2880000" cy="162000"/>
-          </a:xfrm>
-          <a:prstGeom prst="rect">
-            <a:avLst/>
-          </a:prstGeom>
-          <a:noFill/>
-        </p:spPr>
-        <p:txBody>
-          <a:bodyPr wrap="none" anchor="t" lIns="18000" rIns="18000" tIns="21600" bIns="21600">
-            <a:noAutofit/>
-          </a:bodyPr>
-          <a:lstStyle/>
-          <a:p>
-            <a:r>
-              <a:rPr sz="1050" b="0">
-                <a:solidFill>
-                  <a:srgbClr val="4A556B"/>
-                </a:solidFill>
-                <a:latin typeface="HY엽서M"/>
-              </a:rPr>
-              <a:t>유방 · 자궁 · 방광 · 전립선 · 대장점막내암</a:t>
-            </a:r>
           </a:p>
         </p:txBody>
       </p:sp>
@@ -5646,13 +5179,14 @@
         </p:nvSpPr>
         <p:spPr>
           <a:xfrm>
-            <a:off x="3942000" y="4733999"/>
+            <a:off x="3942000" y="4860000"/>
             <a:ext cx="1728000" cy="234000"/>
           </a:xfrm>
           <a:prstGeom prst="rect">
             <a:avLst/>
           </a:prstGeom>
           <a:noFill/>
+          <a:ln/>
         </p:spPr>
         <p:txBody>
           <a:bodyPr wrap="none" anchor="ctr" lIns="18000" rIns="18000" tIns="21600" bIns="21600">
@@ -5661,7 +5195,7 @@
           <a:lstStyle/>
           <a:p>
             <a:r>
-              <a:rPr sz="1609" b="1">
+              <a:rPr sz="1700" b="1">
                 <a:solidFill>
                   <a:srgbClr val="0E1E52"/>
                 </a:solidFill>
@@ -5680,7 +5214,7 @@
         </p:nvSpPr>
         <p:spPr>
           <a:xfrm>
-            <a:off x="5670000" y="4752000"/>
+            <a:off x="5670000" y="4878000"/>
             <a:ext cx="1080000" cy="198000"/>
           </a:xfrm>
           <a:prstGeom prst="rect">
@@ -5689,7 +5223,7 @@
           <a:solidFill>
             <a:srgbClr val="FFFFFF"/>
           </a:solidFill>
-          <a:ln w="6350">
+          <a:ln w="10160">
             <a:solidFill>
               <a:srgbClr val="D0D6E0"/>
             </a:solidFill>
@@ -5701,40 +5235,6 @@
           <a:lstStyle/>
           <a:p>
             <a:pPr algn="ctr"/>
-          </a:p>
-        </p:txBody>
-      </p:sp>
-      <p:sp>
-        <p:nvSpPr>
-          <p:cNvPr id="164" name="TIER_L"/>
-          <p:cNvSpPr txBox="1"/>
-          <p:nvPr/>
-        </p:nvSpPr>
-        <p:spPr>
-          <a:xfrm>
-            <a:off x="3942000" y="4986000"/>
-            <a:ext cx="2880000" cy="162000"/>
-          </a:xfrm>
-          <a:prstGeom prst="rect">
-            <a:avLst/>
-          </a:prstGeom>
-          <a:noFill/>
-        </p:spPr>
-        <p:txBody>
-          <a:bodyPr wrap="none" anchor="t" lIns="18000" rIns="18000" tIns="21600" bIns="21600">
-            <a:noAutofit/>
-          </a:bodyPr>
-          <a:lstStyle/>
-          <a:p>
-            <a:r>
-              <a:rPr sz="1050" b="0">
-                <a:solidFill>
-                  <a:srgbClr val="4A556B"/>
-                </a:solidFill>
-                <a:latin typeface="HY엽서M"/>
-              </a:rPr>
-              <a:t>기타피부암 · 갑상선암 · 제자리암 · 경계성종양</a:t>
-            </a:r>
           </a:p>
         </p:txBody>
       </p:sp>
@@ -5783,6 +5283,7 @@
             <a:avLst/>
           </a:prstGeom>
           <a:noFill/>
+          <a:ln/>
         </p:spPr>
         <p:txBody>
           <a:bodyPr wrap="none" anchor="ctr" lIns="18000" rIns="18000" tIns="21600" bIns="21600">
@@ -5791,7 +5292,7 @@
           <a:lstStyle/>
           <a:p>
             <a:r>
-              <a:rPr sz="1539" b="1">
+              <a:rPr sz="1700" b="1">
                 <a:solidFill>
                   <a:srgbClr val="0E1E52"/>
                 </a:solidFill>
@@ -5819,7 +5320,7 @@
           <a:solidFill>
             <a:srgbClr val="FFFFFF"/>
           </a:solidFill>
-          <a:ln w="6350">
+          <a:ln w="10160">
             <a:solidFill>
               <a:srgbClr val="D0D6E0"/>
             </a:solidFill>
@@ -5879,6 +5380,7 @@
             <a:avLst/>
           </a:prstGeom>
           <a:noFill/>
+          <a:ln/>
         </p:spPr>
         <p:txBody>
           <a:bodyPr wrap="none" anchor="ctr" lIns="18000" rIns="18000" tIns="21600" bIns="21600">
@@ -5887,7 +5389,7 @@
           <a:lstStyle/>
           <a:p>
             <a:r>
-              <a:rPr sz="1539" b="1">
+              <a:rPr sz="1700" b="1">
                 <a:solidFill>
                   <a:srgbClr val="0E1E52"/>
                 </a:solidFill>
@@ -5915,7 +5417,7 @@
           <a:solidFill>
             <a:srgbClr val="FFFFFF"/>
           </a:solidFill>
-          <a:ln w="6350">
+          <a:ln w="10160">
             <a:solidFill>
               <a:srgbClr val="D0D6E0"/>
             </a:solidFill>
@@ -5947,7 +5449,7 @@
           <a:solidFill>
             <a:srgbClr val="FEF3EA"/>
           </a:solidFill>
-          <a:ln w="12700">
+          <a:ln w="20320">
             <a:solidFill>
               <a:srgbClr val="1E7B34"/>
             </a:solidFill>
@@ -5970,7 +5472,7 @@
         </p:nvSpPr>
         <p:spPr>
           <a:xfrm>
-            <a:off x="5472000" y="6836399"/>
+            <a:off x="5472000" y="6761198"/>
             <a:ext cx="1440000" cy="180000"/>
           </a:xfrm>
           <a:prstGeom prst="rect">
@@ -5979,7 +5481,7 @@
           <a:solidFill>
             <a:srgbClr val="FFFFFF"/>
           </a:solidFill>
-          <a:ln w="6350">
+          <a:ln w="10160">
             <a:solidFill>
               <a:srgbClr val="D0D6E0"/>
             </a:solidFill>
@@ -6002,7 +5504,7 @@
         </p:nvSpPr>
         <p:spPr>
           <a:xfrm>
-            <a:off x="5472000" y="7045199"/>
+            <a:off x="5472000" y="6991888"/>
             <a:ext cx="1440000" cy="180000"/>
           </a:xfrm>
           <a:prstGeom prst="rect">
@@ -6011,7 +5513,7 @@
           <a:solidFill>
             <a:srgbClr val="FFFFFF"/>
           </a:solidFill>
-          <a:ln w="6350">
+          <a:ln w="10160">
             <a:solidFill>
               <a:srgbClr val="D0D6E0"/>
             </a:solidFill>
@@ -6034,7 +5536,7 @@
         </p:nvSpPr>
         <p:spPr>
           <a:xfrm>
-            <a:off x="5472000" y="7253999"/>
+            <a:off x="5472000" y="7222577"/>
             <a:ext cx="1440000" cy="180000"/>
           </a:xfrm>
           <a:prstGeom prst="rect">
@@ -6043,7 +5545,7 @@
           <a:solidFill>
             <a:srgbClr val="FFFFFF"/>
           </a:solidFill>
-          <a:ln w="6350">
+          <a:ln w="10160">
             <a:solidFill>
               <a:srgbClr val="D0D6E0"/>
             </a:solidFill>
@@ -6066,7 +5568,7 @@
         </p:nvSpPr>
         <p:spPr>
           <a:xfrm>
-            <a:off x="5472000" y="7462799"/>
+            <a:off x="5472000" y="7453266"/>
             <a:ext cx="1440000" cy="180000"/>
           </a:xfrm>
           <a:prstGeom prst="rect">
@@ -6075,7 +5577,7 @@
           <a:solidFill>
             <a:srgbClr val="FFFFFF"/>
           </a:solidFill>
-          <a:ln w="6350">
+          <a:ln w="10160">
             <a:solidFill>
               <a:srgbClr val="D0D6E0"/>
             </a:solidFill>
@@ -6098,7 +5600,7 @@
         </p:nvSpPr>
         <p:spPr>
           <a:xfrm>
-            <a:off x="5472000" y="7671599"/>
+            <a:off x="5472000" y="7683955"/>
             <a:ext cx="1440000" cy="180000"/>
           </a:xfrm>
           <a:prstGeom prst="rect">
@@ -6107,7 +5609,7 @@
           <a:solidFill>
             <a:srgbClr val="FFFFFF"/>
           </a:solidFill>
-          <a:ln w="6350">
+          <a:ln w="10160">
             <a:solidFill>
               <a:srgbClr val="D0D6E0"/>
             </a:solidFill>
@@ -6130,7 +5632,7 @@
         </p:nvSpPr>
         <p:spPr>
           <a:xfrm>
-            <a:off x="5472000" y="7880399"/>
+            <a:off x="5472000" y="7914643"/>
             <a:ext cx="1440000" cy="180000"/>
           </a:xfrm>
           <a:prstGeom prst="rect">
@@ -6139,7 +5641,7 @@
           <a:solidFill>
             <a:srgbClr val="FFFFFF"/>
           </a:solidFill>
-          <a:ln w="6350">
+          <a:ln w="10160">
             <a:solidFill>
               <a:srgbClr val="D0D6E0"/>
             </a:solidFill>
@@ -6162,7 +5664,7 @@
         </p:nvSpPr>
         <p:spPr>
           <a:xfrm>
-            <a:off x="5472000" y="8089199"/>
+            <a:off x="5472000" y="8145332"/>
             <a:ext cx="1440000" cy="180000"/>
           </a:xfrm>
           <a:prstGeom prst="rect">
@@ -6171,7 +5673,7 @@
           <a:solidFill>
             <a:srgbClr val="FFFFFF"/>
           </a:solidFill>
-          <a:ln w="6350">
+          <a:ln w="10160">
             <a:solidFill>
               <a:srgbClr val="D0D6E0"/>
             </a:solidFill>
@@ -6224,7 +5726,7 @@
         </p:nvSpPr>
         <p:spPr>
           <a:xfrm>
-            <a:off x="5472000" y="8333999"/>
+            <a:off x="5472000" y="8376022"/>
             <a:ext cx="1440000" cy="180000"/>
           </a:xfrm>
           <a:prstGeom prst="rect">
@@ -6233,7 +5735,7 @@
           <a:solidFill>
             <a:srgbClr val="FFFFFF"/>
           </a:solidFill>
-          <a:ln w="6350">
+          <a:ln w="10160">
             <a:solidFill>
               <a:srgbClr val="D0D6E0"/>
             </a:solidFill>
@@ -6256,7 +5758,7 @@
         </p:nvSpPr>
         <p:spPr>
           <a:xfrm>
-            <a:off x="5472000" y="8542799"/>
+            <a:off x="5472000" y="8606711"/>
             <a:ext cx="1440000" cy="180000"/>
           </a:xfrm>
           <a:prstGeom prst="rect">
@@ -6265,7 +5767,7 @@
           <a:solidFill>
             <a:srgbClr val="FFFFFF"/>
           </a:solidFill>
-          <a:ln w="6350">
+          <a:ln w="10160">
             <a:solidFill>
               <a:srgbClr val="D0D6E0"/>
             </a:solidFill>
@@ -6288,7 +5790,7 @@
         </p:nvSpPr>
         <p:spPr>
           <a:xfrm>
-            <a:off x="5472000" y="8751599"/>
+            <a:off x="5472000" y="8837399"/>
             <a:ext cx="1440000" cy="180000"/>
           </a:xfrm>
           <a:prstGeom prst="rect">
@@ -6297,7 +5799,7 @@
           <a:solidFill>
             <a:srgbClr val="FFFFFF"/>
           </a:solidFill>
-          <a:ln w="6350">
+          <a:ln w="10160">
             <a:solidFill>
               <a:srgbClr val="D0D6E0"/>
             </a:solidFill>
@@ -6359,7 +5861,7 @@
           <a:solidFill>
             <a:srgbClr val="FFFFFF"/>
           </a:solidFill>
-          <a:ln w="9525">
+          <a:ln w="15240">
             <a:solidFill>
               <a:srgbClr val="D9DEE8"/>
             </a:solidFill>
@@ -6382,7 +5884,7 @@
         </p:nvSpPr>
         <p:spPr>
           <a:xfrm>
-            <a:off x="5256000" y="10310399"/>
+            <a:off x="5256000" y="10235198"/>
             <a:ext cx="1655999" cy="151200"/>
           </a:xfrm>
           <a:prstGeom prst="rect">
@@ -6391,7 +5893,7 @@
           <a:solidFill>
             <a:srgbClr val="FFFFFF"/>
           </a:solidFill>
-          <a:ln w="6350">
+          <a:ln w="10160">
             <a:solidFill>
               <a:srgbClr val="D0D6E0"/>
             </a:solidFill>
@@ -6414,7 +5916,7 @@
         </p:nvSpPr>
         <p:spPr>
           <a:xfrm>
-            <a:off x="5256000" y="10483200"/>
+            <a:off x="5256000" y="10414019"/>
             <a:ext cx="1655999" cy="151200"/>
           </a:xfrm>
           <a:prstGeom prst="rect">
@@ -6423,7 +5925,7 @@
           <a:solidFill>
             <a:srgbClr val="FFFFFF"/>
           </a:solidFill>
-          <a:ln w="6350">
+          <a:ln w="10160">
             <a:solidFill>
               <a:srgbClr val="D0D6E0"/>
             </a:solidFill>
@@ -6446,7 +5948,7 @@
         </p:nvSpPr>
         <p:spPr>
           <a:xfrm>
-            <a:off x="5256000" y="10656000"/>
+            <a:off x="5256000" y="10592839"/>
             <a:ext cx="1655999" cy="151200"/>
           </a:xfrm>
           <a:prstGeom prst="rect">
@@ -6455,7 +5957,7 @@
           <a:solidFill>
             <a:srgbClr val="FFFFFF"/>
           </a:solidFill>
-          <a:ln w="6350">
+          <a:ln w="10160">
             <a:solidFill>
               <a:srgbClr val="D0D6E0"/>
             </a:solidFill>
@@ -6478,7 +5980,7 @@
         </p:nvSpPr>
         <p:spPr>
           <a:xfrm>
-            <a:off x="4968000" y="10828800"/>
+            <a:off x="4968000" y="10771659"/>
             <a:ext cx="1944000" cy="151200"/>
           </a:xfrm>
           <a:prstGeom prst="rect">
@@ -6487,7 +5989,7 @@
           <a:solidFill>
             <a:srgbClr val="FFFFFF"/>
           </a:solidFill>
-          <a:ln w="6350">
+          <a:ln w="10160">
             <a:solidFill>
               <a:srgbClr val="D0D6E0"/>
             </a:solidFill>
@@ -6510,7 +6012,7 @@
         </p:nvSpPr>
         <p:spPr>
           <a:xfrm>
-            <a:off x="5256000" y="11001600"/>
+            <a:off x="5256000" y="10950479"/>
             <a:ext cx="1655999" cy="151200"/>
           </a:xfrm>
           <a:prstGeom prst="rect">
@@ -6519,7 +6021,7 @@
           <a:solidFill>
             <a:srgbClr val="FFFFFF"/>
           </a:solidFill>
-          <a:ln w="6350">
+          <a:ln w="10160">
             <a:solidFill>
               <a:srgbClr val="D0D6E0"/>
             </a:solidFill>
@@ -6542,7 +6044,7 @@
         </p:nvSpPr>
         <p:spPr>
           <a:xfrm>
-            <a:off x="5256000" y="11174400"/>
+            <a:off x="5256000" y="11129299"/>
             <a:ext cx="1655999" cy="151200"/>
           </a:xfrm>
           <a:prstGeom prst="rect">
@@ -6551,7 +6053,7 @@
           <a:solidFill>
             <a:srgbClr val="FFFFFF"/>
           </a:solidFill>
-          <a:ln w="6350">
+          <a:ln w="10160">
             <a:solidFill>
               <a:srgbClr val="D0D6E0"/>
             </a:solidFill>
@@ -6574,7 +6076,7 @@
         </p:nvSpPr>
         <p:spPr>
           <a:xfrm>
-            <a:off x="5256000" y="11347200"/>
+            <a:off x="5256000" y="11308119"/>
             <a:ext cx="1655999" cy="151200"/>
           </a:xfrm>
           <a:prstGeom prst="rect">
@@ -6583,7 +6085,7 @@
           <a:solidFill>
             <a:srgbClr val="FFFFFF"/>
           </a:solidFill>
-          <a:ln w="6350">
+          <a:ln w="10160">
             <a:solidFill>
               <a:srgbClr val="D0D6E0"/>
             </a:solidFill>
@@ -6606,7 +6108,7 @@
         </p:nvSpPr>
         <p:spPr>
           <a:xfrm>
-            <a:off x="5256000" y="11520000"/>
+            <a:off x="5256000" y="11486939"/>
             <a:ext cx="1655999" cy="151200"/>
           </a:xfrm>
           <a:prstGeom prst="rect">
@@ -6615,7 +6117,7 @@
           <a:solidFill>
             <a:srgbClr val="FFFFFF"/>
           </a:solidFill>
-          <a:ln w="6350">
+          <a:ln w="10160">
             <a:solidFill>
               <a:srgbClr val="D0D6E0"/>
             </a:solidFill>
@@ -6638,7 +6140,7 @@
         </p:nvSpPr>
         <p:spPr>
           <a:xfrm>
-            <a:off x="5256000" y="11692799"/>
+            <a:off x="5256000" y="11665758"/>
             <a:ext cx="1655999" cy="151200"/>
           </a:xfrm>
           <a:prstGeom prst="rect">
@@ -6647,7 +6149,7 @@
           <a:solidFill>
             <a:srgbClr val="FFFFFF"/>
           </a:solidFill>
-          <a:ln w="6350">
+          <a:ln w="10160">
             <a:solidFill>
               <a:srgbClr val="D0D6E0"/>
             </a:solidFill>
@@ -6670,7 +6172,7 @@
         </p:nvSpPr>
         <p:spPr>
           <a:xfrm>
-            <a:off x="5256000" y="11865599"/>
+            <a:off x="5256000" y="11844579"/>
             <a:ext cx="1655999" cy="151200"/>
           </a:xfrm>
           <a:prstGeom prst="rect">
@@ -6679,7 +6181,7 @@
           <a:solidFill>
             <a:srgbClr val="FFFFFF"/>
           </a:solidFill>
-          <a:ln w="6350">
+          <a:ln w="10160">
             <a:solidFill>
               <a:srgbClr val="D0D6E0"/>
             </a:solidFill>
@@ -6702,7 +6204,7 @@
         </p:nvSpPr>
         <p:spPr>
           <a:xfrm>
-            <a:off x="5256000" y="12038399"/>
+            <a:off x="5256000" y="12023400"/>
             <a:ext cx="1655999" cy="151200"/>
           </a:xfrm>
           <a:prstGeom prst="rect">
@@ -6711,7 +6213,7 @@
           <a:solidFill>
             <a:srgbClr val="FFFFFF"/>
           </a:solidFill>
-          <a:ln w="6350">
+          <a:ln w="10160">
             <a:solidFill>
               <a:srgbClr val="D0D6E0"/>
             </a:solidFill>
@@ -6743,7 +6245,7 @@
           <a:solidFill>
             <a:srgbClr val="FFFFFF"/>
           </a:solidFill>
-          <a:ln w="9525">
+          <a:ln w="15240">
             <a:solidFill>
               <a:srgbClr val="D9DEE8"/>
             </a:solidFill>
@@ -6766,7 +6268,7 @@
         </p:nvSpPr>
         <p:spPr>
           <a:xfrm>
-            <a:off x="5256000" y="12848400"/>
+            <a:off x="5256000" y="12773199"/>
             <a:ext cx="1655999" cy="151200"/>
           </a:xfrm>
           <a:prstGeom prst="rect">
@@ -6775,7 +6277,7 @@
           <a:solidFill>
             <a:srgbClr val="FFFFFF"/>
           </a:solidFill>
-          <a:ln w="6350">
+          <a:ln w="10160">
             <a:solidFill>
               <a:srgbClr val="D0D6E0"/>
             </a:solidFill>
@@ -6798,7 +6300,7 @@
         </p:nvSpPr>
         <p:spPr>
           <a:xfrm>
-            <a:off x="5256000" y="13021199"/>
+            <a:off x="5256000" y="12952019"/>
             <a:ext cx="1655999" cy="151200"/>
           </a:xfrm>
           <a:prstGeom prst="rect">
@@ -6807,7 +6309,7 @@
           <a:solidFill>
             <a:srgbClr val="FFFFFF"/>
           </a:solidFill>
-          <a:ln w="6350">
+          <a:ln w="10160">
             <a:solidFill>
               <a:srgbClr val="D0D6E0"/>
             </a:solidFill>
@@ -6830,7 +6332,7 @@
         </p:nvSpPr>
         <p:spPr>
           <a:xfrm>
-            <a:off x="5256000" y="13193999"/>
+            <a:off x="5256000" y="13130839"/>
             <a:ext cx="1655999" cy="151200"/>
           </a:xfrm>
           <a:prstGeom prst="rect">
@@ -6839,7 +6341,7 @@
           <a:solidFill>
             <a:srgbClr val="FFFFFF"/>
           </a:solidFill>
-          <a:ln w="6350">
+          <a:ln w="10160">
             <a:solidFill>
               <a:srgbClr val="D0D6E0"/>
             </a:solidFill>
@@ -6862,7 +6364,7 @@
         </p:nvSpPr>
         <p:spPr>
           <a:xfrm>
-            <a:off x="4968000" y="13366799"/>
+            <a:off x="4968000" y="13309659"/>
             <a:ext cx="1944000" cy="151200"/>
           </a:xfrm>
           <a:prstGeom prst="rect">
@@ -6871,7 +6373,7 @@
           <a:solidFill>
             <a:srgbClr val="FFFFFF"/>
           </a:solidFill>
-          <a:ln w="6350">
+          <a:ln w="10160">
             <a:solidFill>
               <a:srgbClr val="D0D6E0"/>
             </a:solidFill>
@@ -6894,7 +6396,7 @@
         </p:nvSpPr>
         <p:spPr>
           <a:xfrm>
-            <a:off x="5256000" y="13539599"/>
+            <a:off x="5256000" y="13488479"/>
             <a:ext cx="1655999" cy="151200"/>
           </a:xfrm>
           <a:prstGeom prst="rect">
@@ -6903,7 +6405,7 @@
           <a:solidFill>
             <a:srgbClr val="FFFFFF"/>
           </a:solidFill>
-          <a:ln w="6350">
+          <a:ln w="10160">
             <a:solidFill>
               <a:srgbClr val="D0D6E0"/>
             </a:solidFill>
@@ -6926,7 +6428,7 @@
         </p:nvSpPr>
         <p:spPr>
           <a:xfrm>
-            <a:off x="5256000" y="13712399"/>
+            <a:off x="5256000" y="13667299"/>
             <a:ext cx="1655999" cy="151200"/>
           </a:xfrm>
           <a:prstGeom prst="rect">
@@ -6935,7 +6437,7 @@
           <a:solidFill>
             <a:srgbClr val="FFFFFF"/>
           </a:solidFill>
-          <a:ln w="6350">
+          <a:ln w="10160">
             <a:solidFill>
               <a:srgbClr val="D0D6E0"/>
             </a:solidFill>
@@ -6958,7 +6460,7 @@
         </p:nvSpPr>
         <p:spPr>
           <a:xfrm>
-            <a:off x="5256000" y="13885199"/>
+            <a:off x="5256000" y="13846119"/>
             <a:ext cx="1655999" cy="151200"/>
           </a:xfrm>
           <a:prstGeom prst="rect">
@@ -6967,7 +6469,7 @@
           <a:solidFill>
             <a:srgbClr val="FFFFFF"/>
           </a:solidFill>
-          <a:ln w="6350">
+          <a:ln w="10160">
             <a:solidFill>
               <a:srgbClr val="D0D6E0"/>
             </a:solidFill>
@@ -6990,7 +6492,7 @@
         </p:nvSpPr>
         <p:spPr>
           <a:xfrm>
-            <a:off x="5256000" y="14057999"/>
+            <a:off x="5256000" y="14024939"/>
             <a:ext cx="1655999" cy="151200"/>
           </a:xfrm>
           <a:prstGeom prst="rect">
@@ -6999,7 +6501,7 @@
           <a:solidFill>
             <a:srgbClr val="FFFFFF"/>
           </a:solidFill>
-          <a:ln w="6350">
+          <a:ln w="10160">
             <a:solidFill>
               <a:srgbClr val="D0D6E0"/>
             </a:solidFill>
@@ -7022,7 +6524,7 @@
         </p:nvSpPr>
         <p:spPr>
           <a:xfrm>
-            <a:off x="5256000" y="14230799"/>
+            <a:off x="5256000" y="14203759"/>
             <a:ext cx="1655999" cy="151200"/>
           </a:xfrm>
           <a:prstGeom prst="rect">
@@ -7031,7 +6533,7 @@
           <a:solidFill>
             <a:srgbClr val="FFFFFF"/>
           </a:solidFill>
-          <a:ln w="6350">
+          <a:ln w="10160">
             <a:solidFill>
               <a:srgbClr val="D0D6E0"/>
             </a:solidFill>
@@ -7054,7 +6556,7 @@
         </p:nvSpPr>
         <p:spPr>
           <a:xfrm>
-            <a:off x="5256000" y="14403599"/>
+            <a:off x="5256000" y="14382579"/>
             <a:ext cx="1655999" cy="151200"/>
           </a:xfrm>
           <a:prstGeom prst="rect">
@@ -7063,7 +6565,7 @@
           <a:solidFill>
             <a:srgbClr val="FFFFFF"/>
           </a:solidFill>
-          <a:ln w="6350">
+          <a:ln w="10160">
             <a:solidFill>
               <a:srgbClr val="D0D6E0"/>
             </a:solidFill>
@@ -7086,7 +6588,7 @@
         </p:nvSpPr>
         <p:spPr>
           <a:xfrm>
-            <a:off x="5256000" y="14576399"/>
+            <a:off x="5256000" y="14561400"/>
             <a:ext cx="1655999" cy="151200"/>
           </a:xfrm>
           <a:prstGeom prst="rect">
@@ -7095,7 +6597,7 @@
           <a:solidFill>
             <a:srgbClr val="FFFFFF"/>
           </a:solidFill>
-          <a:ln w="6350">
+          <a:ln w="10160">
             <a:solidFill>
               <a:srgbClr val="D0D6E0"/>
             </a:solidFill>
@@ -7157,7 +6659,7 @@
           <a:solidFill>
             <a:srgbClr val="FFFFFF"/>
           </a:solidFill>
-          <a:ln w="9525">
+          <a:ln w="15240">
             <a:solidFill>
               <a:srgbClr val="D9DEE8"/>
             </a:solidFill>
@@ -7180,7 +6682,7 @@
         </p:nvSpPr>
         <p:spPr>
           <a:xfrm>
-            <a:off x="8856000" y="2588400"/>
+            <a:off x="8856000" y="2513200"/>
             <a:ext cx="1440000" cy="180000"/>
           </a:xfrm>
           <a:prstGeom prst="rect">
@@ -7189,7 +6691,7 @@
           <a:solidFill>
             <a:srgbClr val="FFFFFF"/>
           </a:solidFill>
-          <a:ln w="6350">
+          <a:ln w="10160">
             <a:solidFill>
               <a:srgbClr val="D0D6E0"/>
             </a:solidFill>
@@ -7212,7 +6714,7 @@
         </p:nvSpPr>
         <p:spPr>
           <a:xfrm>
-            <a:off x="8856000" y="2789999"/>
+            <a:off x="8856000" y="2725888"/>
             <a:ext cx="1440000" cy="180000"/>
           </a:xfrm>
           <a:prstGeom prst="rect">
@@ -7221,7 +6723,7 @@
           <a:solidFill>
             <a:srgbClr val="FFFFFF"/>
           </a:solidFill>
-          <a:ln w="6350">
+          <a:ln w="10160">
             <a:solidFill>
               <a:srgbClr val="D0D6E0"/>
             </a:solidFill>
@@ -7244,7 +6746,7 @@
         </p:nvSpPr>
         <p:spPr>
           <a:xfrm>
-            <a:off x="8856000" y="2991599"/>
+            <a:off x="8856000" y="2938576"/>
             <a:ext cx="1440000" cy="180000"/>
           </a:xfrm>
           <a:prstGeom prst="rect">
@@ -7253,7 +6755,7 @@
           <a:solidFill>
             <a:srgbClr val="FFFFFF"/>
           </a:solidFill>
-          <a:ln w="6350">
+          <a:ln w="10160">
             <a:solidFill>
               <a:srgbClr val="D0D6E0"/>
             </a:solidFill>
@@ -7276,7 +6778,7 @@
         </p:nvSpPr>
         <p:spPr>
           <a:xfrm>
-            <a:off x="8856000" y="3193199"/>
+            <a:off x="8856000" y="3151265"/>
             <a:ext cx="1440000" cy="180000"/>
           </a:xfrm>
           <a:prstGeom prst="rect">
@@ -7285,7 +6787,7 @@
           <a:solidFill>
             <a:srgbClr val="FFFFFF"/>
           </a:solidFill>
-          <a:ln w="6350">
+          <a:ln w="10160">
             <a:solidFill>
               <a:srgbClr val="D0D6E0"/>
             </a:solidFill>
@@ -7308,7 +6810,7 @@
         </p:nvSpPr>
         <p:spPr>
           <a:xfrm>
-            <a:off x="8856000" y="3394800"/>
+            <a:off x="8856000" y="3363955"/>
             <a:ext cx="1440000" cy="180000"/>
           </a:xfrm>
           <a:prstGeom prst="rect">
@@ -7317,7 +6819,7 @@
           <a:solidFill>
             <a:srgbClr val="FFFFFF"/>
           </a:solidFill>
-          <a:ln w="6350">
+          <a:ln w="10160">
             <a:solidFill>
               <a:srgbClr val="D0D6E0"/>
             </a:solidFill>
@@ -7340,7 +6842,7 @@
         </p:nvSpPr>
         <p:spPr>
           <a:xfrm>
-            <a:off x="8856000" y="3596400"/>
+            <a:off x="8856000" y="3576644"/>
             <a:ext cx="1440000" cy="180000"/>
           </a:xfrm>
           <a:prstGeom prst="rect">
@@ -7349,7 +6851,7 @@
           <a:solidFill>
             <a:srgbClr val="FFFFFF"/>
           </a:solidFill>
-          <a:ln w="6350">
+          <a:ln w="10160">
             <a:solidFill>
               <a:srgbClr val="D0D6E0"/>
             </a:solidFill>
@@ -7372,7 +6874,7 @@
         </p:nvSpPr>
         <p:spPr>
           <a:xfrm>
-            <a:off x="8856000" y="3798000"/>
+            <a:off x="8856000" y="3789333"/>
             <a:ext cx="1440000" cy="180000"/>
           </a:xfrm>
           <a:prstGeom prst="rect">
@@ -7381,7 +6883,7 @@
           <a:solidFill>
             <a:srgbClr val="FFFFFF"/>
           </a:solidFill>
-          <a:ln w="6350">
+          <a:ln w="10160">
             <a:solidFill>
               <a:srgbClr val="D0D6E0"/>
             </a:solidFill>
@@ -7404,7 +6906,7 @@
         </p:nvSpPr>
         <p:spPr>
           <a:xfrm>
-            <a:off x="8856000" y="3999600"/>
+            <a:off x="8856000" y="4002022"/>
             <a:ext cx="1440000" cy="180000"/>
           </a:xfrm>
           <a:prstGeom prst="rect">
@@ -7413,7 +6915,7 @@
           <a:solidFill>
             <a:srgbClr val="FFFFFF"/>
           </a:solidFill>
-          <a:ln w="6350">
+          <a:ln w="10160">
             <a:solidFill>
               <a:srgbClr val="D0D6E0"/>
             </a:solidFill>
@@ -7436,7 +6938,7 @@
         </p:nvSpPr>
         <p:spPr>
           <a:xfrm>
-            <a:off x="8856000" y="4201200"/>
+            <a:off x="8856000" y="4214711"/>
             <a:ext cx="1440000" cy="180000"/>
           </a:xfrm>
           <a:prstGeom prst="rect">
@@ -7445,7 +6947,7 @@
           <a:solidFill>
             <a:srgbClr val="FFFFFF"/>
           </a:solidFill>
-          <a:ln w="6350">
+          <a:ln w="10160">
             <a:solidFill>
               <a:srgbClr val="D0D6E0"/>
             </a:solidFill>
@@ -7468,7 +6970,7 @@
         </p:nvSpPr>
         <p:spPr>
           <a:xfrm>
-            <a:off x="8856000" y="4402800"/>
+            <a:off x="8856000" y="4427400"/>
             <a:ext cx="1440000" cy="180000"/>
           </a:xfrm>
           <a:prstGeom prst="rect">
@@ -7477,7 +6979,7 @@
           <a:solidFill>
             <a:srgbClr val="FFFFFF"/>
           </a:solidFill>
-          <a:ln w="6350">
+          <a:ln w="10160">
             <a:solidFill>
               <a:srgbClr val="D0D6E0"/>
             </a:solidFill>
@@ -7509,7 +7011,7 @@
           <a:solidFill>
             <a:srgbClr val="FFFFFF"/>
           </a:solidFill>
-          <a:ln w="9525">
+          <a:ln w="15240">
             <a:solidFill>
               <a:srgbClr val="D9DEE8"/>
             </a:solidFill>
@@ -7532,7 +7034,7 @@
         </p:nvSpPr>
         <p:spPr>
           <a:xfrm>
-            <a:off x="8856000" y="5270400"/>
+            <a:off x="8856000" y="5195200"/>
             <a:ext cx="1440000" cy="180000"/>
           </a:xfrm>
           <a:prstGeom prst="rect">
@@ -7541,7 +7043,7 @@
           <a:solidFill>
             <a:srgbClr val="FFFFFF"/>
           </a:solidFill>
-          <a:ln w="6350">
+          <a:ln w="10160">
             <a:solidFill>
               <a:srgbClr val="D0D6E0"/>
             </a:solidFill>
@@ -7564,7 +7066,7 @@
         </p:nvSpPr>
         <p:spPr>
           <a:xfrm>
-            <a:off x="8856000" y="5472000"/>
+            <a:off x="8856000" y="5421749"/>
             <a:ext cx="1440000" cy="180000"/>
           </a:xfrm>
           <a:prstGeom prst="rect">
@@ -7573,7 +7075,7 @@
           <a:solidFill>
             <a:srgbClr val="FFFFFF"/>
           </a:solidFill>
-          <a:ln w="6350">
+          <a:ln w="10160">
             <a:solidFill>
               <a:srgbClr val="D0D6E0"/>
             </a:solidFill>
@@ -7596,7 +7098,7 @@
         </p:nvSpPr>
         <p:spPr>
           <a:xfrm>
-            <a:off x="8856000" y="5673600"/>
+            <a:off x="8856000" y="5648299"/>
             <a:ext cx="1440000" cy="180000"/>
           </a:xfrm>
           <a:prstGeom prst="rect">
@@ -7605,7 +7107,7 @@
           <a:solidFill>
             <a:srgbClr val="FFFFFF"/>
           </a:solidFill>
-          <a:ln w="6350">
+          <a:ln w="10160">
             <a:solidFill>
               <a:srgbClr val="D0D6E0"/>
             </a:solidFill>
@@ -7628,7 +7130,7 @@
         </p:nvSpPr>
         <p:spPr>
           <a:xfrm>
-            <a:off x="8856000" y="5875200"/>
+            <a:off x="8856000" y="5874849"/>
             <a:ext cx="1440000" cy="180000"/>
           </a:xfrm>
           <a:prstGeom prst="rect">
@@ -7637,7 +7139,7 @@
           <a:solidFill>
             <a:srgbClr val="FFFFFF"/>
           </a:solidFill>
-          <a:ln w="6350">
+          <a:ln w="10160">
             <a:solidFill>
               <a:srgbClr val="D0D6E0"/>
             </a:solidFill>
@@ -7660,7 +7162,7 @@
         </p:nvSpPr>
         <p:spPr>
           <a:xfrm>
-            <a:off x="8856000" y="6076800"/>
+            <a:off x="8856000" y="6101399"/>
             <a:ext cx="1440000" cy="180000"/>
           </a:xfrm>
           <a:prstGeom prst="rect">
@@ -7669,7 +7171,7 @@
           <a:solidFill>
             <a:srgbClr val="FFFFFF"/>
           </a:solidFill>
-          <a:ln w="6350">
+          <a:ln w="10160">
             <a:solidFill>
               <a:srgbClr val="D0D6E0"/>
             </a:solidFill>
@@ -7701,7 +7203,7 @@
           <a:solidFill>
             <a:srgbClr val="FFFFFF"/>
           </a:solidFill>
-          <a:ln w="9525">
+          <a:ln w="15240">
             <a:solidFill>
               <a:srgbClr val="D9DEE8"/>
             </a:solidFill>
@@ -7724,7 +7226,7 @@
         </p:nvSpPr>
         <p:spPr>
           <a:xfrm>
-            <a:off x="8856000" y="6944400"/>
+            <a:off x="8856000" y="6869200"/>
             <a:ext cx="1440000" cy="180000"/>
           </a:xfrm>
           <a:prstGeom prst="rect">
@@ -7733,7 +7235,7 @@
           <a:solidFill>
             <a:srgbClr val="FFFFFF"/>
           </a:solidFill>
-          <a:ln w="6350">
+          <a:ln w="10160">
             <a:solidFill>
               <a:srgbClr val="D0D6E0"/>
             </a:solidFill>
@@ -7756,7 +7258,7 @@
         </p:nvSpPr>
         <p:spPr>
           <a:xfrm>
-            <a:off x="8856000" y="7146000"/>
+            <a:off x="8856000" y="7104066"/>
             <a:ext cx="1440000" cy="180000"/>
           </a:xfrm>
           <a:prstGeom prst="rect">
@@ -7765,7 +7267,7 @@
           <a:solidFill>
             <a:srgbClr val="FFFFFF"/>
           </a:solidFill>
-          <a:ln w="6350">
+          <a:ln w="10160">
             <a:solidFill>
               <a:srgbClr val="D0D6E0"/>
             </a:solidFill>
@@ -7788,7 +7290,7 @@
         </p:nvSpPr>
         <p:spPr>
           <a:xfrm>
-            <a:off x="8856000" y="7347600"/>
+            <a:off x="8856000" y="7338933"/>
             <a:ext cx="1440000" cy="180000"/>
           </a:xfrm>
           <a:prstGeom prst="rect">
@@ -7797,7 +7299,7 @@
           <a:solidFill>
             <a:srgbClr val="FFFFFF"/>
           </a:solidFill>
-          <a:ln w="6350">
+          <a:ln w="10160">
             <a:solidFill>
               <a:srgbClr val="D0D6E0"/>
             </a:solidFill>
@@ -7820,7 +7322,7 @@
         </p:nvSpPr>
         <p:spPr>
           <a:xfrm>
-            <a:off x="8856000" y="7549200"/>
+            <a:off x="8856000" y="7573799"/>
             <a:ext cx="1440000" cy="180000"/>
           </a:xfrm>
           <a:prstGeom prst="rect">
@@ -7829,7 +7331,7 @@
           <a:solidFill>
             <a:srgbClr val="FFFFFF"/>
           </a:solidFill>
-          <a:ln w="6350">
+          <a:ln w="10160">
             <a:solidFill>
               <a:srgbClr val="D0D6E0"/>
             </a:solidFill>
@@ -7891,7 +7393,7 @@
           <a:solidFill>
             <a:srgbClr val="FFFFFF"/>
           </a:solidFill>
-          <a:ln w="9525">
+          <a:ln w="15240">
             <a:solidFill>
               <a:srgbClr val="D9DEE8"/>
             </a:solidFill>
@@ -7914,7 +7416,7 @@
         </p:nvSpPr>
         <p:spPr>
           <a:xfrm>
-            <a:off x="8856000" y="8866800"/>
+            <a:off x="8856000" y="8791600"/>
             <a:ext cx="1440000" cy="180000"/>
           </a:xfrm>
           <a:prstGeom prst="rect">
@@ -7923,7 +7425,7 @@
           <a:solidFill>
             <a:srgbClr val="FFFFFF"/>
           </a:solidFill>
-          <a:ln w="6350">
+          <a:ln w="10160">
             <a:solidFill>
               <a:srgbClr val="D0D6E0"/>
             </a:solidFill>
@@ -7946,7 +7448,7 @@
         </p:nvSpPr>
         <p:spPr>
           <a:xfrm>
-            <a:off x="8856000" y="9068400"/>
+            <a:off x="8856000" y="9000876"/>
             <a:ext cx="1440000" cy="180000"/>
           </a:xfrm>
           <a:prstGeom prst="rect">
@@ -7955,7 +7457,7 @@
           <a:solidFill>
             <a:srgbClr val="FFFFFF"/>
           </a:solidFill>
-          <a:ln w="6350">
+          <a:ln w="10160">
             <a:solidFill>
               <a:srgbClr val="D0D6E0"/>
             </a:solidFill>
@@ -7978,7 +7480,7 @@
         </p:nvSpPr>
         <p:spPr>
           <a:xfrm>
-            <a:off x="8856000" y="9270000"/>
+            <a:off x="8856000" y="9210153"/>
             <a:ext cx="1440000" cy="180000"/>
           </a:xfrm>
           <a:prstGeom prst="rect">
@@ -7987,7 +7489,7 @@
           <a:solidFill>
             <a:srgbClr val="FFFFFF"/>
           </a:solidFill>
-          <a:ln w="6350">
+          <a:ln w="10160">
             <a:solidFill>
               <a:srgbClr val="D0D6E0"/>
             </a:solidFill>
@@ -8010,7 +7512,7 @@
         </p:nvSpPr>
         <p:spPr>
           <a:xfrm>
-            <a:off x="8856000" y="9471600"/>
+            <a:off x="8856000" y="9419430"/>
             <a:ext cx="1440000" cy="180000"/>
           </a:xfrm>
           <a:prstGeom prst="rect">
@@ -8019,7 +7521,7 @@
           <a:solidFill>
             <a:srgbClr val="FFFFFF"/>
           </a:solidFill>
-          <a:ln w="6350">
+          <a:ln w="10160">
             <a:solidFill>
               <a:srgbClr val="D0D6E0"/>
             </a:solidFill>
@@ -8042,7 +7544,7 @@
         </p:nvSpPr>
         <p:spPr>
           <a:xfrm>
-            <a:off x="8856000" y="9673200"/>
+            <a:off x="8856000" y="9628707"/>
             <a:ext cx="1440000" cy="180000"/>
           </a:xfrm>
           <a:prstGeom prst="rect">
@@ -8051,7 +7553,7 @@
           <a:solidFill>
             <a:srgbClr val="FFFFFF"/>
           </a:solidFill>
-          <a:ln w="6350">
+          <a:ln w="10160">
             <a:solidFill>
               <a:srgbClr val="D0D6E0"/>
             </a:solidFill>
@@ -8074,7 +7576,7 @@
         </p:nvSpPr>
         <p:spPr>
           <a:xfrm>
-            <a:off x="8856000" y="9874799"/>
+            <a:off x="8856000" y="9837984"/>
             <a:ext cx="1440000" cy="180000"/>
           </a:xfrm>
           <a:prstGeom prst="rect">
@@ -8083,7 +7585,7 @@
           <a:solidFill>
             <a:srgbClr val="FFFFFF"/>
           </a:solidFill>
-          <a:ln w="6350">
+          <a:ln w="10160">
             <a:solidFill>
               <a:srgbClr val="D0D6E0"/>
             </a:solidFill>
@@ -8106,7 +7608,7 @@
         </p:nvSpPr>
         <p:spPr>
           <a:xfrm>
-            <a:off x="8856000" y="10076399"/>
+            <a:off x="8856000" y="10047261"/>
             <a:ext cx="1440000" cy="180000"/>
           </a:xfrm>
           <a:prstGeom prst="rect">
@@ -8115,7 +7617,7 @@
           <a:solidFill>
             <a:srgbClr val="FFFFFF"/>
           </a:solidFill>
-          <a:ln w="6350">
+          <a:ln w="10160">
             <a:solidFill>
               <a:srgbClr val="D0D6E0"/>
             </a:solidFill>
@@ -8138,7 +7640,7 @@
         </p:nvSpPr>
         <p:spPr>
           <a:xfrm>
-            <a:off x="8856000" y="10277999"/>
+            <a:off x="8856000" y="10256538"/>
             <a:ext cx="1440000" cy="180000"/>
           </a:xfrm>
           <a:prstGeom prst="rect">
@@ -8147,7 +7649,7 @@
           <a:solidFill>
             <a:srgbClr val="FFFFFF"/>
           </a:solidFill>
-          <a:ln w="6350">
+          <a:ln w="10160">
             <a:solidFill>
               <a:srgbClr val="D0D6E0"/>
             </a:solidFill>
@@ -8170,7 +7672,7 @@
         </p:nvSpPr>
         <p:spPr>
           <a:xfrm>
-            <a:off x="8856000" y="10479599"/>
+            <a:off x="8856000" y="10465815"/>
             <a:ext cx="1440000" cy="180000"/>
           </a:xfrm>
           <a:prstGeom prst="rect">
@@ -8179,7 +7681,7 @@
           <a:solidFill>
             <a:srgbClr val="FFFFFF"/>
           </a:solidFill>
-          <a:ln w="6350">
+          <a:ln w="10160">
             <a:solidFill>
               <a:srgbClr val="D0D6E0"/>
             </a:solidFill>
@@ -8202,7 +7704,7 @@
         </p:nvSpPr>
         <p:spPr>
           <a:xfrm>
-            <a:off x="8856000" y="10681199"/>
+            <a:off x="8856000" y="10675092"/>
             <a:ext cx="1440000" cy="180000"/>
           </a:xfrm>
           <a:prstGeom prst="rect">
@@ -8211,7 +7713,7 @@
           <a:solidFill>
             <a:srgbClr val="FFFFFF"/>
           </a:solidFill>
-          <a:ln w="6350">
+          <a:ln w="10160">
             <a:solidFill>
               <a:srgbClr val="D0D6E0"/>
             </a:solidFill>
@@ -8234,7 +7736,7 @@
         </p:nvSpPr>
         <p:spPr>
           <a:xfrm>
-            <a:off x="8856000" y="10882799"/>
+            <a:off x="8856000" y="10884369"/>
             <a:ext cx="1440000" cy="180000"/>
           </a:xfrm>
           <a:prstGeom prst="rect">
@@ -8243,7 +7745,7 @@
           <a:solidFill>
             <a:srgbClr val="FFFFFF"/>
           </a:solidFill>
-          <a:ln w="6350">
+          <a:ln w="10160">
             <a:solidFill>
               <a:srgbClr val="D0D6E0"/>
             </a:solidFill>
@@ -8266,7 +7768,7 @@
         </p:nvSpPr>
         <p:spPr>
           <a:xfrm>
-            <a:off x="8856000" y="11084399"/>
+            <a:off x="8856000" y="11093646"/>
             <a:ext cx="1440000" cy="180000"/>
           </a:xfrm>
           <a:prstGeom prst="rect">
@@ -8275,7 +7777,7 @@
           <a:solidFill>
             <a:srgbClr val="FFFFFF"/>
           </a:solidFill>
-          <a:ln w="6350">
+          <a:ln w="10160">
             <a:solidFill>
               <a:srgbClr val="D0D6E0"/>
             </a:solidFill>
@@ -8298,7 +7800,7 @@
         </p:nvSpPr>
         <p:spPr>
           <a:xfrm>
-            <a:off x="8856000" y="11285999"/>
+            <a:off x="8856000" y="11302923"/>
             <a:ext cx="1440000" cy="180000"/>
           </a:xfrm>
           <a:prstGeom prst="rect">
@@ -8307,7 +7809,7 @@
           <a:solidFill>
             <a:srgbClr val="FFFFFF"/>
           </a:solidFill>
-          <a:ln w="6350">
+          <a:ln w="10160">
             <a:solidFill>
               <a:srgbClr val="D0D6E0"/>
             </a:solidFill>
@@ -8330,7 +7832,7 @@
         </p:nvSpPr>
         <p:spPr>
           <a:xfrm>
-            <a:off x="8856000" y="11487599"/>
+            <a:off x="8856000" y="11512200"/>
             <a:ext cx="1440000" cy="180000"/>
           </a:xfrm>
           <a:prstGeom prst="rect">
@@ -8339,7 +7841,7 @@
           <a:solidFill>
             <a:srgbClr val="FFFFFF"/>
           </a:solidFill>
-          <a:ln w="6350">
+          <a:ln w="10160">
             <a:solidFill>
               <a:srgbClr val="D0D6E0"/>
             </a:solidFill>
@@ -8401,7 +7903,7 @@
           <a:solidFill>
             <a:srgbClr val="FFFFFF"/>
           </a:solidFill>
-          <a:ln w="15875">
+          <a:ln w="25400">
             <a:solidFill>
               <a:srgbClr val="C0392B"/>
             </a:solidFill>
@@ -8424,7 +7926,7 @@
         </p:nvSpPr>
         <p:spPr>
           <a:xfrm>
-            <a:off x="8856000" y="12841200"/>
+            <a:off x="8856000" y="12910000"/>
             <a:ext cx="1440000" cy="180000"/>
           </a:xfrm>
           <a:prstGeom prst="rect">
@@ -8433,7 +7935,7 @@
           <a:solidFill>
             <a:srgbClr val="FFFFFF"/>
           </a:solidFill>
-          <a:ln w="6350">
+          <a:ln w="10160">
             <a:solidFill>
               <a:srgbClr val="D0D6E0"/>
             </a:solidFill>
@@ -8456,7 +7958,7 @@
         </p:nvSpPr>
         <p:spPr>
           <a:xfrm>
-            <a:off x="8856000" y="13042800"/>
+            <a:off x="8856000" y="13101233"/>
             <a:ext cx="1440000" cy="180000"/>
           </a:xfrm>
           <a:prstGeom prst="rect">
@@ -8465,7 +7967,7 @@
           <a:solidFill>
             <a:srgbClr val="FFFFFF"/>
           </a:solidFill>
-          <a:ln w="6350">
+          <a:ln w="10160">
             <a:solidFill>
               <a:srgbClr val="D0D6E0"/>
             </a:solidFill>
@@ -8488,7 +7990,7 @@
         </p:nvSpPr>
         <p:spPr>
           <a:xfrm>
-            <a:off x="8856000" y="13244400"/>
+            <a:off x="8856000" y="13292466"/>
             <a:ext cx="1440000" cy="180000"/>
           </a:xfrm>
           <a:prstGeom prst="rect">
@@ -8497,7 +7999,7 @@
           <a:solidFill>
             <a:srgbClr val="FFFFFF"/>
           </a:solidFill>
-          <a:ln w="6350">
+          <a:ln w="10160">
             <a:solidFill>
               <a:srgbClr val="D0D6E0"/>
             </a:solidFill>
@@ -8520,7 +8022,7 @@
         </p:nvSpPr>
         <p:spPr>
           <a:xfrm>
-            <a:off x="8856000" y="13446000"/>
+            <a:off x="8856000" y="13483699"/>
             <a:ext cx="1440000" cy="180000"/>
           </a:xfrm>
           <a:prstGeom prst="rect">
@@ -8529,7 +8031,7 @@
           <a:solidFill>
             <a:srgbClr val="FFFFFF"/>
           </a:solidFill>
-          <a:ln w="6350">
+          <a:ln w="10160">
             <a:solidFill>
               <a:srgbClr val="D0D6E0"/>
             </a:solidFill>
@@ -8552,7 +8054,7 @@
         </p:nvSpPr>
         <p:spPr>
           <a:xfrm>
-            <a:off x="8856000" y="13647600"/>
+            <a:off x="8856000" y="13674932"/>
             <a:ext cx="1440000" cy="180000"/>
           </a:xfrm>
           <a:prstGeom prst="rect">
@@ -8561,7 +8063,7 @@
           <a:solidFill>
             <a:srgbClr val="FFFFFF"/>
           </a:solidFill>
-          <a:ln w="6350">
+          <a:ln w="10160">
             <a:solidFill>
               <a:srgbClr val="D0D6E0"/>
             </a:solidFill>
@@ -8584,7 +8086,7 @@
         </p:nvSpPr>
         <p:spPr>
           <a:xfrm>
-            <a:off x="8856000" y="13849200"/>
+            <a:off x="8856000" y="13866165"/>
             <a:ext cx="1440000" cy="180000"/>
           </a:xfrm>
           <a:prstGeom prst="rect">
@@ -8593,7 +8095,7 @@
           <a:solidFill>
             <a:srgbClr val="FFFFFF"/>
           </a:solidFill>
-          <a:ln w="6350">
+          <a:ln w="10160">
             <a:solidFill>
               <a:srgbClr val="D0D6E0"/>
             </a:solidFill>
@@ -8616,7 +8118,7 @@
         </p:nvSpPr>
         <p:spPr>
           <a:xfrm>
-            <a:off x="8856000" y="14050800"/>
+            <a:off x="8856000" y="14057399"/>
             <a:ext cx="1440000" cy="180000"/>
           </a:xfrm>
           <a:prstGeom prst="rect">
@@ -8625,7 +8127,7 @@
           <a:solidFill>
             <a:srgbClr val="FFFFFF"/>
           </a:solidFill>
-          <a:ln w="6350">
+          <a:ln w="10160">
             <a:solidFill>
               <a:srgbClr val="D0D6E0"/>
             </a:solidFill>
@@ -8685,6 +8187,7 @@
             <a:avLst/>
           </a:prstGeom>
           <a:noFill/>
+          <a:ln/>
         </p:spPr>
         <p:txBody>
           <a:bodyPr wrap="square" anchor="t" lIns="54000" rIns="54000" tIns="21600" bIns="21600">
@@ -8719,6 +8222,7 @@
             <a:avLst/>
           </a:prstGeom>
           <a:noFill/>
+          <a:ln/>
         </p:spPr>
         <p:txBody>
           <a:bodyPr wrap="none" anchor="ctr" lIns="54000" rIns="54000" tIns="21600" bIns="21600">
@@ -8762,6 +8266,7 @@
             <a:avLst/>
           </a:prstGeom>
           <a:noFill/>
+          <a:ln/>
         </p:spPr>
         <p:txBody>
           <a:bodyPr wrap="none" anchor="ctr" lIns="54000" rIns="54000" tIns="21600" bIns="21600">
@@ -8771,7 +8276,7 @@
           <a:p>
             <a:pPr algn="r"/>
             <a:r>
-              <a:rPr sz="2520" b="0">
+              <a:rPr sz="2520" b="1">
                 <a:solidFill>
                   <a:srgbClr val="2A4A92"/>
                 </a:solidFill>
@@ -8797,6 +8302,7 @@
             <a:avLst/>
           </a:prstGeom>
           <a:noFill/>
+          <a:ln/>
         </p:spPr>
         <p:txBody>
           <a:bodyPr wrap="square" anchor="t" lIns="54000" rIns="54000" tIns="21600" bIns="21600">
@@ -8805,7 +8311,7 @@
           <a:lstStyle/>
           <a:p>
             <a:r>
-              <a:rPr sz="2520" b="0">
+              <a:rPr sz="2520" b="1">
                 <a:solidFill>
                   <a:srgbClr val="0E1E52"/>
                 </a:solidFill>
@@ -8831,6 +8337,7 @@
             <a:avLst/>
           </a:prstGeom>
           <a:noFill/>
+          <a:ln/>
         </p:spPr>
         <p:txBody>
           <a:bodyPr wrap="square" anchor="t" lIns="54000" rIns="54000" tIns="21600" bIns="21600">
@@ -8839,7 +8346,7 @@
           <a:lstStyle/>
           <a:p>
             <a:r>
-              <a:rPr sz="2520" b="0">
+              <a:rPr sz="2520" b="1">
                 <a:solidFill>
                   <a:srgbClr val="0E1E52"/>
                 </a:solidFill>
@@ -8865,6 +8372,7 @@
             <a:avLst/>
           </a:prstGeom>
           <a:noFill/>
+          <a:ln/>
         </p:spPr>
         <p:txBody>
           <a:bodyPr wrap="none" anchor="ctr" lIns="18000" rIns="18000" tIns="21600" bIns="21600">
@@ -8875,7 +8383,7 @@
             <a:r>
               <a:rPr sz="1260" b="1">
                 <a:solidFill>
-                  <a:srgbClr val="4A556B"/>
+                  <a:srgbClr val="0E1E52"/>
                 </a:solidFill>
                 <a:latin typeface="HY엽서M"/>
               </a:rPr>
@@ -8899,6 +8407,7 @@
             <a:avLst/>
           </a:prstGeom>
           <a:noFill/>
+          <a:ln/>
         </p:spPr>
         <p:txBody>
           <a:bodyPr wrap="none" anchor="ctr" lIns="54000" rIns="54000" tIns="21600" bIns="21600">
@@ -8934,6 +8443,7 @@
             <a:avLst/>
           </a:prstGeom>
           <a:noFill/>
+          <a:ln/>
         </p:spPr>
         <p:txBody>
           <a:bodyPr wrap="none" anchor="ctr" lIns="54000" rIns="54000" tIns="21600" bIns="21600">
@@ -8968,6 +8478,7 @@
             <a:avLst/>
           </a:prstGeom>
           <a:noFill/>
+          <a:ln/>
         </p:spPr>
         <p:txBody>
           <a:bodyPr wrap="none" anchor="ctr" lIns="54000" rIns="54000" tIns="21600" bIns="21600">
@@ -8998,53 +8509,20 @@
       </p:sp>
       <p:sp>
         <p:nvSpPr>
-          <p:cNvPr id="17" name="SUB"/>
-          <p:cNvSpPr txBox="1"/>
-          <p:nvPr/>
-        </p:nvSpPr>
-        <p:spPr>
-          <a:xfrm>
-            <a:off x="432000" y="2383199"/>
-            <a:ext cx="3060000" cy="180000"/>
-          </a:xfrm>
-          <a:prstGeom prst="rect">
-            <a:avLst/>
-          </a:prstGeom>
-          <a:noFill/>
-        </p:spPr>
-        <p:txBody>
-          <a:bodyPr wrap="none" anchor="t" lIns="54000" rIns="54000" tIns="21600" bIns="21600">
-            <a:noAutofit/>
-          </a:bodyPr>
-          <a:lstStyle/>
-          <a:p>
-            <a:r>
-              <a:rPr sz="910" b="0">
-                <a:solidFill>
-                  <a:srgbClr val="8A94A6"/>
-                </a:solidFill>
-                <a:latin typeface="HY엽서M"/>
-              </a:rPr>
-              <a:t>뇌혈관질환 I60~69 ⊃ 뇌졸중 ⊃ 뇌출혈</a:t>
-            </a:r>
-          </a:p>
-        </p:txBody>
-      </p:sp>
-      <p:sp>
-        <p:nvSpPr>
           <p:cNvPr id="21" name="TextBox 46|"/>
           <p:cNvSpPr txBox="1"/>
           <p:nvPr/>
         </p:nvSpPr>
         <p:spPr>
           <a:xfrm>
-            <a:off x="1998000" y="2628000"/>
+            <a:off x="1998000" y="2871000"/>
             <a:ext cx="1368000" cy="198000"/>
           </a:xfrm>
           <a:prstGeom prst="rect">
             <a:avLst/>
           </a:prstGeom>
           <a:noFill/>
+          <a:ln/>
         </p:spPr>
         <p:txBody>
           <a:bodyPr wrap="none" anchor="ctr" lIns="54000" rIns="54000" tIns="21600" bIns="21600">
@@ -9073,13 +8551,14 @@
         </p:nvSpPr>
         <p:spPr>
           <a:xfrm>
-            <a:off x="1944000" y="3420000"/>
+            <a:off x="1944000" y="3609000"/>
             <a:ext cx="1296000" cy="198000"/>
           </a:xfrm>
           <a:prstGeom prst="rect">
             <a:avLst/>
           </a:prstGeom>
           <a:noFill/>
+          <a:ln/>
         </p:spPr>
         <p:txBody>
           <a:bodyPr wrap="none" anchor="ctr" lIns="54000" rIns="54000" tIns="21600" bIns="21600">
@@ -9108,13 +8587,14 @@
         </p:nvSpPr>
         <p:spPr>
           <a:xfrm>
-            <a:off x="1889999" y="4104000"/>
+            <a:off x="1889999" y="4248000"/>
             <a:ext cx="1224000" cy="198000"/>
           </a:xfrm>
           <a:prstGeom prst="rect">
             <a:avLst/>
           </a:prstGeom>
           <a:noFill/>
+          <a:ln/>
         </p:spPr>
         <p:txBody>
           <a:bodyPr wrap="none" anchor="ctr" lIns="54000" rIns="54000" tIns="21600" bIns="21600">
@@ -9150,6 +8630,7 @@
             <a:avLst/>
           </a:prstGeom>
           <a:noFill/>
+          <a:ln/>
         </p:spPr>
         <p:txBody>
           <a:bodyPr wrap="none" anchor="ctr" lIns="54000" rIns="54000" tIns="21600" bIns="21600">
@@ -9180,53 +8661,20 @@
       </p:sp>
       <p:sp>
         <p:nvSpPr>
-          <p:cNvPr id="40" name="SUB"/>
-          <p:cNvSpPr txBox="1"/>
-          <p:nvPr/>
-        </p:nvSpPr>
-        <p:spPr>
-          <a:xfrm>
-            <a:off x="432000" y="5227200"/>
-            <a:ext cx="3060000" cy="180000"/>
-          </a:xfrm>
-          <a:prstGeom prst="rect">
-            <a:avLst/>
-          </a:prstGeom>
-          <a:noFill/>
-        </p:spPr>
-        <p:txBody>
-          <a:bodyPr wrap="none" anchor="t" lIns="54000" rIns="54000" tIns="21600" bIns="21600">
-            <a:noAutofit/>
-          </a:bodyPr>
-          <a:lstStyle/>
-          <a:p>
-            <a:r>
-              <a:rPr sz="910" b="0">
-                <a:solidFill>
-                  <a:srgbClr val="8A94A6"/>
-                </a:solidFill>
-                <a:latin typeface="HY엽서M"/>
-              </a:rPr>
-              <a:t>심혈관질환 I20~52 ⊃ 허혈성 심장 ⊃ 급성심근경색</a:t>
-            </a:r>
-          </a:p>
-        </p:txBody>
-      </p:sp>
-      <p:sp>
-        <p:nvSpPr>
           <p:cNvPr id="43" name="TextBox 53"/>
           <p:cNvSpPr txBox="1"/>
           <p:nvPr/>
         </p:nvSpPr>
         <p:spPr>
           <a:xfrm>
-            <a:off x="1242000" y="5472000"/>
+            <a:off x="1242000" y="5462745"/>
             <a:ext cx="1080000" cy="234000"/>
           </a:xfrm>
           <a:prstGeom prst="rect">
             <a:avLst/>
           </a:prstGeom>
           <a:noFill/>
+          <a:ln/>
         </p:spPr>
         <p:txBody>
           <a:bodyPr wrap="none" anchor="ctr" lIns="18000" rIns="18000" tIns="21600" bIns="21600">
@@ -9235,9 +8683,9 @@
           <a:lstStyle/>
           <a:p>
             <a:r>
-              <a:rPr sz="979" b="0">
-                <a:solidFill>
-                  <a:srgbClr val="8A94A6"/>
+              <a:rPr sz="979" b="1">
+                <a:solidFill>
+                  <a:srgbClr val="3A4660"/>
                 </a:solidFill>
                 <a:latin typeface="HY엽서M"/>
               </a:rPr>
@@ -9254,13 +8702,14 @@
         </p:nvSpPr>
         <p:spPr>
           <a:xfrm>
-            <a:off x="576000" y="5706000"/>
+            <a:off x="576000" y="5706110"/>
             <a:ext cx="1403999" cy="208800"/>
           </a:xfrm>
           <a:prstGeom prst="rect">
             <a:avLst/>
           </a:prstGeom>
           <a:noFill/>
+          <a:ln/>
         </p:spPr>
         <p:txBody>
           <a:bodyPr wrap="none" anchor="ctr" lIns="18000" rIns="18000" tIns="21600" bIns="21600">
@@ -9269,9 +8718,9 @@
           <a:lstStyle/>
           <a:p>
             <a:r>
-              <a:rPr sz="1050" b="0">
-                <a:solidFill>
-                  <a:srgbClr val="4A556B"/>
+              <a:rPr sz="1050" b="1">
+                <a:solidFill>
+                  <a:srgbClr val="5B678A"/>
                 </a:solidFill>
                 <a:latin typeface="HY엽서M"/>
               </a:rPr>
@@ -9288,13 +8737,14 @@
         </p:nvSpPr>
         <p:spPr>
           <a:xfrm>
-            <a:off x="1944000" y="5720400"/>
-            <a:ext cx="1440000" cy="115200"/>
-          </a:xfrm>
-          <a:prstGeom prst="rect">
-            <a:avLst/>
-          </a:prstGeom>
-          <a:noFill/>
+            <a:off x="1944000" y="5721350"/>
+            <a:ext cx="1440000" cy="146050"/>
+          </a:xfrm>
+          <a:prstGeom prst="rect">
+            <a:avLst/>
+          </a:prstGeom>
+          <a:noFill/>
+          <a:ln/>
         </p:spPr>
         <p:txBody>
           <a:bodyPr wrap="none" anchor="ctr" lIns="54000" rIns="54000" tIns="21600" bIns="21600">
@@ -9323,13 +8773,14 @@
         </p:nvSpPr>
         <p:spPr>
           <a:xfrm>
-            <a:off x="576000" y="5842800"/>
+            <a:off x="576000" y="5886450"/>
             <a:ext cx="1403999" cy="208800"/>
           </a:xfrm>
           <a:prstGeom prst="rect">
             <a:avLst/>
           </a:prstGeom>
           <a:noFill/>
+          <a:ln/>
         </p:spPr>
         <p:txBody>
           <a:bodyPr wrap="none" anchor="ctr" lIns="18000" rIns="18000" tIns="21600" bIns="21600">
@@ -9338,9 +8789,9 @@
           <a:lstStyle/>
           <a:p>
             <a:r>
-              <a:rPr sz="1050" b="0">
-                <a:solidFill>
-                  <a:srgbClr val="4A556B"/>
+              <a:rPr sz="1050" b="1">
+                <a:solidFill>
+                  <a:srgbClr val="5B678A"/>
                 </a:solidFill>
                 <a:latin typeface="HY엽서M"/>
               </a:rPr>
@@ -9357,13 +8808,14 @@
         </p:nvSpPr>
         <p:spPr>
           <a:xfrm>
-            <a:off x="1944000" y="5857200"/>
-            <a:ext cx="1440000" cy="115200"/>
-          </a:xfrm>
-          <a:prstGeom prst="rect">
-            <a:avLst/>
-          </a:prstGeom>
-          <a:noFill/>
+            <a:off x="1944000" y="5901690"/>
+            <a:ext cx="1440000" cy="146050"/>
+          </a:xfrm>
+          <a:prstGeom prst="rect">
+            <a:avLst/>
+          </a:prstGeom>
+          <a:noFill/>
+          <a:ln/>
         </p:spPr>
         <p:txBody>
           <a:bodyPr wrap="none" anchor="ctr" lIns="54000" rIns="54000" tIns="21600" bIns="21600">
@@ -9392,13 +8844,14 @@
         </p:nvSpPr>
         <p:spPr>
           <a:xfrm>
-            <a:off x="576000" y="5979600"/>
+            <a:off x="576000" y="6066790"/>
             <a:ext cx="1403999" cy="208800"/>
           </a:xfrm>
           <a:prstGeom prst="rect">
             <a:avLst/>
           </a:prstGeom>
           <a:noFill/>
+          <a:ln/>
         </p:spPr>
         <p:txBody>
           <a:bodyPr wrap="none" anchor="ctr" lIns="18000" rIns="18000" tIns="21600" bIns="21600">
@@ -9407,9 +8860,9 @@
           <a:lstStyle/>
           <a:p>
             <a:r>
-              <a:rPr sz="1050" b="0">
-                <a:solidFill>
-                  <a:srgbClr val="4A556B"/>
+              <a:rPr sz="1050" b="1">
+                <a:solidFill>
+                  <a:srgbClr val="5B678A"/>
                 </a:solidFill>
                 <a:latin typeface="HY엽서M"/>
               </a:rPr>
@@ -9426,13 +8879,14 @@
         </p:nvSpPr>
         <p:spPr>
           <a:xfrm>
-            <a:off x="1944000" y="5993999"/>
-            <a:ext cx="1440000" cy="115200"/>
-          </a:xfrm>
-          <a:prstGeom prst="rect">
-            <a:avLst/>
-          </a:prstGeom>
-          <a:noFill/>
+            <a:off x="1944000" y="6082030"/>
+            <a:ext cx="1440000" cy="146050"/>
+          </a:xfrm>
+          <a:prstGeom prst="rect">
+            <a:avLst/>
+          </a:prstGeom>
+          <a:noFill/>
+          <a:ln/>
         </p:spPr>
         <p:txBody>
           <a:bodyPr wrap="none" anchor="ctr" lIns="54000" rIns="54000" tIns="21600" bIns="21600">
@@ -9461,13 +8915,14 @@
         </p:nvSpPr>
         <p:spPr>
           <a:xfrm>
-            <a:off x="576000" y="6116399"/>
+            <a:off x="576000" y="6247130"/>
             <a:ext cx="1403999" cy="208800"/>
           </a:xfrm>
           <a:prstGeom prst="rect">
             <a:avLst/>
           </a:prstGeom>
           <a:noFill/>
+          <a:ln/>
         </p:spPr>
         <p:txBody>
           <a:bodyPr wrap="none" anchor="ctr" lIns="18000" rIns="18000" tIns="21600" bIns="21600">
@@ -9476,9 +8931,9 @@
           <a:lstStyle/>
           <a:p>
             <a:r>
-              <a:rPr sz="1050" b="0">
-                <a:solidFill>
-                  <a:srgbClr val="4A556B"/>
+              <a:rPr sz="1050" b="1">
+                <a:solidFill>
+                  <a:srgbClr val="5B678A"/>
                 </a:solidFill>
                 <a:latin typeface="HY엽서M"/>
               </a:rPr>
@@ -9495,13 +8950,14 @@
         </p:nvSpPr>
         <p:spPr>
           <a:xfrm>
-            <a:off x="1944000" y="6130799"/>
-            <a:ext cx="1440000" cy="115200"/>
-          </a:xfrm>
-          <a:prstGeom prst="rect">
-            <a:avLst/>
-          </a:prstGeom>
-          <a:noFill/>
+            <a:off x="1944000" y="6262370"/>
+            <a:ext cx="1440000" cy="146050"/>
+          </a:xfrm>
+          <a:prstGeom prst="rect">
+            <a:avLst/>
+          </a:prstGeom>
+          <a:noFill/>
+          <a:ln/>
         </p:spPr>
         <p:txBody>
           <a:bodyPr wrap="none" anchor="ctr" lIns="54000" rIns="54000" tIns="21600" bIns="21600">
@@ -9530,13 +8986,14 @@
         </p:nvSpPr>
         <p:spPr>
           <a:xfrm>
-            <a:off x="576000" y="6253199"/>
+            <a:off x="576000" y="6427470"/>
             <a:ext cx="1403999" cy="208800"/>
           </a:xfrm>
           <a:prstGeom prst="rect">
             <a:avLst/>
           </a:prstGeom>
           <a:noFill/>
+          <a:ln/>
         </p:spPr>
         <p:txBody>
           <a:bodyPr wrap="none" anchor="ctr" lIns="18000" rIns="18000" tIns="21600" bIns="21600">
@@ -9545,9 +9002,9 @@
           <a:lstStyle/>
           <a:p>
             <a:r>
-              <a:rPr sz="1050" b="0">
-                <a:solidFill>
-                  <a:srgbClr val="4A556B"/>
+              <a:rPr sz="1050" b="1">
+                <a:solidFill>
+                  <a:srgbClr val="5B678A"/>
                 </a:solidFill>
                 <a:latin typeface="HY엽서M"/>
               </a:rPr>
@@ -9564,13 +9021,14 @@
         </p:nvSpPr>
         <p:spPr>
           <a:xfrm>
-            <a:off x="1944000" y="6267599"/>
-            <a:ext cx="1440000" cy="115200"/>
-          </a:xfrm>
-          <a:prstGeom prst="rect">
-            <a:avLst/>
-          </a:prstGeom>
-          <a:noFill/>
+            <a:off x="1944000" y="6442710"/>
+            <a:ext cx="1440000" cy="146050"/>
+          </a:xfrm>
+          <a:prstGeom prst="rect">
+            <a:avLst/>
+          </a:prstGeom>
+          <a:noFill/>
+          <a:ln/>
         </p:spPr>
         <p:txBody>
           <a:bodyPr wrap="none" anchor="ctr" lIns="54000" rIns="54000" tIns="21600" bIns="21600">
@@ -9599,13 +9057,14 @@
         </p:nvSpPr>
         <p:spPr>
           <a:xfrm>
-            <a:off x="576000" y="6389999"/>
+            <a:off x="576000" y="6607809"/>
             <a:ext cx="1403999" cy="208800"/>
           </a:xfrm>
           <a:prstGeom prst="rect">
             <a:avLst/>
           </a:prstGeom>
           <a:noFill/>
+          <a:ln/>
         </p:spPr>
         <p:txBody>
           <a:bodyPr wrap="none" anchor="ctr" lIns="18000" rIns="18000" tIns="21600" bIns="21600">
@@ -9614,9 +9073,9 @@
           <a:lstStyle/>
           <a:p>
             <a:r>
-              <a:rPr sz="1050" b="0">
-                <a:solidFill>
-                  <a:srgbClr val="4A556B"/>
+              <a:rPr sz="1050" b="1">
+                <a:solidFill>
+                  <a:srgbClr val="5B678A"/>
                 </a:solidFill>
                 <a:latin typeface="HY엽서M"/>
               </a:rPr>
@@ -9633,13 +9092,14 @@
         </p:nvSpPr>
         <p:spPr>
           <a:xfrm>
-            <a:off x="1944000" y="6404399"/>
-            <a:ext cx="1440000" cy="115200"/>
-          </a:xfrm>
-          <a:prstGeom prst="rect">
-            <a:avLst/>
-          </a:prstGeom>
-          <a:noFill/>
+            <a:off x="1944000" y="6623050"/>
+            <a:ext cx="1440000" cy="146050"/>
+          </a:xfrm>
+          <a:prstGeom prst="rect">
+            <a:avLst/>
+          </a:prstGeom>
+          <a:noFill/>
+          <a:ln/>
         </p:spPr>
         <p:txBody>
           <a:bodyPr wrap="none" anchor="ctr" lIns="54000" rIns="54000" tIns="21600" bIns="21600">
@@ -9668,13 +9128,14 @@
         </p:nvSpPr>
         <p:spPr>
           <a:xfrm>
-            <a:off x="576000" y="6526799"/>
+            <a:off x="576000" y="6788150"/>
             <a:ext cx="1403999" cy="208800"/>
           </a:xfrm>
           <a:prstGeom prst="rect">
             <a:avLst/>
           </a:prstGeom>
           <a:noFill/>
+          <a:ln/>
         </p:spPr>
         <p:txBody>
           <a:bodyPr wrap="none" anchor="ctr" lIns="18000" rIns="18000" tIns="21600" bIns="21600">
@@ -9683,9 +9144,9 @@
           <a:lstStyle/>
           <a:p>
             <a:r>
-              <a:rPr sz="1050" b="0">
-                <a:solidFill>
-                  <a:srgbClr val="4A556B"/>
+              <a:rPr sz="1050" b="1">
+                <a:solidFill>
+                  <a:srgbClr val="5B678A"/>
                 </a:solidFill>
                 <a:latin typeface="HY엽서M"/>
               </a:rPr>
@@ -9702,13 +9163,14 @@
         </p:nvSpPr>
         <p:spPr>
           <a:xfrm>
-            <a:off x="1944000" y="6541199"/>
-            <a:ext cx="1440000" cy="115200"/>
-          </a:xfrm>
-          <a:prstGeom prst="rect">
-            <a:avLst/>
-          </a:prstGeom>
-          <a:noFill/>
+            <a:off x="1944000" y="6803390"/>
+            <a:ext cx="1440000" cy="146050"/>
+          </a:xfrm>
+          <a:prstGeom prst="rect">
+            <a:avLst/>
+          </a:prstGeom>
+          <a:noFill/>
+          <a:ln/>
         </p:spPr>
         <p:txBody>
           <a:bodyPr wrap="none" anchor="ctr" lIns="54000" rIns="54000" tIns="21600" bIns="21600">
@@ -9737,13 +9199,14 @@
         </p:nvSpPr>
         <p:spPr>
           <a:xfrm>
-            <a:off x="1944000" y="6768000"/>
+            <a:off x="1944000" y="7163798"/>
             <a:ext cx="1296000" cy="198000"/>
           </a:xfrm>
           <a:prstGeom prst="rect">
             <a:avLst/>
           </a:prstGeom>
           <a:noFill/>
+          <a:ln/>
         </p:spPr>
         <p:txBody>
           <a:bodyPr wrap="none" anchor="ctr" lIns="54000" rIns="54000" tIns="21600" bIns="21600">
@@ -9772,13 +9235,14 @@
         </p:nvSpPr>
         <p:spPr>
           <a:xfrm>
-            <a:off x="1961999" y="7470000"/>
-            <a:ext cx="1152000" cy="198000"/>
-          </a:xfrm>
-          <a:prstGeom prst="rect">
-            <a:avLst/>
-          </a:prstGeom>
-          <a:noFill/>
+            <a:off x="2133600" y="7595598"/>
+            <a:ext cx="990600" cy="198000"/>
+          </a:xfrm>
+          <a:prstGeom prst="rect">
+            <a:avLst/>
+          </a:prstGeom>
+          <a:noFill/>
+          <a:ln/>
         </p:spPr>
         <p:txBody>
           <a:bodyPr wrap="none" anchor="ctr" lIns="54000" rIns="54000" tIns="21600" bIns="21600">
@@ -9814,6 +9278,7 @@
             <a:avLst/>
           </a:prstGeom>
           <a:noFill/>
+          <a:ln/>
         </p:spPr>
         <p:txBody>
           <a:bodyPr wrap="none" anchor="ctr" lIns="54000" rIns="54000" tIns="21600" bIns="21600">
@@ -9835,53 +9300,20 @@
       </p:sp>
       <p:sp>
         <p:nvSpPr>
-          <p:cNvPr id="77" name="SUB"/>
-          <p:cNvSpPr txBox="1"/>
-          <p:nvPr/>
-        </p:nvSpPr>
-        <p:spPr>
-          <a:xfrm>
-            <a:off x="432000" y="8503200"/>
-            <a:ext cx="3060000" cy="180000"/>
-          </a:xfrm>
-          <a:prstGeom prst="rect">
-            <a:avLst/>
-          </a:prstGeom>
-          <a:noFill/>
-        </p:spPr>
-        <p:txBody>
-          <a:bodyPr wrap="none" anchor="t" lIns="54000" rIns="54000" tIns="21600" bIns="21600">
-            <a:noAutofit/>
-          </a:bodyPr>
-          <a:lstStyle/>
-          <a:p>
-            <a:r>
-              <a:rPr sz="910" b="0">
-                <a:solidFill>
-                  <a:srgbClr val="8A94A6"/>
-                </a:solidFill>
-                <a:latin typeface="HY엽서M"/>
-              </a:rPr>
-              <a:t>산정특례 · 혈전용해 · 2대 주요치료비</a:t>
-            </a:r>
-          </a:p>
-        </p:txBody>
-      </p:sp>
-      <p:sp>
-        <p:nvSpPr>
           <p:cNvPr id="78" name="L_TextBox 49|산정특례"/>
           <p:cNvSpPr txBox="1"/>
           <p:nvPr/>
         </p:nvSpPr>
         <p:spPr>
           <a:xfrm>
-            <a:off x="432000" y="8694000"/>
+            <a:off x="432000" y="8618800"/>
             <a:ext cx="1692000" cy="208800"/>
           </a:xfrm>
           <a:prstGeom prst="rect">
             <a:avLst/>
           </a:prstGeom>
           <a:noFill/>
+          <a:ln/>
         </p:spPr>
         <p:txBody>
           <a:bodyPr wrap="none" anchor="ctr" lIns="18000" rIns="18000" tIns="21600" bIns="21600">
@@ -9890,9 +9322,9 @@
           <a:lstStyle/>
           <a:p>
             <a:r>
-              <a:rPr sz="1400" b="0">
-                <a:solidFill>
-                  <a:srgbClr val="4A556B"/>
+              <a:rPr sz="1400" b="1">
+                <a:solidFill>
+                  <a:srgbClr val="5B678A"/>
                 </a:solidFill>
                 <a:latin typeface="HY엽서M"/>
               </a:rPr>
@@ -9916,6 +9348,7 @@
             <a:avLst/>
           </a:prstGeom>
           <a:noFill/>
+          <a:ln/>
         </p:spPr>
         <p:txBody>
           <a:bodyPr wrap="none" anchor="ctr" lIns="54000" rIns="54000" tIns="21600" bIns="21600">
@@ -9944,13 +9377,14 @@
         </p:nvSpPr>
         <p:spPr>
           <a:xfrm>
-            <a:off x="432000" y="8895600"/>
+            <a:off x="432000" y="8846900"/>
             <a:ext cx="1692000" cy="208800"/>
           </a:xfrm>
           <a:prstGeom prst="rect">
             <a:avLst/>
           </a:prstGeom>
           <a:noFill/>
+          <a:ln/>
         </p:spPr>
         <p:txBody>
           <a:bodyPr wrap="none" anchor="ctr" lIns="18000" rIns="18000" tIns="21600" bIns="21600">
@@ -9959,9 +9393,9 @@
           <a:lstStyle/>
           <a:p>
             <a:r>
-              <a:rPr sz="1400" b="0">
-                <a:solidFill>
-                  <a:srgbClr val="4A556B"/>
+              <a:rPr sz="1400" b="1">
+                <a:solidFill>
+                  <a:srgbClr val="5B678A"/>
                 </a:solidFill>
                 <a:latin typeface="HY엽서M"/>
               </a:rPr>
@@ -9985,6 +9419,7 @@
             <a:avLst/>
           </a:prstGeom>
           <a:noFill/>
+          <a:ln/>
         </p:spPr>
         <p:txBody>
           <a:bodyPr wrap="none" anchor="ctr" lIns="54000" rIns="54000" tIns="21600" bIns="21600">
@@ -10013,13 +9448,14 @@
         </p:nvSpPr>
         <p:spPr>
           <a:xfrm>
-            <a:off x="432000" y="9097200"/>
+            <a:off x="432000" y="9075000"/>
             <a:ext cx="1692000" cy="208800"/>
           </a:xfrm>
           <a:prstGeom prst="rect">
             <a:avLst/>
           </a:prstGeom>
           <a:noFill/>
+          <a:ln/>
         </p:spPr>
         <p:txBody>
           <a:bodyPr wrap="none" anchor="ctr" lIns="18000" rIns="18000" tIns="21600" bIns="21600">
@@ -10028,9 +9464,9 @@
           <a:lstStyle/>
           <a:p>
             <a:r>
-              <a:rPr sz="1400" b="0">
-                <a:solidFill>
-                  <a:srgbClr val="4A556B"/>
+              <a:rPr sz="1400" b="1">
+                <a:solidFill>
+                  <a:srgbClr val="5B678A"/>
                 </a:solidFill>
                 <a:latin typeface="HY엽서M"/>
               </a:rPr>
@@ -10054,6 +9490,7 @@
             <a:avLst/>
           </a:prstGeom>
           <a:noFill/>
+          <a:ln/>
         </p:spPr>
         <p:txBody>
           <a:bodyPr wrap="none" anchor="ctr" lIns="54000" rIns="54000" tIns="21600" bIns="21600">
@@ -10089,6 +9526,7 @@
             <a:avLst/>
           </a:prstGeom>
           <a:noFill/>
+          <a:ln/>
         </p:spPr>
         <p:txBody>
           <a:bodyPr wrap="none" anchor="ctr" lIns="54000" rIns="54000" tIns="21600" bIns="21600">
@@ -10110,53 +9548,20 @@
       </p:sp>
       <p:sp>
         <p:nvSpPr>
-          <p:cNvPr id="89" name="SUB"/>
-          <p:cNvSpPr txBox="1"/>
-          <p:nvPr/>
-        </p:nvSpPr>
-        <p:spPr>
-          <a:xfrm>
-            <a:off x="432000" y="9727200"/>
-            <a:ext cx="3060000" cy="180000"/>
-          </a:xfrm>
-          <a:prstGeom prst="rect">
-            <a:avLst/>
-          </a:prstGeom>
-          <a:noFill/>
-        </p:spPr>
-        <p:txBody>
-          <a:bodyPr wrap="none" anchor="t" lIns="54000" rIns="54000" tIns="21600" bIns="21600">
-            <a:noAutofit/>
-          </a:bodyPr>
-          <a:lstStyle/>
-          <a:p>
-            <a:r>
-              <a:rPr sz="910" b="0">
-                <a:solidFill>
-                  <a:srgbClr val="8A94A6"/>
-                </a:solidFill>
-                <a:latin typeface="HY엽서M"/>
-              </a:rPr>
-              <a:t>산정특례 · 혈전용해 · 2대 주요치료비</a:t>
-            </a:r>
-          </a:p>
-        </p:txBody>
-      </p:sp>
-      <p:sp>
-        <p:nvSpPr>
           <p:cNvPr id="90" name="L_TextBox 56|산정특례"/>
           <p:cNvSpPr txBox="1"/>
           <p:nvPr/>
         </p:nvSpPr>
         <p:spPr>
           <a:xfrm>
-            <a:off x="432000" y="9918000"/>
+            <a:off x="432000" y="9842800"/>
             <a:ext cx="1692000" cy="208800"/>
           </a:xfrm>
           <a:prstGeom prst="rect">
             <a:avLst/>
           </a:prstGeom>
           <a:noFill/>
+          <a:ln/>
         </p:spPr>
         <p:txBody>
           <a:bodyPr wrap="none" anchor="ctr" lIns="18000" rIns="18000" tIns="21600" bIns="21600">
@@ -10165,9 +9570,9 @@
           <a:lstStyle/>
           <a:p>
             <a:r>
-              <a:rPr sz="1400" b="0">
-                <a:solidFill>
-                  <a:srgbClr val="4A556B"/>
+              <a:rPr sz="1400" b="1">
+                <a:solidFill>
+                  <a:srgbClr val="5B678A"/>
                 </a:solidFill>
                 <a:latin typeface="HY엽서M"/>
               </a:rPr>
@@ -10184,13 +9589,14 @@
         </p:nvSpPr>
         <p:spPr>
           <a:xfrm>
-            <a:off x="2088000" y="9932400"/>
+            <a:off x="2088000" y="9857200"/>
             <a:ext cx="1440000" cy="180000"/>
           </a:xfrm>
           <a:prstGeom prst="rect">
             <a:avLst/>
           </a:prstGeom>
           <a:noFill/>
+          <a:ln/>
         </p:spPr>
         <p:txBody>
           <a:bodyPr wrap="none" anchor="ctr" lIns="54000" rIns="54000" tIns="21600" bIns="21600">
@@ -10219,13 +9625,14 @@
         </p:nvSpPr>
         <p:spPr>
           <a:xfrm>
-            <a:off x="432000" y="10119600"/>
+            <a:off x="432000" y="10070900"/>
             <a:ext cx="1692000" cy="208800"/>
           </a:xfrm>
           <a:prstGeom prst="rect">
             <a:avLst/>
           </a:prstGeom>
           <a:noFill/>
+          <a:ln/>
         </p:spPr>
         <p:txBody>
           <a:bodyPr wrap="none" anchor="ctr" lIns="18000" rIns="18000" tIns="21600" bIns="21600">
@@ -10234,9 +9641,9 @@
           <a:lstStyle/>
           <a:p>
             <a:r>
-              <a:rPr sz="1400" b="0">
-                <a:solidFill>
-                  <a:srgbClr val="4A556B"/>
+              <a:rPr sz="1400" b="1">
+                <a:solidFill>
+                  <a:srgbClr val="5B678A"/>
                 </a:solidFill>
                 <a:latin typeface="HY엽서M"/>
               </a:rPr>
@@ -10253,13 +9660,14 @@
         </p:nvSpPr>
         <p:spPr>
           <a:xfrm>
-            <a:off x="2088000" y="10134000"/>
+            <a:off x="2088000" y="10085300"/>
             <a:ext cx="1440000" cy="180000"/>
           </a:xfrm>
           <a:prstGeom prst="rect">
             <a:avLst/>
           </a:prstGeom>
           <a:noFill/>
+          <a:ln/>
         </p:spPr>
         <p:txBody>
           <a:bodyPr wrap="none" anchor="ctr" lIns="54000" rIns="54000" tIns="21600" bIns="21600">
@@ -10288,13 +9696,14 @@
         </p:nvSpPr>
         <p:spPr>
           <a:xfrm>
-            <a:off x="432000" y="10321200"/>
+            <a:off x="432000" y="10299000"/>
             <a:ext cx="1692000" cy="208800"/>
           </a:xfrm>
           <a:prstGeom prst="rect">
             <a:avLst/>
           </a:prstGeom>
           <a:noFill/>
+          <a:ln/>
         </p:spPr>
         <p:txBody>
           <a:bodyPr wrap="none" anchor="ctr" lIns="18000" rIns="18000" tIns="21600" bIns="21600">
@@ -10303,9 +9712,9 @@
           <a:lstStyle/>
           <a:p>
             <a:r>
-              <a:rPr sz="1400" b="0">
-                <a:solidFill>
-                  <a:srgbClr val="4A556B"/>
+              <a:rPr sz="1400" b="1">
+                <a:solidFill>
+                  <a:srgbClr val="5B678A"/>
                 </a:solidFill>
                 <a:latin typeface="HY엽서M"/>
               </a:rPr>
@@ -10322,13 +9731,14 @@
         </p:nvSpPr>
         <p:spPr>
           <a:xfrm>
-            <a:off x="2088000" y="10335600"/>
+            <a:off x="2088000" y="10313400"/>
             <a:ext cx="1440000" cy="180000"/>
           </a:xfrm>
           <a:prstGeom prst="rect">
             <a:avLst/>
           </a:prstGeom>
           <a:noFill/>
+          <a:ln/>
         </p:spPr>
         <p:txBody>
           <a:bodyPr wrap="none" anchor="ctr" lIns="54000" rIns="54000" tIns="21600" bIns="21600">
@@ -10364,6 +9774,7 @@
             <a:avLst/>
           </a:prstGeom>
           <a:noFill/>
+          <a:ln/>
         </p:spPr>
         <p:txBody>
           <a:bodyPr wrap="none" anchor="ctr" lIns="54000" rIns="54000" tIns="21600" bIns="21600">
@@ -10398,6 +9809,7 @@
             <a:avLst/>
           </a:prstGeom>
           <a:noFill/>
+          <a:ln/>
         </p:spPr>
         <p:txBody>
           <a:bodyPr wrap="none" anchor="ctr" lIns="54000" rIns="54000" tIns="21600" bIns="21600">
@@ -10419,53 +9831,20 @@
       </p:sp>
       <p:sp>
         <p:nvSpPr>
-          <p:cNvPr id="103" name="SUB"/>
-          <p:cNvSpPr txBox="1"/>
-          <p:nvPr/>
-        </p:nvSpPr>
-        <p:spPr>
-          <a:xfrm>
-            <a:off x="432000" y="11401200"/>
-            <a:ext cx="3060000" cy="180000"/>
-          </a:xfrm>
-          <a:prstGeom prst="rect">
-            <a:avLst/>
-          </a:prstGeom>
-          <a:noFill/>
-        </p:spPr>
-        <p:txBody>
-          <a:bodyPr wrap="none" anchor="t" lIns="54000" rIns="54000" tIns="21600" bIns="21600">
-            <a:noAutofit/>
-          </a:bodyPr>
-          <a:lstStyle/>
-          <a:p>
-            <a:r>
-              <a:rPr sz="910" b="0">
-                <a:solidFill>
-                  <a:srgbClr val="8A94A6"/>
-                </a:solidFill>
-                <a:latin typeface="HY엽서M"/>
-              </a:rPr>
-              <a:t>대인 · 대물 · 합의금 · 변호사 · 자부상</a:t>
-            </a:r>
-          </a:p>
-        </p:txBody>
-      </p:sp>
-      <p:sp>
-        <p:nvSpPr>
           <p:cNvPr id="104" name="L_TextBox 9|대인"/>
           <p:cNvSpPr txBox="1"/>
           <p:nvPr/>
         </p:nvSpPr>
         <p:spPr>
           <a:xfrm>
-            <a:off x="432000" y="11592000"/>
+            <a:off x="432000" y="11516800"/>
             <a:ext cx="1692000" cy="208800"/>
           </a:xfrm>
           <a:prstGeom prst="rect">
             <a:avLst/>
           </a:prstGeom>
           <a:noFill/>
+          <a:ln/>
         </p:spPr>
         <p:txBody>
           <a:bodyPr wrap="none" anchor="ctr" lIns="18000" rIns="18000" tIns="21600" bIns="21600">
@@ -10474,9 +9853,9 @@
           <a:lstStyle/>
           <a:p>
             <a:r>
-              <a:rPr sz="1400" b="0">
-                <a:solidFill>
-                  <a:srgbClr val="4A556B"/>
+              <a:rPr sz="1400" b="1">
+                <a:solidFill>
+                  <a:srgbClr val="5B678A"/>
                 </a:solidFill>
                 <a:latin typeface="HY엽서M"/>
               </a:rPr>
@@ -10493,13 +9872,14 @@
         </p:nvSpPr>
         <p:spPr>
           <a:xfrm>
-            <a:off x="2088000" y="11606400"/>
+            <a:off x="2088000" y="11531200"/>
             <a:ext cx="1440000" cy="180000"/>
           </a:xfrm>
           <a:prstGeom prst="rect">
             <a:avLst/>
           </a:prstGeom>
           <a:noFill/>
+          <a:ln/>
         </p:spPr>
         <p:txBody>
           <a:bodyPr wrap="none" anchor="ctr" lIns="54000" rIns="54000" tIns="21600" bIns="21600">
@@ -10528,13 +9908,14 @@
         </p:nvSpPr>
         <p:spPr>
           <a:xfrm>
-            <a:off x="432000" y="11793600"/>
+            <a:off x="432000" y="11738360"/>
             <a:ext cx="1692000" cy="208800"/>
           </a:xfrm>
           <a:prstGeom prst="rect">
             <a:avLst/>
           </a:prstGeom>
           <a:noFill/>
+          <a:ln/>
         </p:spPr>
         <p:txBody>
           <a:bodyPr wrap="none" anchor="ctr" lIns="18000" rIns="18000" tIns="21600" bIns="21600">
@@ -10543,9 +9924,9 @@
           <a:lstStyle/>
           <a:p>
             <a:r>
-              <a:rPr sz="1400" b="0">
-                <a:solidFill>
-                  <a:srgbClr val="4A556B"/>
+              <a:rPr sz="1400" b="1">
+                <a:solidFill>
+                  <a:srgbClr val="5B678A"/>
                 </a:solidFill>
                 <a:latin typeface="HY엽서M"/>
               </a:rPr>
@@ -10562,13 +9943,14 @@
         </p:nvSpPr>
         <p:spPr>
           <a:xfrm>
-            <a:off x="2088000" y="11808000"/>
+            <a:off x="2088000" y="11752760"/>
             <a:ext cx="1440000" cy="180000"/>
           </a:xfrm>
           <a:prstGeom prst="rect">
             <a:avLst/>
           </a:prstGeom>
           <a:noFill/>
+          <a:ln/>
         </p:spPr>
         <p:txBody>
           <a:bodyPr wrap="none" anchor="ctr" lIns="54000" rIns="54000" tIns="21600" bIns="21600">
@@ -10597,13 +9979,14 @@
         </p:nvSpPr>
         <p:spPr>
           <a:xfrm>
-            <a:off x="432000" y="11995200"/>
+            <a:off x="432000" y="11959920"/>
             <a:ext cx="1692000" cy="208800"/>
           </a:xfrm>
           <a:prstGeom prst="rect">
             <a:avLst/>
           </a:prstGeom>
           <a:noFill/>
+          <a:ln/>
         </p:spPr>
         <p:txBody>
           <a:bodyPr wrap="none" anchor="ctr" lIns="18000" rIns="18000" tIns="21600" bIns="21600">
@@ -10612,9 +9995,9 @@
           <a:lstStyle/>
           <a:p>
             <a:r>
-              <a:rPr sz="1400" b="0">
-                <a:solidFill>
-                  <a:srgbClr val="4A556B"/>
+              <a:rPr sz="1400" b="1">
+                <a:solidFill>
+                  <a:srgbClr val="5B678A"/>
                 </a:solidFill>
                 <a:latin typeface="HY엽서M"/>
               </a:rPr>
@@ -10631,13 +10014,14 @@
         </p:nvSpPr>
         <p:spPr>
           <a:xfrm>
-            <a:off x="2088000" y="12009600"/>
+            <a:off x="2088000" y="11974320"/>
             <a:ext cx="1440000" cy="180000"/>
           </a:xfrm>
           <a:prstGeom prst="rect">
             <a:avLst/>
           </a:prstGeom>
           <a:noFill/>
+          <a:ln/>
         </p:spPr>
         <p:txBody>
           <a:bodyPr wrap="none" anchor="ctr" lIns="54000" rIns="54000" tIns="21600" bIns="21600">
@@ -10666,13 +10050,14 @@
         </p:nvSpPr>
         <p:spPr>
           <a:xfrm>
-            <a:off x="432000" y="12196800"/>
+            <a:off x="432000" y="12181480"/>
             <a:ext cx="1692000" cy="208800"/>
           </a:xfrm>
           <a:prstGeom prst="rect">
             <a:avLst/>
           </a:prstGeom>
           <a:noFill/>
+          <a:ln/>
         </p:spPr>
         <p:txBody>
           <a:bodyPr wrap="none" anchor="ctr" lIns="18000" rIns="18000" tIns="21600" bIns="21600">
@@ -10681,9 +10066,9 @@
           <a:lstStyle/>
           <a:p>
             <a:r>
-              <a:rPr sz="1400" b="0">
-                <a:solidFill>
-                  <a:srgbClr val="4A556B"/>
+              <a:rPr sz="1400" b="1">
+                <a:solidFill>
+                  <a:srgbClr val="5B678A"/>
                 </a:solidFill>
                 <a:latin typeface="HY엽서M"/>
               </a:rPr>
@@ -10700,13 +10085,14 @@
         </p:nvSpPr>
         <p:spPr>
           <a:xfrm>
-            <a:off x="2088000" y="12211200"/>
+            <a:off x="2088000" y="12195880"/>
             <a:ext cx="1440000" cy="180000"/>
           </a:xfrm>
           <a:prstGeom prst="rect">
             <a:avLst/>
           </a:prstGeom>
           <a:noFill/>
+          <a:ln/>
         </p:spPr>
         <p:txBody>
           <a:bodyPr wrap="none" anchor="ctr" lIns="54000" rIns="54000" tIns="21600" bIns="21600">
@@ -10735,13 +10121,14 @@
         </p:nvSpPr>
         <p:spPr>
           <a:xfrm>
-            <a:off x="432000" y="12398400"/>
+            <a:off x="432000" y="12403040"/>
             <a:ext cx="1692000" cy="208800"/>
           </a:xfrm>
           <a:prstGeom prst="rect">
             <a:avLst/>
           </a:prstGeom>
           <a:noFill/>
+          <a:ln/>
         </p:spPr>
         <p:txBody>
           <a:bodyPr wrap="none" anchor="ctr" lIns="18000" rIns="18000" tIns="21600" bIns="21600">
@@ -10750,9 +10137,9 @@
           <a:lstStyle/>
           <a:p>
             <a:r>
-              <a:rPr sz="1400" b="0">
-                <a:solidFill>
-                  <a:srgbClr val="4A556B"/>
+              <a:rPr sz="1400" b="1">
+                <a:solidFill>
+                  <a:srgbClr val="5B678A"/>
                 </a:solidFill>
                 <a:latin typeface="HY엽서M"/>
               </a:rPr>
@@ -10769,13 +10156,14 @@
         </p:nvSpPr>
         <p:spPr>
           <a:xfrm>
-            <a:off x="2088000" y="12412800"/>
+            <a:off x="2088000" y="12417439"/>
             <a:ext cx="1440000" cy="180000"/>
           </a:xfrm>
           <a:prstGeom prst="rect">
             <a:avLst/>
           </a:prstGeom>
           <a:noFill/>
+          <a:ln/>
         </p:spPr>
         <p:txBody>
           <a:bodyPr wrap="none" anchor="ctr" lIns="54000" rIns="54000" tIns="21600" bIns="21600">
@@ -10804,13 +10192,14 @@
         </p:nvSpPr>
         <p:spPr>
           <a:xfrm>
-            <a:off x="432000" y="12600000"/>
+            <a:off x="432000" y="12624600"/>
             <a:ext cx="1692000" cy="208800"/>
           </a:xfrm>
           <a:prstGeom prst="rect">
             <a:avLst/>
           </a:prstGeom>
           <a:noFill/>
+          <a:ln/>
         </p:spPr>
         <p:txBody>
           <a:bodyPr wrap="none" anchor="ctr" lIns="18000" rIns="18000" tIns="21600" bIns="21600">
@@ -10819,9 +10208,9 @@
           <a:lstStyle/>
           <a:p>
             <a:r>
-              <a:rPr sz="1400" b="0">
-                <a:solidFill>
-                  <a:srgbClr val="4A556B"/>
+              <a:rPr sz="1400" b="1">
+                <a:solidFill>
+                  <a:srgbClr val="5B678A"/>
                 </a:solidFill>
                 <a:latin typeface="HY엽서M"/>
               </a:rPr>
@@ -10838,13 +10227,14 @@
         </p:nvSpPr>
         <p:spPr>
           <a:xfrm>
-            <a:off x="2088000" y="12614400"/>
+            <a:off x="2088000" y="12639000"/>
             <a:ext cx="1440000" cy="180000"/>
           </a:xfrm>
           <a:prstGeom prst="rect">
             <a:avLst/>
           </a:prstGeom>
           <a:noFill/>
+          <a:ln/>
         </p:spPr>
         <p:txBody>
           <a:bodyPr wrap="none" anchor="ctr" lIns="54000" rIns="54000" tIns="21600" bIns="21600">
@@ -10880,6 +10270,7 @@
             <a:avLst/>
           </a:prstGeom>
           <a:noFill/>
+          <a:ln/>
         </p:spPr>
         <p:txBody>
           <a:bodyPr wrap="none" anchor="ctr" lIns="54000" rIns="54000" tIns="21600" bIns="21600">
@@ -10914,6 +10305,7 @@
             <a:avLst/>
           </a:prstGeom>
           <a:noFill/>
+          <a:ln/>
         </p:spPr>
         <p:txBody>
           <a:bodyPr wrap="none" anchor="ctr" lIns="54000" rIns="54000" tIns="21600" bIns="21600">
@@ -10953,53 +10345,20 @@
       </p:sp>
       <p:sp>
         <p:nvSpPr>
-          <p:cNvPr id="126" name="SUB"/>
-          <p:cNvSpPr txBox="1"/>
-          <p:nvPr/>
-        </p:nvSpPr>
-        <p:spPr>
-          <a:xfrm>
-            <a:off x="432000" y="13726800"/>
-            <a:ext cx="3060000" cy="180000"/>
-          </a:xfrm>
-          <a:prstGeom prst="rect">
-            <a:avLst/>
-          </a:prstGeom>
-          <a:noFill/>
-        </p:spPr>
-        <p:txBody>
-          <a:bodyPr wrap="none" anchor="t" lIns="54000" rIns="54000" tIns="21600" bIns="21600">
-            <a:noAutofit/>
-          </a:bodyPr>
-          <a:lstStyle/>
-          <a:p>
-            <a:r>
-              <a:rPr sz="910" b="0">
-                <a:solidFill>
-                  <a:srgbClr val="8A94A6"/>
-                </a:solidFill>
-                <a:latin typeface="HY엽서M"/>
-              </a:rPr>
-              <a:t>크라운 · 임플란트 · 기타 · 화재보험</a:t>
-            </a:r>
-          </a:p>
-        </p:txBody>
-      </p:sp>
-      <p:sp>
-        <p:nvSpPr>
           <p:cNvPr id="127" name="L_TextBox 13|크라운"/>
           <p:cNvSpPr txBox="1"/>
           <p:nvPr/>
         </p:nvSpPr>
         <p:spPr>
           <a:xfrm>
-            <a:off x="432000" y="13917600"/>
+            <a:off x="432000" y="13842400"/>
             <a:ext cx="1692000" cy="208800"/>
           </a:xfrm>
           <a:prstGeom prst="rect">
             <a:avLst/>
           </a:prstGeom>
           <a:noFill/>
+          <a:ln/>
         </p:spPr>
         <p:txBody>
           <a:bodyPr wrap="none" anchor="ctr" lIns="18000" rIns="18000" tIns="21600" bIns="21600">
@@ -11008,9 +10367,9 @@
           <a:lstStyle/>
           <a:p>
             <a:r>
-              <a:rPr sz="1400" b="0">
-                <a:solidFill>
-                  <a:srgbClr val="4A556B"/>
+              <a:rPr sz="1400" b="1">
+                <a:solidFill>
+                  <a:srgbClr val="5B678A"/>
                 </a:solidFill>
                 <a:latin typeface="HY엽서M"/>
               </a:rPr>
@@ -11027,13 +10386,14 @@
         </p:nvSpPr>
         <p:spPr>
           <a:xfrm>
-            <a:off x="2088000" y="13932000"/>
+            <a:off x="2088000" y="13856800"/>
             <a:ext cx="1440000" cy="180000"/>
           </a:xfrm>
           <a:prstGeom prst="rect">
             <a:avLst/>
           </a:prstGeom>
           <a:noFill/>
+          <a:ln/>
         </p:spPr>
         <p:txBody>
           <a:bodyPr wrap="none" anchor="ctr" lIns="54000" rIns="54000" tIns="21600" bIns="21600">
@@ -11062,13 +10422,14 @@
         </p:nvSpPr>
         <p:spPr>
           <a:xfrm>
-            <a:off x="432000" y="14119200"/>
+            <a:off x="432000" y="14077266"/>
             <a:ext cx="1692000" cy="208800"/>
           </a:xfrm>
           <a:prstGeom prst="rect">
             <a:avLst/>
           </a:prstGeom>
           <a:noFill/>
+          <a:ln/>
         </p:spPr>
         <p:txBody>
           <a:bodyPr wrap="none" anchor="ctr" lIns="18000" rIns="18000" tIns="21600" bIns="21600">
@@ -11077,9 +10438,9 @@
           <a:lstStyle/>
           <a:p>
             <a:r>
-              <a:rPr sz="1400" b="0">
-                <a:solidFill>
-                  <a:srgbClr val="4A556B"/>
+              <a:rPr sz="1400" b="1">
+                <a:solidFill>
+                  <a:srgbClr val="5B678A"/>
                 </a:solidFill>
                 <a:latin typeface="HY엽서M"/>
               </a:rPr>
@@ -11096,13 +10457,14 @@
         </p:nvSpPr>
         <p:spPr>
           <a:xfrm>
-            <a:off x="2088000" y="14133600"/>
+            <a:off x="2088000" y="14091666"/>
             <a:ext cx="1440000" cy="180000"/>
           </a:xfrm>
           <a:prstGeom prst="rect">
             <a:avLst/>
           </a:prstGeom>
           <a:noFill/>
+          <a:ln/>
         </p:spPr>
         <p:txBody>
           <a:bodyPr wrap="none" anchor="ctr" lIns="54000" rIns="54000" tIns="21600" bIns="21600">
@@ -11131,13 +10493,14 @@
         </p:nvSpPr>
         <p:spPr>
           <a:xfrm>
-            <a:off x="432000" y="14320800"/>
+            <a:off x="432000" y="14312133"/>
             <a:ext cx="1692000" cy="208800"/>
           </a:xfrm>
           <a:prstGeom prst="rect">
             <a:avLst/>
           </a:prstGeom>
           <a:noFill/>
+          <a:ln/>
         </p:spPr>
         <p:txBody>
           <a:bodyPr wrap="none" anchor="ctr" lIns="18000" rIns="18000" tIns="21600" bIns="21600">
@@ -11146,9 +10509,9 @@
           <a:lstStyle/>
           <a:p>
             <a:r>
-              <a:rPr sz="1400" b="0">
-                <a:solidFill>
-                  <a:srgbClr val="4A556B"/>
+              <a:rPr sz="1400" b="1">
+                <a:solidFill>
+                  <a:srgbClr val="5B678A"/>
                 </a:solidFill>
                 <a:latin typeface="HY엽서M"/>
               </a:rPr>
@@ -11165,13 +10528,14 @@
         </p:nvSpPr>
         <p:spPr>
           <a:xfrm>
-            <a:off x="2088000" y="14335200"/>
+            <a:off x="2088000" y="14326533"/>
             <a:ext cx="1440000" cy="180000"/>
           </a:xfrm>
           <a:prstGeom prst="rect">
             <a:avLst/>
           </a:prstGeom>
           <a:noFill/>
+          <a:ln/>
         </p:spPr>
         <p:txBody>
           <a:bodyPr wrap="none" anchor="ctr" lIns="54000" rIns="54000" tIns="21600" bIns="21600">
@@ -11200,13 +10564,14 @@
         </p:nvSpPr>
         <p:spPr>
           <a:xfrm>
-            <a:off x="432000" y="14522400"/>
+            <a:off x="432000" y="14546999"/>
             <a:ext cx="1692000" cy="208800"/>
           </a:xfrm>
           <a:prstGeom prst="rect">
             <a:avLst/>
           </a:prstGeom>
           <a:noFill/>
+          <a:ln/>
         </p:spPr>
         <p:txBody>
           <a:bodyPr wrap="none" anchor="ctr" lIns="18000" rIns="18000" tIns="21600" bIns="21600">
@@ -11215,9 +10580,9 @@
           <a:lstStyle/>
           <a:p>
             <a:r>
-              <a:rPr sz="1400" b="0">
-                <a:solidFill>
-                  <a:srgbClr val="4A556B"/>
+              <a:rPr sz="1400" b="1">
+                <a:solidFill>
+                  <a:srgbClr val="5B678A"/>
                 </a:solidFill>
                 <a:latin typeface="HY엽서M"/>
               </a:rPr>
@@ -11234,13 +10599,14 @@
         </p:nvSpPr>
         <p:spPr>
           <a:xfrm>
-            <a:off x="2088000" y="14536800"/>
+            <a:off x="2088000" y="14561400"/>
             <a:ext cx="1440000" cy="180000"/>
           </a:xfrm>
           <a:prstGeom prst="rect">
             <a:avLst/>
           </a:prstGeom>
           <a:noFill/>
+          <a:ln/>
         </p:spPr>
         <p:txBody>
           <a:bodyPr wrap="none" anchor="ctr" lIns="54000" rIns="54000" tIns="21600" bIns="21600">
@@ -11276,6 +10642,7 @@
             <a:avLst/>
           </a:prstGeom>
           <a:noFill/>
+          <a:ln/>
         </p:spPr>
         <p:txBody>
           <a:bodyPr wrap="none" anchor="ctr" lIns="54000" rIns="54000" tIns="21600" bIns="21600">
@@ -11310,6 +10677,7 @@
             <a:avLst/>
           </a:prstGeom>
           <a:noFill/>
+          <a:ln/>
         </p:spPr>
         <p:txBody>
           <a:bodyPr wrap="none" anchor="ctr" lIns="54000" rIns="54000" tIns="21600" bIns="21600">
@@ -11340,53 +10708,20 @@
       </p:sp>
       <p:sp>
         <p:nvSpPr>
-          <p:cNvPr id="143" name="SUB"/>
-          <p:cNvSpPr txBox="1"/>
-          <p:nvPr/>
-        </p:nvSpPr>
-        <p:spPr>
-          <a:xfrm>
-            <a:off x="3816000" y="2383199"/>
-            <a:ext cx="3060000" cy="180000"/>
-          </a:xfrm>
-          <a:prstGeom prst="rect">
-            <a:avLst/>
-          </a:prstGeom>
-          <a:noFill/>
-        </p:spPr>
-        <p:txBody>
-          <a:bodyPr wrap="none" anchor="t" lIns="54000" rIns="54000" tIns="21600" bIns="21600">
-            <a:noAutofit/>
-          </a:bodyPr>
-          <a:lstStyle/>
-          <a:p>
-            <a:r>
-              <a:rPr sz="910" b="0">
-                <a:solidFill>
-                  <a:srgbClr val="8A94A6"/>
-                </a:solidFill>
-                <a:latin typeface="HY엽서M"/>
-              </a:rPr>
-              <a:t>암 범위 — 일반암 100% · 소액암 겹침 · 유사암 10~20%</a:t>
-            </a:r>
-          </a:p>
-        </p:txBody>
-      </p:sp>
-      <p:sp>
-        <p:nvSpPr>
           <p:cNvPr id="147" name="TextBox 14|일반암"/>
           <p:cNvSpPr txBox="1"/>
           <p:nvPr/>
         </p:nvSpPr>
         <p:spPr>
           <a:xfrm>
-            <a:off x="5238000" y="2646000"/>
+            <a:off x="5238000" y="2753999"/>
             <a:ext cx="1512000" cy="198000"/>
           </a:xfrm>
           <a:prstGeom prst="rect">
             <a:avLst/>
           </a:prstGeom>
           <a:noFill/>
+          <a:ln/>
         </p:spPr>
         <p:txBody>
           <a:bodyPr wrap="none" anchor="ctr" lIns="54000" rIns="54000" tIns="21600" bIns="21600">
@@ -11415,13 +10750,14 @@
         </p:nvSpPr>
         <p:spPr>
           <a:xfrm>
-            <a:off x="5183999" y="3167999"/>
+            <a:off x="5183999" y="3428998"/>
             <a:ext cx="1440000" cy="198000"/>
           </a:xfrm>
           <a:prstGeom prst="rect">
             <a:avLst/>
           </a:prstGeom>
           <a:noFill/>
+          <a:ln/>
         </p:spPr>
         <p:txBody>
           <a:bodyPr wrap="none" anchor="ctr" lIns="54000" rIns="54000" tIns="21600" bIns="21600">
@@ -11450,13 +10786,14 @@
         </p:nvSpPr>
         <p:spPr>
           <a:xfrm>
-            <a:off x="5670000" y="4140000"/>
+            <a:off x="5670000" y="4248000"/>
             <a:ext cx="1080000" cy="198000"/>
           </a:xfrm>
           <a:prstGeom prst="rect">
             <a:avLst/>
           </a:prstGeom>
           <a:noFill/>
+          <a:ln/>
         </p:spPr>
         <p:txBody>
           <a:bodyPr wrap="none" anchor="ctr" lIns="54000" rIns="54000" tIns="21600" bIns="21600">
@@ -11485,13 +10822,14 @@
         </p:nvSpPr>
         <p:spPr>
           <a:xfrm>
-            <a:off x="5670000" y="4752000"/>
+            <a:off x="5670000" y="4878000"/>
             <a:ext cx="1080000" cy="198000"/>
           </a:xfrm>
           <a:prstGeom prst="rect">
             <a:avLst/>
           </a:prstGeom>
           <a:noFill/>
+          <a:ln/>
         </p:spPr>
         <p:txBody>
           <a:bodyPr wrap="none" anchor="ctr" lIns="54000" rIns="54000" tIns="21600" bIns="21600">
@@ -11527,6 +10865,7 @@
             <a:avLst/>
           </a:prstGeom>
           <a:noFill/>
+          <a:ln/>
         </p:spPr>
         <p:txBody>
           <a:bodyPr wrap="none" anchor="ctr" lIns="54000" rIns="54000" tIns="21600" bIns="21600">
@@ -11562,6 +10901,7 @@
             <a:avLst/>
           </a:prstGeom>
           <a:noFill/>
+          <a:ln/>
         </p:spPr>
         <p:txBody>
           <a:bodyPr wrap="none" anchor="ctr" lIns="54000" rIns="54000" tIns="21600" bIns="21600">
@@ -11597,6 +10937,7 @@
             <a:avLst/>
           </a:prstGeom>
           <a:noFill/>
+          <a:ln/>
         </p:spPr>
         <p:txBody>
           <a:bodyPr wrap="none" anchor="ctr" lIns="54000" rIns="54000" tIns="21600" bIns="21600">
@@ -11618,53 +10959,20 @@
       </p:sp>
       <p:sp>
         <p:nvSpPr>
-          <p:cNvPr id="175" name="SUB"/>
-          <p:cNvSpPr txBox="1"/>
-          <p:nvPr/>
-        </p:nvSpPr>
-        <p:spPr>
-          <a:xfrm>
-            <a:off x="3816000" y="6631199"/>
-            <a:ext cx="3060000" cy="180000"/>
-          </a:xfrm>
-          <a:prstGeom prst="rect">
-            <a:avLst/>
-          </a:prstGeom>
-          <a:noFill/>
-        </p:spPr>
-        <p:txBody>
-          <a:bodyPr wrap="none" anchor="t" lIns="54000" rIns="54000" tIns="21600" bIns="21600">
-            <a:noAutofit/>
-          </a:bodyPr>
-          <a:lstStyle/>
-          <a:p>
-            <a:r>
-              <a:rPr sz="910" b="0">
-                <a:solidFill>
-                  <a:srgbClr val="8A94A6"/>
-                </a:solidFill>
-                <a:latin typeface="HY엽서M"/>
-              </a:rPr>
-              <a:t>항암 · 표적 · 양성자 · 중입자 · 로봇 · 주요치료비</a:t>
-            </a:r>
-          </a:p>
-        </p:txBody>
-      </p:sp>
-      <p:sp>
-        <p:nvSpPr>
           <p:cNvPr id="176" name="L_TextBox 14|항암치료"/>
           <p:cNvSpPr txBox="1"/>
           <p:nvPr/>
         </p:nvSpPr>
         <p:spPr>
           <a:xfrm>
-            <a:off x="3816000" y="6822000"/>
+            <a:off x="3816000" y="6746799"/>
             <a:ext cx="1692000" cy="208800"/>
           </a:xfrm>
           <a:prstGeom prst="rect">
             <a:avLst/>
           </a:prstGeom>
           <a:noFill/>
+          <a:ln/>
         </p:spPr>
         <p:txBody>
           <a:bodyPr wrap="none" anchor="ctr" lIns="18000" rIns="18000" tIns="21600" bIns="21600">
@@ -11673,9 +10981,9 @@
           <a:lstStyle/>
           <a:p>
             <a:r>
-              <a:rPr sz="1400" b="0">
-                <a:solidFill>
-                  <a:srgbClr val="4A556B"/>
+              <a:rPr sz="1400" b="1">
+                <a:solidFill>
+                  <a:srgbClr val="5B678A"/>
                 </a:solidFill>
                 <a:latin typeface="HY엽서M"/>
               </a:rPr>
@@ -11692,13 +11000,14 @@
         </p:nvSpPr>
         <p:spPr>
           <a:xfrm>
-            <a:off x="5472000" y="6836399"/>
+            <a:off x="5472000" y="6761198"/>
             <a:ext cx="1440000" cy="180000"/>
           </a:xfrm>
           <a:prstGeom prst="rect">
             <a:avLst/>
           </a:prstGeom>
           <a:noFill/>
+          <a:ln/>
         </p:spPr>
         <p:txBody>
           <a:bodyPr wrap="none" anchor="ctr" lIns="54000" rIns="54000" tIns="21600" bIns="21600">
@@ -11727,13 +11036,14 @@
         </p:nvSpPr>
         <p:spPr>
           <a:xfrm>
-            <a:off x="3816000" y="7030799"/>
+            <a:off x="3816000" y="6977488"/>
             <a:ext cx="1692000" cy="208800"/>
           </a:xfrm>
           <a:prstGeom prst="rect">
             <a:avLst/>
           </a:prstGeom>
           <a:noFill/>
+          <a:ln/>
         </p:spPr>
         <p:txBody>
           <a:bodyPr wrap="none" anchor="ctr" lIns="18000" rIns="18000" tIns="21600" bIns="21600">
@@ -11742,9 +11052,9 @@
           <a:lstStyle/>
           <a:p>
             <a:r>
-              <a:rPr sz="1400" b="0">
-                <a:solidFill>
-                  <a:srgbClr val="4A556B"/>
+              <a:rPr sz="1400" b="1">
+                <a:solidFill>
+                  <a:srgbClr val="5B678A"/>
                 </a:solidFill>
                 <a:latin typeface="HY엽서M"/>
               </a:rPr>
@@ -11761,13 +11071,14 @@
         </p:nvSpPr>
         <p:spPr>
           <a:xfrm>
-            <a:off x="5472000" y="7045199"/>
+            <a:off x="5472000" y="6991888"/>
             <a:ext cx="1440000" cy="180000"/>
           </a:xfrm>
           <a:prstGeom prst="rect">
             <a:avLst/>
           </a:prstGeom>
           <a:noFill/>
+          <a:ln/>
         </p:spPr>
         <p:txBody>
           <a:bodyPr wrap="none" anchor="ctr" lIns="54000" rIns="54000" tIns="21600" bIns="21600">
@@ -11796,13 +11107,14 @@
         </p:nvSpPr>
         <p:spPr>
           <a:xfrm>
-            <a:off x="3816000" y="7239599"/>
+            <a:off x="3816000" y="7208177"/>
             <a:ext cx="1692000" cy="208800"/>
           </a:xfrm>
           <a:prstGeom prst="rect">
             <a:avLst/>
           </a:prstGeom>
           <a:noFill/>
+          <a:ln/>
         </p:spPr>
         <p:txBody>
           <a:bodyPr wrap="none" anchor="ctr" lIns="18000" rIns="18000" tIns="21600" bIns="21600">
@@ -11811,9 +11123,9 @@
           <a:lstStyle/>
           <a:p>
             <a:r>
-              <a:rPr sz="1400" b="0">
-                <a:solidFill>
-                  <a:srgbClr val="4A556B"/>
+              <a:rPr sz="1400" b="1">
+                <a:solidFill>
+                  <a:srgbClr val="5B678A"/>
                 </a:solidFill>
                 <a:latin typeface="HY엽서M"/>
               </a:rPr>
@@ -11830,13 +11142,14 @@
         </p:nvSpPr>
         <p:spPr>
           <a:xfrm>
-            <a:off x="5472000" y="7253999"/>
+            <a:off x="5472000" y="7222577"/>
             <a:ext cx="1440000" cy="180000"/>
           </a:xfrm>
           <a:prstGeom prst="rect">
             <a:avLst/>
           </a:prstGeom>
           <a:noFill/>
+          <a:ln/>
         </p:spPr>
         <p:txBody>
           <a:bodyPr wrap="none" anchor="ctr" lIns="54000" rIns="54000" tIns="21600" bIns="21600">
@@ -11865,13 +11178,14 @@
         </p:nvSpPr>
         <p:spPr>
           <a:xfrm>
-            <a:off x="3816000" y="7448399"/>
+            <a:off x="3816000" y="7438866"/>
             <a:ext cx="1692000" cy="208800"/>
           </a:xfrm>
           <a:prstGeom prst="rect">
             <a:avLst/>
           </a:prstGeom>
           <a:noFill/>
+          <a:ln/>
         </p:spPr>
         <p:txBody>
           <a:bodyPr wrap="none" anchor="ctr" lIns="18000" rIns="18000" tIns="21600" bIns="21600">
@@ -11880,9 +11194,9 @@
           <a:lstStyle/>
           <a:p>
             <a:r>
-              <a:rPr sz="1400" b="0">
-                <a:solidFill>
-                  <a:srgbClr val="4A556B"/>
+              <a:rPr sz="1400" b="1">
+                <a:solidFill>
+                  <a:srgbClr val="5B678A"/>
                 </a:solidFill>
                 <a:latin typeface="HY엽서M"/>
               </a:rPr>
@@ -11899,13 +11213,14 @@
         </p:nvSpPr>
         <p:spPr>
           <a:xfrm>
-            <a:off x="5472000" y="7462799"/>
+            <a:off x="5472000" y="7453266"/>
             <a:ext cx="1440000" cy="180000"/>
           </a:xfrm>
           <a:prstGeom prst="rect">
             <a:avLst/>
           </a:prstGeom>
           <a:noFill/>
+          <a:ln/>
         </p:spPr>
         <p:txBody>
           <a:bodyPr wrap="none" anchor="ctr" lIns="54000" rIns="54000" tIns="21600" bIns="21600">
@@ -11934,13 +11249,14 @@
         </p:nvSpPr>
         <p:spPr>
           <a:xfrm>
-            <a:off x="3816000" y="7657199"/>
+            <a:off x="3816000" y="7669555"/>
             <a:ext cx="1692000" cy="208800"/>
           </a:xfrm>
           <a:prstGeom prst="rect">
             <a:avLst/>
           </a:prstGeom>
           <a:noFill/>
+          <a:ln/>
         </p:spPr>
         <p:txBody>
           <a:bodyPr wrap="none" anchor="ctr" lIns="18000" rIns="18000" tIns="21600" bIns="21600">
@@ -11949,9 +11265,9 @@
           <a:lstStyle/>
           <a:p>
             <a:r>
-              <a:rPr sz="1400" b="0">
-                <a:solidFill>
-                  <a:srgbClr val="4A556B"/>
+              <a:rPr sz="1400" b="1">
+                <a:solidFill>
+                  <a:srgbClr val="5B678A"/>
                 </a:solidFill>
                 <a:latin typeface="HY엽서M"/>
               </a:rPr>
@@ -11968,13 +11284,14 @@
         </p:nvSpPr>
         <p:spPr>
           <a:xfrm>
-            <a:off x="5472000" y="7671599"/>
+            <a:off x="5472000" y="7683955"/>
             <a:ext cx="1440000" cy="180000"/>
           </a:xfrm>
           <a:prstGeom prst="rect">
             <a:avLst/>
           </a:prstGeom>
           <a:noFill/>
+          <a:ln/>
         </p:spPr>
         <p:txBody>
           <a:bodyPr wrap="none" anchor="ctr" lIns="54000" rIns="54000" tIns="21600" bIns="21600">
@@ -12003,13 +11320,14 @@
         </p:nvSpPr>
         <p:spPr>
           <a:xfrm>
-            <a:off x="3816000" y="7865999"/>
+            <a:off x="3816000" y="7900243"/>
             <a:ext cx="1692000" cy="208800"/>
           </a:xfrm>
           <a:prstGeom prst="rect">
             <a:avLst/>
           </a:prstGeom>
           <a:noFill/>
+          <a:ln/>
         </p:spPr>
         <p:txBody>
           <a:bodyPr wrap="none" anchor="ctr" lIns="18000" rIns="18000" tIns="21600" bIns="21600">
@@ -12018,9 +11336,9 @@
           <a:lstStyle/>
           <a:p>
             <a:r>
-              <a:rPr sz="1400" b="0">
-                <a:solidFill>
-                  <a:srgbClr val="4A556B"/>
+              <a:rPr sz="1400" b="1">
+                <a:solidFill>
+                  <a:srgbClr val="5B678A"/>
                 </a:solidFill>
                 <a:latin typeface="HY엽서M"/>
               </a:rPr>
@@ -12037,13 +11355,14 @@
         </p:nvSpPr>
         <p:spPr>
           <a:xfrm>
-            <a:off x="5472000" y="7880399"/>
+            <a:off x="5472000" y="7914643"/>
             <a:ext cx="1440000" cy="180000"/>
           </a:xfrm>
           <a:prstGeom prst="rect">
             <a:avLst/>
           </a:prstGeom>
           <a:noFill/>
+          <a:ln/>
         </p:spPr>
         <p:txBody>
           <a:bodyPr wrap="none" anchor="ctr" lIns="54000" rIns="54000" tIns="21600" bIns="21600">
@@ -12072,13 +11391,14 @@
         </p:nvSpPr>
         <p:spPr>
           <a:xfrm>
-            <a:off x="3816000" y="8074799"/>
+            <a:off x="3816000" y="8130933"/>
             <a:ext cx="1692000" cy="208800"/>
           </a:xfrm>
           <a:prstGeom prst="rect">
             <a:avLst/>
           </a:prstGeom>
           <a:noFill/>
+          <a:ln/>
         </p:spPr>
         <p:txBody>
           <a:bodyPr wrap="none" anchor="ctr" lIns="18000" rIns="18000" tIns="21600" bIns="21600">
@@ -12087,9 +11407,9 @@
           <a:lstStyle/>
           <a:p>
             <a:r>
-              <a:rPr sz="1400" b="0">
-                <a:solidFill>
-                  <a:srgbClr val="4A556B"/>
+              <a:rPr sz="1400" b="1">
+                <a:solidFill>
+                  <a:srgbClr val="5B678A"/>
                 </a:solidFill>
                 <a:latin typeface="HY엽서M"/>
               </a:rPr>
@@ -12106,13 +11426,14 @@
         </p:nvSpPr>
         <p:spPr>
           <a:xfrm>
-            <a:off x="5472000" y="8089199"/>
+            <a:off x="5472000" y="8145332"/>
             <a:ext cx="1440000" cy="180000"/>
           </a:xfrm>
           <a:prstGeom prst="rect">
             <a:avLst/>
           </a:prstGeom>
           <a:noFill/>
+          <a:ln/>
         </p:spPr>
         <p:txBody>
           <a:bodyPr wrap="none" anchor="ctr" lIns="54000" rIns="54000" tIns="21600" bIns="21600">
@@ -12141,13 +11462,14 @@
         </p:nvSpPr>
         <p:spPr>
           <a:xfrm>
-            <a:off x="3816000" y="8319599"/>
+            <a:off x="3816000" y="8361622"/>
             <a:ext cx="1692000" cy="208800"/>
           </a:xfrm>
           <a:prstGeom prst="rect">
             <a:avLst/>
           </a:prstGeom>
           <a:noFill/>
+          <a:ln/>
         </p:spPr>
         <p:txBody>
           <a:bodyPr wrap="none" anchor="ctr" lIns="18000" rIns="18000" tIns="21600" bIns="21600">
@@ -12156,9 +11478,9 @@
           <a:lstStyle/>
           <a:p>
             <a:r>
-              <a:rPr sz="1400" b="0">
-                <a:solidFill>
-                  <a:srgbClr val="4A556B"/>
+              <a:rPr sz="1400" b="1">
+                <a:solidFill>
+                  <a:srgbClr val="5B678A"/>
                 </a:solidFill>
                 <a:latin typeface="HY엽서M"/>
               </a:rPr>
@@ -12175,13 +11497,14 @@
         </p:nvSpPr>
         <p:spPr>
           <a:xfrm>
-            <a:off x="5472000" y="8333999"/>
+            <a:off x="5472000" y="8376022"/>
             <a:ext cx="1440000" cy="180000"/>
           </a:xfrm>
           <a:prstGeom prst="rect">
             <a:avLst/>
           </a:prstGeom>
           <a:noFill/>
+          <a:ln/>
         </p:spPr>
         <p:txBody>
           <a:bodyPr wrap="none" anchor="ctr" lIns="54000" rIns="54000" tIns="21600" bIns="21600">
@@ -12210,13 +11533,14 @@
         </p:nvSpPr>
         <p:spPr>
           <a:xfrm>
-            <a:off x="3816000" y="8528399"/>
+            <a:off x="3816000" y="8592310"/>
             <a:ext cx="1692000" cy="208800"/>
           </a:xfrm>
           <a:prstGeom prst="rect">
             <a:avLst/>
           </a:prstGeom>
           <a:noFill/>
+          <a:ln/>
         </p:spPr>
         <p:txBody>
           <a:bodyPr wrap="none" anchor="ctr" lIns="18000" rIns="18000" tIns="21600" bIns="21600">
@@ -12225,9 +11549,9 @@
           <a:lstStyle/>
           <a:p>
             <a:r>
-              <a:rPr sz="1400" b="0">
-                <a:solidFill>
-                  <a:srgbClr val="4A556B"/>
+              <a:rPr sz="1400" b="1">
+                <a:solidFill>
+                  <a:srgbClr val="5B678A"/>
                 </a:solidFill>
                 <a:latin typeface="HY엽서M"/>
               </a:rPr>
@@ -12244,13 +11568,14 @@
         </p:nvSpPr>
         <p:spPr>
           <a:xfrm>
-            <a:off x="5472000" y="8542799"/>
+            <a:off x="5472000" y="8606711"/>
             <a:ext cx="1440000" cy="180000"/>
           </a:xfrm>
           <a:prstGeom prst="rect">
             <a:avLst/>
           </a:prstGeom>
           <a:noFill/>
+          <a:ln/>
         </p:spPr>
         <p:txBody>
           <a:bodyPr wrap="none" anchor="ctr" lIns="54000" rIns="54000" tIns="21600" bIns="21600">
@@ -12279,13 +11604,14 @@
         </p:nvSpPr>
         <p:spPr>
           <a:xfrm>
-            <a:off x="3816000" y="8737199"/>
+            <a:off x="3816000" y="8823000"/>
             <a:ext cx="1692000" cy="208800"/>
           </a:xfrm>
           <a:prstGeom prst="rect">
             <a:avLst/>
           </a:prstGeom>
           <a:noFill/>
+          <a:ln/>
         </p:spPr>
         <p:txBody>
           <a:bodyPr wrap="none" anchor="ctr" lIns="18000" rIns="18000" tIns="21600" bIns="21600">
@@ -12294,9 +11620,9 @@
           <a:lstStyle/>
           <a:p>
             <a:r>
-              <a:rPr sz="1400" b="0">
-                <a:solidFill>
-                  <a:srgbClr val="4A556B"/>
+              <a:rPr sz="1400" b="1">
+                <a:solidFill>
+                  <a:srgbClr val="5B678A"/>
                 </a:solidFill>
                 <a:latin typeface="HY엽서M"/>
               </a:rPr>
@@ -12313,13 +11639,14 @@
         </p:nvSpPr>
         <p:spPr>
           <a:xfrm>
-            <a:off x="5472000" y="8751599"/>
+            <a:off x="5472000" y="8837399"/>
             <a:ext cx="1440000" cy="180000"/>
           </a:xfrm>
           <a:prstGeom prst="rect">
             <a:avLst/>
           </a:prstGeom>
           <a:noFill/>
+          <a:ln/>
         </p:spPr>
         <p:txBody>
           <a:bodyPr wrap="none" anchor="ctr" lIns="54000" rIns="54000" tIns="21600" bIns="21600">
@@ -12355,6 +11682,7 @@
             <a:avLst/>
           </a:prstGeom>
           <a:noFill/>
+          <a:ln/>
         </p:spPr>
         <p:txBody>
           <a:bodyPr wrap="none" anchor="ctr" lIns="54000" rIns="54000" tIns="21600" bIns="21600">
@@ -12389,6 +11717,7 @@
             <a:avLst/>
           </a:prstGeom>
           <a:noFill/>
+          <a:ln/>
         </p:spPr>
         <p:txBody>
           <a:bodyPr wrap="none" anchor="ctr" lIns="54000" rIns="54000" tIns="21600" bIns="21600">
@@ -12410,53 +11739,20 @@
       </p:sp>
       <p:sp>
         <p:nvSpPr>
-          <p:cNvPr id="211" name="SUB"/>
-          <p:cNvSpPr txBox="1"/>
-          <p:nvPr/>
-        </p:nvSpPr>
-        <p:spPr>
-          <a:xfrm>
-            <a:off x="3816000" y="10105199"/>
-            <a:ext cx="3060000" cy="180000"/>
-          </a:xfrm>
-          <a:prstGeom prst="rect">
-            <a:avLst/>
-          </a:prstGeom>
-          <a:noFill/>
-        </p:spPr>
-        <p:txBody>
-          <a:bodyPr wrap="none" anchor="t" lIns="54000" rIns="54000" tIns="21600" bIns="21600">
-            <a:noAutofit/>
-          </a:bodyPr>
-          <a:lstStyle/>
-          <a:p>
-            <a:r>
-              <a:rPr sz="910" b="0">
-                <a:solidFill>
-                  <a:srgbClr val="8A94A6"/>
-                </a:solidFill>
-                <a:latin typeface="HY엽서M"/>
-              </a:rPr>
-              <a:t>질병 · 종수술 · 뇌혈관 · 심장</a:t>
-            </a:r>
-          </a:p>
-        </p:txBody>
-      </p:sp>
-      <p:sp>
-        <p:nvSpPr>
           <p:cNvPr id="212" name="L_TextBox 17|질병수술"/>
           <p:cNvSpPr txBox="1"/>
           <p:nvPr/>
         </p:nvSpPr>
         <p:spPr>
           <a:xfrm>
-            <a:off x="3816000" y="10296000"/>
+            <a:off x="3816000" y="10220799"/>
             <a:ext cx="1476000" cy="208800"/>
           </a:xfrm>
           <a:prstGeom prst="rect">
             <a:avLst/>
           </a:prstGeom>
           <a:noFill/>
+          <a:ln/>
         </p:spPr>
         <p:txBody>
           <a:bodyPr wrap="none" anchor="ctr" lIns="18000" rIns="18000" tIns="21600" bIns="21600">
@@ -12465,9 +11761,9 @@
           <a:lstStyle/>
           <a:p>
             <a:r>
-              <a:rPr sz="1400" b="0">
-                <a:solidFill>
-                  <a:srgbClr val="4A556B"/>
+              <a:rPr sz="1260" b="1">
+                <a:solidFill>
+                  <a:srgbClr val="5B678A"/>
                 </a:solidFill>
                 <a:latin typeface="HY엽서M"/>
               </a:rPr>
@@ -12484,13 +11780,14 @@
         </p:nvSpPr>
         <p:spPr>
           <a:xfrm>
-            <a:off x="5256000" y="10310399"/>
+            <a:off x="5256000" y="10235198"/>
             <a:ext cx="1655999" cy="151200"/>
           </a:xfrm>
           <a:prstGeom prst="rect">
             <a:avLst/>
           </a:prstGeom>
           <a:noFill/>
+          <a:ln/>
         </p:spPr>
         <p:txBody>
           <a:bodyPr wrap="none" anchor="ctr" lIns="54000" rIns="54000" tIns="21600" bIns="21600">
@@ -12519,13 +11816,14 @@
         </p:nvSpPr>
         <p:spPr>
           <a:xfrm>
-            <a:off x="3816000" y="10468800"/>
+            <a:off x="3816000" y="10399619"/>
             <a:ext cx="1476000" cy="208800"/>
           </a:xfrm>
           <a:prstGeom prst="rect">
             <a:avLst/>
           </a:prstGeom>
           <a:noFill/>
+          <a:ln/>
         </p:spPr>
         <p:txBody>
           <a:bodyPr wrap="none" anchor="ctr" lIns="18000" rIns="18000" tIns="21600" bIns="21600">
@@ -12534,9 +11832,9 @@
           <a:lstStyle/>
           <a:p>
             <a:r>
-              <a:rPr sz="1400" b="0">
-                <a:solidFill>
-                  <a:srgbClr val="4A556B"/>
+              <a:rPr sz="1260" b="1">
+                <a:solidFill>
+                  <a:srgbClr val="5B678A"/>
                 </a:solidFill>
                 <a:latin typeface="HY엽서M"/>
               </a:rPr>
@@ -12553,13 +11851,14 @@
         </p:nvSpPr>
         <p:spPr>
           <a:xfrm>
-            <a:off x="5256000" y="10483200"/>
+            <a:off x="5256000" y="10414019"/>
             <a:ext cx="1655999" cy="151200"/>
           </a:xfrm>
           <a:prstGeom prst="rect">
             <a:avLst/>
           </a:prstGeom>
           <a:noFill/>
+          <a:ln/>
         </p:spPr>
         <p:txBody>
           <a:bodyPr wrap="none" anchor="ctr" lIns="54000" rIns="54000" tIns="21600" bIns="21600">
@@ -12588,13 +11887,14 @@
         </p:nvSpPr>
         <p:spPr>
           <a:xfrm>
-            <a:off x="3816000" y="10641600"/>
+            <a:off x="3816000" y="10578439"/>
             <a:ext cx="1476000" cy="208800"/>
           </a:xfrm>
           <a:prstGeom prst="rect">
             <a:avLst/>
           </a:prstGeom>
           <a:noFill/>
+          <a:ln/>
         </p:spPr>
         <p:txBody>
           <a:bodyPr wrap="none" anchor="ctr" lIns="18000" rIns="18000" tIns="21600" bIns="21600">
@@ -12603,9 +11903,9 @@
           <a:lstStyle/>
           <a:p>
             <a:r>
-              <a:rPr sz="1400" b="0">
-                <a:solidFill>
-                  <a:srgbClr val="4A556B"/>
+              <a:rPr sz="1260" b="1">
+                <a:solidFill>
+                  <a:srgbClr val="5B678A"/>
                 </a:solidFill>
                 <a:latin typeface="HY엽서M"/>
               </a:rPr>
@@ -12622,13 +11922,14 @@
         </p:nvSpPr>
         <p:spPr>
           <a:xfrm>
-            <a:off x="5256000" y="10656000"/>
+            <a:off x="5256000" y="10592839"/>
             <a:ext cx="1655999" cy="151200"/>
           </a:xfrm>
           <a:prstGeom prst="rect">
             <a:avLst/>
           </a:prstGeom>
           <a:noFill/>
+          <a:ln/>
         </p:spPr>
         <p:txBody>
           <a:bodyPr wrap="none" anchor="ctr" lIns="54000" rIns="54000" tIns="21600" bIns="21600">
@@ -12657,13 +11958,14 @@
         </p:nvSpPr>
         <p:spPr>
           <a:xfrm>
-            <a:off x="3816000" y="10814400"/>
+            <a:off x="3816000" y="10757259"/>
             <a:ext cx="1188000" cy="208800"/>
           </a:xfrm>
           <a:prstGeom prst="rect">
             <a:avLst/>
           </a:prstGeom>
           <a:noFill/>
+          <a:ln/>
         </p:spPr>
         <p:txBody>
           <a:bodyPr wrap="none" anchor="ctr" lIns="18000" rIns="18000" tIns="21600" bIns="21600">
@@ -12672,9 +11974,9 @@
           <a:lstStyle/>
           <a:p>
             <a:r>
-              <a:rPr sz="1400" b="0">
-                <a:solidFill>
-                  <a:srgbClr val="4A556B"/>
+              <a:rPr sz="1260" b="1">
+                <a:solidFill>
+                  <a:srgbClr val="5B678A"/>
                 </a:solidFill>
                 <a:latin typeface="HY엽서M"/>
               </a:rPr>
@@ -12691,13 +11993,14 @@
         </p:nvSpPr>
         <p:spPr>
           <a:xfrm>
-            <a:off x="4968000" y="10828800"/>
+            <a:off x="4968000" y="10771659"/>
             <a:ext cx="1944000" cy="151200"/>
           </a:xfrm>
           <a:prstGeom prst="rect">
             <a:avLst/>
           </a:prstGeom>
           <a:noFill/>
+          <a:ln/>
         </p:spPr>
         <p:txBody>
           <a:bodyPr wrap="none" anchor="ctr" lIns="54000" rIns="54000" tIns="21600" bIns="21600">
@@ -12726,13 +12029,14 @@
         </p:nvSpPr>
         <p:spPr>
           <a:xfrm>
-            <a:off x="3816000" y="10987200"/>
+            <a:off x="3816000" y="10936079"/>
             <a:ext cx="1476000" cy="208800"/>
           </a:xfrm>
           <a:prstGeom prst="rect">
             <a:avLst/>
           </a:prstGeom>
           <a:noFill/>
+          <a:ln/>
         </p:spPr>
         <p:txBody>
           <a:bodyPr wrap="none" anchor="ctr" lIns="18000" rIns="18000" tIns="21600" bIns="21600">
@@ -12741,9 +12045,9 @@
           <a:lstStyle/>
           <a:p>
             <a:r>
-              <a:rPr sz="1400" b="0">
-                <a:solidFill>
-                  <a:srgbClr val="4A556B"/>
+              <a:rPr sz="1260" b="1">
+                <a:solidFill>
+                  <a:srgbClr val="5B678A"/>
                 </a:solidFill>
                 <a:latin typeface="HY엽서M"/>
               </a:rPr>
@@ -12760,13 +12064,14 @@
         </p:nvSpPr>
         <p:spPr>
           <a:xfrm>
-            <a:off x="5256000" y="11001600"/>
+            <a:off x="5256000" y="10950479"/>
             <a:ext cx="1655999" cy="151200"/>
           </a:xfrm>
           <a:prstGeom prst="rect">
             <a:avLst/>
           </a:prstGeom>
           <a:noFill/>
+          <a:ln/>
         </p:spPr>
         <p:txBody>
           <a:bodyPr wrap="none" anchor="ctr" lIns="54000" rIns="54000" tIns="21600" bIns="21600">
@@ -12795,13 +12100,14 @@
         </p:nvSpPr>
         <p:spPr>
           <a:xfrm>
-            <a:off x="3816000" y="11160000"/>
+            <a:off x="3816000" y="11114899"/>
             <a:ext cx="1476000" cy="208800"/>
           </a:xfrm>
           <a:prstGeom prst="rect">
             <a:avLst/>
           </a:prstGeom>
           <a:noFill/>
+          <a:ln/>
         </p:spPr>
         <p:txBody>
           <a:bodyPr wrap="none" anchor="ctr" lIns="18000" rIns="18000" tIns="21600" bIns="21600">
@@ -12810,9 +12116,9 @@
           <a:lstStyle/>
           <a:p>
             <a:r>
-              <a:rPr sz="1400" b="0">
-                <a:solidFill>
-                  <a:srgbClr val="4A556B"/>
+              <a:rPr sz="1260" b="1">
+                <a:solidFill>
+                  <a:srgbClr val="5B678A"/>
                 </a:solidFill>
                 <a:latin typeface="HY엽서M"/>
               </a:rPr>
@@ -12829,13 +12135,14 @@
         </p:nvSpPr>
         <p:spPr>
           <a:xfrm>
-            <a:off x="5256000" y="11174400"/>
+            <a:off x="5256000" y="11129299"/>
             <a:ext cx="1655999" cy="151200"/>
           </a:xfrm>
           <a:prstGeom prst="rect">
             <a:avLst/>
           </a:prstGeom>
           <a:noFill/>
+          <a:ln/>
         </p:spPr>
         <p:txBody>
           <a:bodyPr wrap="none" anchor="ctr" lIns="54000" rIns="54000" tIns="21600" bIns="21600">
@@ -12864,13 +12171,14 @@
         </p:nvSpPr>
         <p:spPr>
           <a:xfrm>
-            <a:off x="3816000" y="11332800"/>
+            <a:off x="3816000" y="11293719"/>
             <a:ext cx="1476000" cy="208800"/>
           </a:xfrm>
           <a:prstGeom prst="rect">
             <a:avLst/>
           </a:prstGeom>
           <a:noFill/>
+          <a:ln/>
         </p:spPr>
         <p:txBody>
           <a:bodyPr wrap="none" anchor="ctr" lIns="18000" rIns="18000" tIns="21600" bIns="21600">
@@ -12879,9 +12187,9 @@
           <a:lstStyle/>
           <a:p>
             <a:r>
-              <a:rPr sz="1400" b="0">
-                <a:solidFill>
-                  <a:srgbClr val="4A556B"/>
+              <a:rPr sz="1260" b="1">
+                <a:solidFill>
+                  <a:srgbClr val="5B678A"/>
                 </a:solidFill>
                 <a:latin typeface="HY엽서M"/>
               </a:rPr>
@@ -12898,13 +12206,14 @@
         </p:nvSpPr>
         <p:spPr>
           <a:xfrm>
-            <a:off x="5256000" y="11347200"/>
+            <a:off x="5256000" y="11308119"/>
             <a:ext cx="1655999" cy="151200"/>
           </a:xfrm>
           <a:prstGeom prst="rect">
             <a:avLst/>
           </a:prstGeom>
           <a:noFill/>
+          <a:ln/>
         </p:spPr>
         <p:txBody>
           <a:bodyPr wrap="none" anchor="ctr" lIns="54000" rIns="54000" tIns="21600" bIns="21600">
@@ -12933,13 +12242,14 @@
         </p:nvSpPr>
         <p:spPr>
           <a:xfrm>
-            <a:off x="3816000" y="11505600"/>
+            <a:off x="3816000" y="11472539"/>
             <a:ext cx="1476000" cy="208800"/>
           </a:xfrm>
           <a:prstGeom prst="rect">
             <a:avLst/>
           </a:prstGeom>
           <a:noFill/>
+          <a:ln/>
         </p:spPr>
         <p:txBody>
           <a:bodyPr wrap="none" anchor="ctr" lIns="18000" rIns="18000" tIns="21600" bIns="21600">
@@ -12948,9 +12258,9 @@
           <a:lstStyle/>
           <a:p>
             <a:r>
-              <a:rPr sz="1400" b="0">
-                <a:solidFill>
-                  <a:srgbClr val="4A556B"/>
+              <a:rPr sz="1260" b="1">
+                <a:solidFill>
+                  <a:srgbClr val="5B678A"/>
                 </a:solidFill>
                 <a:latin typeface="HY엽서M"/>
               </a:rPr>
@@ -12967,13 +12277,14 @@
         </p:nvSpPr>
         <p:spPr>
           <a:xfrm>
-            <a:off x="5256000" y="11520000"/>
+            <a:off x="5256000" y="11486939"/>
             <a:ext cx="1655999" cy="151200"/>
           </a:xfrm>
           <a:prstGeom prst="rect">
             <a:avLst/>
           </a:prstGeom>
           <a:noFill/>
+          <a:ln/>
         </p:spPr>
         <p:txBody>
           <a:bodyPr wrap="none" anchor="ctr" lIns="54000" rIns="54000" tIns="21600" bIns="21600">
@@ -13002,13 +12313,14 @@
         </p:nvSpPr>
         <p:spPr>
           <a:xfrm>
-            <a:off x="3816000" y="11678400"/>
+            <a:off x="3816000" y="11651359"/>
             <a:ext cx="1476000" cy="208800"/>
           </a:xfrm>
           <a:prstGeom prst="rect">
             <a:avLst/>
           </a:prstGeom>
           <a:noFill/>
+          <a:ln/>
         </p:spPr>
         <p:txBody>
           <a:bodyPr wrap="none" anchor="ctr" lIns="18000" rIns="18000" tIns="21600" bIns="21600">
@@ -13017,9 +12329,9 @@
           <a:lstStyle/>
           <a:p>
             <a:r>
-              <a:rPr sz="1400" b="0">
-                <a:solidFill>
-                  <a:srgbClr val="4A556B"/>
+              <a:rPr sz="1260" b="1">
+                <a:solidFill>
+                  <a:srgbClr val="5B678A"/>
                 </a:solidFill>
                 <a:latin typeface="HY엽서M"/>
               </a:rPr>
@@ -13036,13 +12348,14 @@
         </p:nvSpPr>
         <p:spPr>
           <a:xfrm>
-            <a:off x="5256000" y="11692799"/>
+            <a:off x="5256000" y="11665758"/>
             <a:ext cx="1655999" cy="151200"/>
           </a:xfrm>
           <a:prstGeom prst="rect">
             <a:avLst/>
           </a:prstGeom>
           <a:noFill/>
+          <a:ln/>
         </p:spPr>
         <p:txBody>
           <a:bodyPr wrap="none" anchor="ctr" lIns="54000" rIns="54000" tIns="21600" bIns="21600">
@@ -13071,13 +12384,14 @@
         </p:nvSpPr>
         <p:spPr>
           <a:xfrm>
-            <a:off x="3816000" y="11851199"/>
+            <a:off x="3816000" y="11830179"/>
             <a:ext cx="1476000" cy="208800"/>
           </a:xfrm>
           <a:prstGeom prst="rect">
             <a:avLst/>
           </a:prstGeom>
           <a:noFill/>
+          <a:ln/>
         </p:spPr>
         <p:txBody>
           <a:bodyPr wrap="none" anchor="ctr" lIns="18000" rIns="18000" tIns="21600" bIns="21600">
@@ -13086,9 +12400,9 @@
           <a:lstStyle/>
           <a:p>
             <a:r>
-              <a:rPr sz="1400" b="0">
-                <a:solidFill>
-                  <a:srgbClr val="4A556B"/>
+              <a:rPr sz="1260" b="1">
+                <a:solidFill>
+                  <a:srgbClr val="5B678A"/>
                 </a:solidFill>
                 <a:latin typeface="HY엽서M"/>
               </a:rPr>
@@ -13105,13 +12419,14 @@
         </p:nvSpPr>
         <p:spPr>
           <a:xfrm>
-            <a:off x="5256000" y="11865599"/>
+            <a:off x="5256000" y="11844579"/>
             <a:ext cx="1655999" cy="151200"/>
           </a:xfrm>
           <a:prstGeom prst="rect">
             <a:avLst/>
           </a:prstGeom>
           <a:noFill/>
+          <a:ln/>
         </p:spPr>
         <p:txBody>
           <a:bodyPr wrap="none" anchor="ctr" lIns="54000" rIns="54000" tIns="21600" bIns="21600">
@@ -13140,13 +12455,14 @@
         </p:nvSpPr>
         <p:spPr>
           <a:xfrm>
-            <a:off x="3816000" y="12023999"/>
+            <a:off x="3816000" y="12009000"/>
             <a:ext cx="1476000" cy="208800"/>
           </a:xfrm>
           <a:prstGeom prst="rect">
             <a:avLst/>
           </a:prstGeom>
           <a:noFill/>
+          <a:ln/>
         </p:spPr>
         <p:txBody>
           <a:bodyPr wrap="none" anchor="ctr" lIns="18000" rIns="18000" tIns="21600" bIns="21600">
@@ -13155,9 +12471,9 @@
           <a:lstStyle/>
           <a:p>
             <a:r>
-              <a:rPr sz="1400" b="0">
-                <a:solidFill>
-                  <a:srgbClr val="4A556B"/>
+              <a:rPr sz="1260" b="1">
+                <a:solidFill>
+                  <a:srgbClr val="5B678A"/>
                 </a:solidFill>
                 <a:latin typeface="HY엽서M"/>
               </a:rPr>
@@ -13174,13 +12490,14 @@
         </p:nvSpPr>
         <p:spPr>
           <a:xfrm>
-            <a:off x="5256000" y="12038399"/>
+            <a:off x="5256000" y="12023400"/>
             <a:ext cx="1655999" cy="151200"/>
           </a:xfrm>
           <a:prstGeom prst="rect">
             <a:avLst/>
           </a:prstGeom>
           <a:noFill/>
+          <a:ln/>
         </p:spPr>
         <p:txBody>
           <a:bodyPr wrap="none" anchor="ctr" lIns="54000" rIns="54000" tIns="21600" bIns="21600">
@@ -13216,6 +12533,7 @@
             <a:avLst/>
           </a:prstGeom>
           <a:noFill/>
+          <a:ln/>
         </p:spPr>
         <p:txBody>
           <a:bodyPr wrap="none" anchor="ctr" lIns="54000" rIns="54000" tIns="21600" bIns="21600">
@@ -13237,53 +12555,20 @@
       </p:sp>
       <p:sp>
         <p:nvSpPr>
-          <p:cNvPr id="247" name="SUB"/>
-          <p:cNvSpPr txBox="1"/>
-          <p:nvPr/>
-        </p:nvSpPr>
-        <p:spPr>
-          <a:xfrm>
-            <a:off x="3816000" y="12643200"/>
-            <a:ext cx="3060000" cy="180000"/>
-          </a:xfrm>
-          <a:prstGeom prst="rect">
-            <a:avLst/>
-          </a:prstGeom>
-          <a:noFill/>
-        </p:spPr>
-        <p:txBody>
-          <a:bodyPr wrap="none" anchor="t" lIns="54000" rIns="54000" tIns="21600" bIns="21600">
-            <a:noAutofit/>
-          </a:bodyPr>
-          <a:lstStyle/>
-          <a:p>
-            <a:r>
-              <a:rPr sz="910" b="0">
-                <a:solidFill>
-                  <a:srgbClr val="8A94A6"/>
-                </a:solidFill>
-                <a:latin typeface="HY엽서M"/>
-              </a:rPr>
-              <a:t>상해 · 종수술 · 골절 · 화상</a:t>
-            </a:r>
-          </a:p>
-        </p:txBody>
-      </p:sp>
-      <p:sp>
-        <p:nvSpPr>
           <p:cNvPr id="248" name="L_TextBox 19|상해수술"/>
           <p:cNvSpPr txBox="1"/>
           <p:nvPr/>
         </p:nvSpPr>
         <p:spPr>
           <a:xfrm>
-            <a:off x="3816000" y="12834000"/>
+            <a:off x="3816000" y="12758799"/>
             <a:ext cx="1476000" cy="208800"/>
           </a:xfrm>
           <a:prstGeom prst="rect">
             <a:avLst/>
           </a:prstGeom>
           <a:noFill/>
+          <a:ln/>
         </p:spPr>
         <p:txBody>
           <a:bodyPr wrap="none" anchor="ctr" lIns="18000" rIns="18000" tIns="21600" bIns="21600">
@@ -13292,9 +12577,9 @@
           <a:lstStyle/>
           <a:p>
             <a:r>
-              <a:rPr sz="1400" b="0">
-                <a:solidFill>
-                  <a:srgbClr val="4A556B"/>
+              <a:rPr sz="1260" b="1">
+                <a:solidFill>
+                  <a:srgbClr val="5B678A"/>
                 </a:solidFill>
                 <a:latin typeface="HY엽서M"/>
               </a:rPr>
@@ -13311,13 +12596,14 @@
         </p:nvSpPr>
         <p:spPr>
           <a:xfrm>
-            <a:off x="5256000" y="12848400"/>
+            <a:off x="5256000" y="12773199"/>
             <a:ext cx="1655999" cy="151200"/>
           </a:xfrm>
           <a:prstGeom prst="rect">
             <a:avLst/>
           </a:prstGeom>
           <a:noFill/>
+          <a:ln/>
         </p:spPr>
         <p:txBody>
           <a:bodyPr wrap="none" anchor="ctr" lIns="54000" rIns="54000" tIns="21600" bIns="21600">
@@ -13346,13 +12632,14 @@
         </p:nvSpPr>
         <p:spPr>
           <a:xfrm>
-            <a:off x="3816000" y="13006799"/>
+            <a:off x="3816000" y="12937619"/>
             <a:ext cx="1476000" cy="208800"/>
           </a:xfrm>
           <a:prstGeom prst="rect">
             <a:avLst/>
           </a:prstGeom>
           <a:noFill/>
+          <a:ln/>
         </p:spPr>
         <p:txBody>
           <a:bodyPr wrap="none" anchor="ctr" lIns="18000" rIns="18000" tIns="21600" bIns="21600">
@@ -13361,9 +12648,9 @@
           <a:lstStyle/>
           <a:p>
             <a:r>
-              <a:rPr sz="1400" b="0">
-                <a:solidFill>
-                  <a:srgbClr val="4A556B"/>
+              <a:rPr sz="1260" b="1">
+                <a:solidFill>
+                  <a:srgbClr val="5B678A"/>
                 </a:solidFill>
                 <a:latin typeface="HY엽서M"/>
               </a:rPr>
@@ -13380,13 +12667,14 @@
         </p:nvSpPr>
         <p:spPr>
           <a:xfrm>
-            <a:off x="5256000" y="13021199"/>
+            <a:off x="5256000" y="12952019"/>
             <a:ext cx="1655999" cy="151200"/>
           </a:xfrm>
           <a:prstGeom prst="rect">
             <a:avLst/>
           </a:prstGeom>
           <a:noFill/>
+          <a:ln/>
         </p:spPr>
         <p:txBody>
           <a:bodyPr wrap="none" anchor="ctr" lIns="54000" rIns="54000" tIns="21600" bIns="21600">
@@ -13415,13 +12703,14 @@
         </p:nvSpPr>
         <p:spPr>
           <a:xfrm>
-            <a:off x="3816000" y="13179599"/>
+            <a:off x="3816000" y="13116439"/>
             <a:ext cx="1476000" cy="208800"/>
           </a:xfrm>
           <a:prstGeom prst="rect">
             <a:avLst/>
           </a:prstGeom>
           <a:noFill/>
+          <a:ln/>
         </p:spPr>
         <p:txBody>
           <a:bodyPr wrap="none" anchor="ctr" lIns="18000" rIns="18000" tIns="21600" bIns="21600">
@@ -13430,9 +12719,9 @@
           <a:lstStyle/>
           <a:p>
             <a:r>
-              <a:rPr sz="1400" b="0">
-                <a:solidFill>
-                  <a:srgbClr val="4A556B"/>
+              <a:rPr sz="1260" b="1">
+                <a:solidFill>
+                  <a:srgbClr val="5B678A"/>
                 </a:solidFill>
                 <a:latin typeface="HY엽서M"/>
               </a:rPr>
@@ -13449,13 +12738,14 @@
         </p:nvSpPr>
         <p:spPr>
           <a:xfrm>
-            <a:off x="5256000" y="13193999"/>
+            <a:off x="5256000" y="13130839"/>
             <a:ext cx="1655999" cy="151200"/>
           </a:xfrm>
           <a:prstGeom prst="rect">
             <a:avLst/>
           </a:prstGeom>
           <a:noFill/>
+          <a:ln/>
         </p:spPr>
         <p:txBody>
           <a:bodyPr wrap="none" anchor="ctr" lIns="54000" rIns="54000" tIns="21600" bIns="21600">
@@ -13484,13 +12774,14 @@
         </p:nvSpPr>
         <p:spPr>
           <a:xfrm>
-            <a:off x="3816000" y="13352399"/>
+            <a:off x="3816000" y="13295259"/>
             <a:ext cx="1188000" cy="208800"/>
           </a:xfrm>
           <a:prstGeom prst="rect">
             <a:avLst/>
           </a:prstGeom>
           <a:noFill/>
+          <a:ln/>
         </p:spPr>
         <p:txBody>
           <a:bodyPr wrap="none" anchor="ctr" lIns="18000" rIns="18000" tIns="21600" bIns="21600">
@@ -13499,9 +12790,9 @@
           <a:lstStyle/>
           <a:p>
             <a:r>
-              <a:rPr sz="1400" b="0">
-                <a:solidFill>
-                  <a:srgbClr val="4A556B"/>
+              <a:rPr sz="1260" b="1">
+                <a:solidFill>
+                  <a:srgbClr val="5B678A"/>
                 </a:solidFill>
                 <a:latin typeface="HY엽서M"/>
               </a:rPr>
@@ -13518,13 +12809,14 @@
         </p:nvSpPr>
         <p:spPr>
           <a:xfrm>
-            <a:off x="4968000" y="13366799"/>
+            <a:off x="4968000" y="13309659"/>
             <a:ext cx="1944000" cy="151200"/>
           </a:xfrm>
           <a:prstGeom prst="rect">
             <a:avLst/>
           </a:prstGeom>
           <a:noFill/>
+          <a:ln/>
         </p:spPr>
         <p:txBody>
           <a:bodyPr wrap="none" anchor="ctr" lIns="54000" rIns="54000" tIns="21600" bIns="21600">
@@ -13553,13 +12845,14 @@
         </p:nvSpPr>
         <p:spPr>
           <a:xfrm>
-            <a:off x="3816000" y="13525199"/>
+            <a:off x="3816000" y="13474079"/>
             <a:ext cx="1476000" cy="208800"/>
           </a:xfrm>
           <a:prstGeom prst="rect">
             <a:avLst/>
           </a:prstGeom>
           <a:noFill/>
+          <a:ln/>
         </p:spPr>
         <p:txBody>
           <a:bodyPr wrap="none" anchor="ctr" lIns="18000" rIns="18000" tIns="21600" bIns="21600">
@@ -13568,9 +12861,9 @@
           <a:lstStyle/>
           <a:p>
             <a:r>
-              <a:rPr sz="1400" b="0">
-                <a:solidFill>
-                  <a:srgbClr val="4A556B"/>
+              <a:rPr sz="1260" b="1">
+                <a:solidFill>
+                  <a:srgbClr val="5B678A"/>
                 </a:solidFill>
                 <a:latin typeface="HY엽서M"/>
               </a:rPr>
@@ -13587,13 +12880,14 @@
         </p:nvSpPr>
         <p:spPr>
           <a:xfrm>
-            <a:off x="5256000" y="13539599"/>
+            <a:off x="5256000" y="13488479"/>
             <a:ext cx="1655999" cy="151200"/>
           </a:xfrm>
           <a:prstGeom prst="rect">
             <a:avLst/>
           </a:prstGeom>
           <a:noFill/>
+          <a:ln/>
         </p:spPr>
         <p:txBody>
           <a:bodyPr wrap="none" anchor="ctr" lIns="54000" rIns="54000" tIns="21600" bIns="21600">
@@ -13622,13 +12916,14 @@
         </p:nvSpPr>
         <p:spPr>
           <a:xfrm>
-            <a:off x="3816000" y="13697999"/>
+            <a:off x="3816000" y="13652899"/>
             <a:ext cx="1476000" cy="208800"/>
           </a:xfrm>
           <a:prstGeom prst="rect">
             <a:avLst/>
           </a:prstGeom>
           <a:noFill/>
+          <a:ln/>
         </p:spPr>
         <p:txBody>
           <a:bodyPr wrap="none" anchor="ctr" lIns="18000" rIns="18000" tIns="21600" bIns="21600">
@@ -13637,9 +12932,9 @@
           <a:lstStyle/>
           <a:p>
             <a:r>
-              <a:rPr sz="1400" b="0">
-                <a:solidFill>
-                  <a:srgbClr val="4A556B"/>
+              <a:rPr sz="1260" b="1">
+                <a:solidFill>
+                  <a:srgbClr val="5B678A"/>
                 </a:solidFill>
                 <a:latin typeface="HY엽서M"/>
               </a:rPr>
@@ -13656,13 +12951,14 @@
         </p:nvSpPr>
         <p:spPr>
           <a:xfrm>
-            <a:off x="5256000" y="13712399"/>
+            <a:off x="5256000" y="13667299"/>
             <a:ext cx="1655999" cy="151200"/>
           </a:xfrm>
           <a:prstGeom prst="rect">
             <a:avLst/>
           </a:prstGeom>
           <a:noFill/>
+          <a:ln/>
         </p:spPr>
         <p:txBody>
           <a:bodyPr wrap="none" anchor="ctr" lIns="54000" rIns="54000" tIns="21600" bIns="21600">
@@ -13691,13 +12987,14 @@
         </p:nvSpPr>
         <p:spPr>
           <a:xfrm>
-            <a:off x="3816000" y="13870799"/>
+            <a:off x="3816000" y="13831719"/>
             <a:ext cx="1476000" cy="208800"/>
           </a:xfrm>
           <a:prstGeom prst="rect">
             <a:avLst/>
           </a:prstGeom>
           <a:noFill/>
+          <a:ln/>
         </p:spPr>
         <p:txBody>
           <a:bodyPr wrap="none" anchor="ctr" lIns="18000" rIns="18000" tIns="21600" bIns="21600">
@@ -13706,9 +13003,9 @@
           <a:lstStyle/>
           <a:p>
             <a:r>
-              <a:rPr sz="1400" b="0">
-                <a:solidFill>
-                  <a:srgbClr val="4A556B"/>
+              <a:rPr sz="1260" b="1">
+                <a:solidFill>
+                  <a:srgbClr val="5B678A"/>
                 </a:solidFill>
                 <a:latin typeface="HY엽서M"/>
               </a:rPr>
@@ -13725,13 +13022,14 @@
         </p:nvSpPr>
         <p:spPr>
           <a:xfrm>
-            <a:off x="5256000" y="13885199"/>
+            <a:off x="5256000" y="13846119"/>
             <a:ext cx="1655999" cy="151200"/>
           </a:xfrm>
           <a:prstGeom prst="rect">
             <a:avLst/>
           </a:prstGeom>
           <a:noFill/>
+          <a:ln/>
         </p:spPr>
         <p:txBody>
           <a:bodyPr wrap="none" anchor="ctr" lIns="54000" rIns="54000" tIns="21600" bIns="21600">
@@ -13760,13 +13058,14 @@
         </p:nvSpPr>
         <p:spPr>
           <a:xfrm>
-            <a:off x="3816000" y="14043599"/>
+            <a:off x="3816000" y="14010539"/>
             <a:ext cx="1476000" cy="208800"/>
           </a:xfrm>
           <a:prstGeom prst="rect">
             <a:avLst/>
           </a:prstGeom>
           <a:noFill/>
+          <a:ln/>
         </p:spPr>
         <p:txBody>
           <a:bodyPr wrap="none" anchor="ctr" lIns="18000" rIns="18000" tIns="21600" bIns="21600">
@@ -13775,9 +13074,9 @@
           <a:lstStyle/>
           <a:p>
             <a:r>
-              <a:rPr sz="1400" b="0">
-                <a:solidFill>
-                  <a:srgbClr val="4A556B"/>
+              <a:rPr sz="1260" b="1">
+                <a:solidFill>
+                  <a:srgbClr val="5B678A"/>
                 </a:solidFill>
                 <a:latin typeface="HY엽서M"/>
               </a:rPr>
@@ -13794,13 +13093,14 @@
         </p:nvSpPr>
         <p:spPr>
           <a:xfrm>
-            <a:off x="5256000" y="14057999"/>
+            <a:off x="5256000" y="14024939"/>
             <a:ext cx="1655999" cy="151200"/>
           </a:xfrm>
           <a:prstGeom prst="rect">
             <a:avLst/>
           </a:prstGeom>
           <a:noFill/>
+          <a:ln/>
         </p:spPr>
         <p:txBody>
           <a:bodyPr wrap="none" anchor="ctr" lIns="54000" rIns="54000" tIns="21600" bIns="21600">
@@ -13829,13 +13129,14 @@
         </p:nvSpPr>
         <p:spPr>
           <a:xfrm>
-            <a:off x="3816000" y="14216399"/>
+            <a:off x="3816000" y="14189359"/>
             <a:ext cx="1476000" cy="208800"/>
           </a:xfrm>
           <a:prstGeom prst="rect">
             <a:avLst/>
           </a:prstGeom>
           <a:noFill/>
+          <a:ln/>
         </p:spPr>
         <p:txBody>
           <a:bodyPr wrap="none" anchor="ctr" lIns="18000" rIns="18000" tIns="21600" bIns="21600">
@@ -13844,9 +13145,9 @@
           <a:lstStyle/>
           <a:p>
             <a:r>
-              <a:rPr sz="1400" b="0">
-                <a:solidFill>
-                  <a:srgbClr val="4A556B"/>
+              <a:rPr sz="1260" b="1">
+                <a:solidFill>
+                  <a:srgbClr val="5B678A"/>
                 </a:solidFill>
                 <a:latin typeface="HY엽서M"/>
               </a:rPr>
@@ -13863,13 +13164,14 @@
         </p:nvSpPr>
         <p:spPr>
           <a:xfrm>
-            <a:off x="5256000" y="14230799"/>
+            <a:off x="5256000" y="14203759"/>
             <a:ext cx="1655999" cy="151200"/>
           </a:xfrm>
           <a:prstGeom prst="rect">
             <a:avLst/>
           </a:prstGeom>
           <a:noFill/>
+          <a:ln/>
         </p:spPr>
         <p:txBody>
           <a:bodyPr wrap="none" anchor="ctr" lIns="54000" rIns="54000" tIns="21600" bIns="21600">
@@ -13898,13 +13200,14 @@
         </p:nvSpPr>
         <p:spPr>
           <a:xfrm>
-            <a:off x="3816000" y="14389199"/>
+            <a:off x="3816000" y="14368179"/>
             <a:ext cx="1476000" cy="208800"/>
           </a:xfrm>
           <a:prstGeom prst="rect">
             <a:avLst/>
           </a:prstGeom>
           <a:noFill/>
+          <a:ln/>
         </p:spPr>
         <p:txBody>
           <a:bodyPr wrap="none" anchor="ctr" lIns="18000" rIns="18000" tIns="21600" bIns="21600">
@@ -13913,9 +13216,9 @@
           <a:lstStyle/>
           <a:p>
             <a:r>
-              <a:rPr sz="1400" b="0">
-                <a:solidFill>
-                  <a:srgbClr val="4A556B"/>
+              <a:rPr sz="1260" b="1">
+                <a:solidFill>
+                  <a:srgbClr val="5B678A"/>
                 </a:solidFill>
                 <a:latin typeface="HY엽서M"/>
               </a:rPr>
@@ -13932,13 +13235,14 @@
         </p:nvSpPr>
         <p:spPr>
           <a:xfrm>
-            <a:off x="5256000" y="14403599"/>
+            <a:off x="5256000" y="14382579"/>
             <a:ext cx="1655999" cy="151200"/>
           </a:xfrm>
           <a:prstGeom prst="rect">
             <a:avLst/>
           </a:prstGeom>
           <a:noFill/>
+          <a:ln/>
         </p:spPr>
         <p:txBody>
           <a:bodyPr wrap="none" anchor="ctr" lIns="54000" rIns="54000" tIns="21600" bIns="21600">
@@ -13967,13 +13271,14 @@
         </p:nvSpPr>
         <p:spPr>
           <a:xfrm>
-            <a:off x="3816000" y="14561999"/>
+            <a:off x="3816000" y="14547000"/>
             <a:ext cx="1476000" cy="208800"/>
           </a:xfrm>
           <a:prstGeom prst="rect">
             <a:avLst/>
           </a:prstGeom>
           <a:noFill/>
+          <a:ln/>
         </p:spPr>
         <p:txBody>
           <a:bodyPr wrap="none" anchor="ctr" lIns="18000" rIns="18000" tIns="21600" bIns="21600">
@@ -13982,9 +13287,9 @@
           <a:lstStyle/>
           <a:p>
             <a:r>
-              <a:rPr sz="1400" b="0">
-                <a:solidFill>
-                  <a:srgbClr val="4A556B"/>
+              <a:rPr sz="1260" b="1">
+                <a:solidFill>
+                  <a:srgbClr val="5B678A"/>
                 </a:solidFill>
                 <a:latin typeface="HY엽서M"/>
               </a:rPr>
@@ -14001,13 +13306,14 @@
         </p:nvSpPr>
         <p:spPr>
           <a:xfrm>
-            <a:off x="5256000" y="14576399"/>
+            <a:off x="5256000" y="14561400"/>
             <a:ext cx="1655999" cy="151200"/>
           </a:xfrm>
           <a:prstGeom prst="rect">
             <a:avLst/>
           </a:prstGeom>
           <a:noFill/>
+          <a:ln/>
         </p:spPr>
         <p:txBody>
           <a:bodyPr wrap="none" anchor="ctr" lIns="54000" rIns="54000" tIns="21600" bIns="21600">
@@ -14043,6 +13349,7 @@
             <a:avLst/>
           </a:prstGeom>
           <a:noFill/>
+          <a:ln/>
         </p:spPr>
         <p:txBody>
           <a:bodyPr wrap="none" anchor="ctr" lIns="54000" rIns="54000" tIns="21600" bIns="21600">
@@ -14077,6 +13384,7 @@
             <a:avLst/>
           </a:prstGeom>
           <a:noFill/>
+          <a:ln/>
         </p:spPr>
         <p:txBody>
           <a:bodyPr wrap="none" anchor="ctr" lIns="54000" rIns="54000" tIns="21600" bIns="21600">
@@ -14116,53 +13424,20 @@
       </p:sp>
       <p:sp>
         <p:nvSpPr>
-          <p:cNvPr id="285" name="SUB"/>
-          <p:cNvSpPr txBox="1"/>
-          <p:nvPr/>
-        </p:nvSpPr>
-        <p:spPr>
-          <a:xfrm>
-            <a:off x="7200000" y="2383199"/>
-            <a:ext cx="3060000" cy="180000"/>
-          </a:xfrm>
-          <a:prstGeom prst="rect">
-            <a:avLst/>
-          </a:prstGeom>
-          <a:noFill/>
-        </p:spPr>
-        <p:txBody>
-          <a:bodyPr wrap="none" anchor="t" lIns="54000" rIns="54000" tIns="21600" bIns="21600">
-            <a:noAutofit/>
-          </a:bodyPr>
-          <a:lstStyle/>
-          <a:p>
-            <a:r>
-              <a:rPr sz="910" b="0">
-                <a:solidFill>
-                  <a:srgbClr val="8A94A6"/>
-                </a:solidFill>
-                <a:latin typeface="HY엽서M"/>
-              </a:rPr>
-              <a:t>골절 · 화상 · 깁스 · 응급실 · 일상배상</a:t>
-            </a:r>
-          </a:p>
-        </p:txBody>
-      </p:sp>
-      <p:sp>
-        <p:nvSpPr>
           <p:cNvPr id="286" name="L_TextBox 7|골절(치아포함)"/>
           <p:cNvSpPr txBox="1"/>
           <p:nvPr/>
         </p:nvSpPr>
         <p:spPr>
           <a:xfrm>
-            <a:off x="7200000" y="2574000"/>
+            <a:off x="7200000" y="2498800"/>
             <a:ext cx="1692000" cy="208800"/>
           </a:xfrm>
           <a:prstGeom prst="rect">
             <a:avLst/>
           </a:prstGeom>
           <a:noFill/>
+          <a:ln/>
         </p:spPr>
         <p:txBody>
           <a:bodyPr wrap="none" anchor="ctr" lIns="18000" rIns="18000" tIns="21600" bIns="21600">
@@ -14171,9 +13446,9 @@
           <a:lstStyle/>
           <a:p>
             <a:r>
-              <a:rPr sz="1400" b="0">
-                <a:solidFill>
-                  <a:srgbClr val="4A556B"/>
+              <a:rPr sz="1400" b="1">
+                <a:solidFill>
+                  <a:srgbClr val="5B678A"/>
                 </a:solidFill>
                 <a:latin typeface="HY엽서M"/>
               </a:rPr>
@@ -14190,13 +13465,14 @@
         </p:nvSpPr>
         <p:spPr>
           <a:xfrm>
-            <a:off x="8856000" y="2588400"/>
+            <a:off x="8856000" y="2513200"/>
             <a:ext cx="1440000" cy="180000"/>
           </a:xfrm>
           <a:prstGeom prst="rect">
             <a:avLst/>
           </a:prstGeom>
           <a:noFill/>
+          <a:ln/>
         </p:spPr>
         <p:txBody>
           <a:bodyPr wrap="none" anchor="ctr" lIns="54000" rIns="54000" tIns="21600" bIns="21600">
@@ -14225,13 +13501,14 @@
         </p:nvSpPr>
         <p:spPr>
           <a:xfrm>
-            <a:off x="7200000" y="2775599"/>
+            <a:off x="7200000" y="2711488"/>
             <a:ext cx="1692000" cy="208800"/>
           </a:xfrm>
           <a:prstGeom prst="rect">
             <a:avLst/>
           </a:prstGeom>
           <a:noFill/>
+          <a:ln/>
         </p:spPr>
         <p:txBody>
           <a:bodyPr wrap="none" anchor="ctr" lIns="18000" rIns="18000" tIns="21600" bIns="21600">
@@ -14240,9 +13517,9 @@
           <a:lstStyle/>
           <a:p>
             <a:r>
-              <a:rPr sz="1400" b="0">
-                <a:solidFill>
-                  <a:srgbClr val="4A556B"/>
+              <a:rPr sz="1400" b="1">
+                <a:solidFill>
+                  <a:srgbClr val="5B678A"/>
                 </a:solidFill>
                 <a:latin typeface="HY엽서M"/>
               </a:rPr>
@@ -14259,13 +13536,14 @@
         </p:nvSpPr>
         <p:spPr>
           <a:xfrm>
-            <a:off x="8856000" y="2789999"/>
+            <a:off x="8856000" y="2725888"/>
             <a:ext cx="1440000" cy="180000"/>
           </a:xfrm>
           <a:prstGeom prst="rect">
             <a:avLst/>
           </a:prstGeom>
           <a:noFill/>
+          <a:ln/>
         </p:spPr>
         <p:txBody>
           <a:bodyPr wrap="none" anchor="ctr" lIns="54000" rIns="54000" tIns="21600" bIns="21600">
@@ -14294,13 +13572,14 @@
         </p:nvSpPr>
         <p:spPr>
           <a:xfrm>
-            <a:off x="7200000" y="2977200"/>
+            <a:off x="7200000" y="2924177"/>
             <a:ext cx="1692000" cy="208800"/>
           </a:xfrm>
           <a:prstGeom prst="rect">
             <a:avLst/>
           </a:prstGeom>
           <a:noFill/>
+          <a:ln/>
         </p:spPr>
         <p:txBody>
           <a:bodyPr wrap="none" anchor="ctr" lIns="18000" rIns="18000" tIns="21600" bIns="21600">
@@ -14309,9 +13588,9 @@
           <a:lstStyle/>
           <a:p>
             <a:r>
-              <a:rPr sz="1400" b="0">
-                <a:solidFill>
-                  <a:srgbClr val="4A556B"/>
+              <a:rPr sz="1400" b="1">
+                <a:solidFill>
+                  <a:srgbClr val="5B678A"/>
                 </a:solidFill>
                 <a:latin typeface="HY엽서M"/>
               </a:rPr>
@@ -14328,13 +13607,14 @@
         </p:nvSpPr>
         <p:spPr>
           <a:xfrm>
-            <a:off x="8856000" y="2991599"/>
+            <a:off x="8856000" y="2938576"/>
             <a:ext cx="1440000" cy="180000"/>
           </a:xfrm>
           <a:prstGeom prst="rect">
             <a:avLst/>
           </a:prstGeom>
           <a:noFill/>
+          <a:ln/>
         </p:spPr>
         <p:txBody>
           <a:bodyPr wrap="none" anchor="ctr" lIns="54000" rIns="54000" tIns="21600" bIns="21600">
@@ -14363,13 +13643,14 @@
         </p:nvSpPr>
         <p:spPr>
           <a:xfrm>
-            <a:off x="7200000" y="3178800"/>
+            <a:off x="7200000" y="3136866"/>
             <a:ext cx="1692000" cy="208800"/>
           </a:xfrm>
           <a:prstGeom prst="rect">
             <a:avLst/>
           </a:prstGeom>
           <a:noFill/>
+          <a:ln/>
         </p:spPr>
         <p:txBody>
           <a:bodyPr wrap="none" anchor="ctr" lIns="18000" rIns="18000" tIns="21600" bIns="21600">
@@ -14378,9 +13659,9 @@
           <a:lstStyle/>
           <a:p>
             <a:r>
-              <a:rPr sz="1400" b="0">
-                <a:solidFill>
-                  <a:srgbClr val="4A556B"/>
+              <a:rPr sz="1400" b="1">
+                <a:solidFill>
+                  <a:srgbClr val="5B678A"/>
                 </a:solidFill>
                 <a:latin typeface="HY엽서M"/>
               </a:rPr>
@@ -14397,13 +13678,14 @@
         </p:nvSpPr>
         <p:spPr>
           <a:xfrm>
-            <a:off x="8856000" y="3193199"/>
+            <a:off x="8856000" y="3151265"/>
             <a:ext cx="1440000" cy="180000"/>
           </a:xfrm>
           <a:prstGeom prst="rect">
             <a:avLst/>
           </a:prstGeom>
           <a:noFill/>
+          <a:ln/>
         </p:spPr>
         <p:txBody>
           <a:bodyPr wrap="none" anchor="ctr" lIns="54000" rIns="54000" tIns="21600" bIns="21600">
@@ -14432,13 +13714,14 @@
         </p:nvSpPr>
         <p:spPr>
           <a:xfrm>
-            <a:off x="7200000" y="3380400"/>
+            <a:off x="7200000" y="3349555"/>
             <a:ext cx="1692000" cy="208800"/>
           </a:xfrm>
           <a:prstGeom prst="rect">
             <a:avLst/>
           </a:prstGeom>
           <a:noFill/>
+          <a:ln/>
         </p:spPr>
         <p:txBody>
           <a:bodyPr wrap="none" anchor="ctr" lIns="18000" rIns="18000" tIns="21600" bIns="21600">
@@ -14447,9 +13730,9 @@
           <a:lstStyle/>
           <a:p>
             <a:r>
-              <a:rPr sz="1400" b="0">
-                <a:solidFill>
-                  <a:srgbClr val="4A556B"/>
+              <a:rPr sz="1400" b="1">
+                <a:solidFill>
+                  <a:srgbClr val="5B678A"/>
                 </a:solidFill>
                 <a:latin typeface="HY엽서M"/>
               </a:rPr>
@@ -14466,13 +13749,14 @@
         </p:nvSpPr>
         <p:spPr>
           <a:xfrm>
-            <a:off x="8856000" y="3394800"/>
+            <a:off x="8856000" y="3363955"/>
             <a:ext cx="1440000" cy="180000"/>
           </a:xfrm>
           <a:prstGeom prst="rect">
             <a:avLst/>
           </a:prstGeom>
           <a:noFill/>
+          <a:ln/>
         </p:spPr>
         <p:txBody>
           <a:bodyPr wrap="none" anchor="ctr" lIns="54000" rIns="54000" tIns="21600" bIns="21600">
@@ -14501,13 +13785,14 @@
         </p:nvSpPr>
         <p:spPr>
           <a:xfrm>
-            <a:off x="7200000" y="3582000"/>
+            <a:off x="7200000" y="3562244"/>
             <a:ext cx="1692000" cy="208800"/>
           </a:xfrm>
           <a:prstGeom prst="rect">
             <a:avLst/>
           </a:prstGeom>
           <a:noFill/>
+          <a:ln/>
         </p:spPr>
         <p:txBody>
           <a:bodyPr wrap="none" anchor="ctr" lIns="18000" rIns="18000" tIns="21600" bIns="21600">
@@ -14516,9 +13801,9 @@
           <a:lstStyle/>
           <a:p>
             <a:r>
-              <a:rPr sz="1400" b="0">
-                <a:solidFill>
-                  <a:srgbClr val="4A556B"/>
+              <a:rPr sz="1400" b="1">
+                <a:solidFill>
+                  <a:srgbClr val="5B678A"/>
                 </a:solidFill>
                 <a:latin typeface="HY엽서M"/>
               </a:rPr>
@@ -14535,13 +13820,14 @@
         </p:nvSpPr>
         <p:spPr>
           <a:xfrm>
-            <a:off x="8856000" y="3596400"/>
+            <a:off x="8856000" y="3576644"/>
             <a:ext cx="1440000" cy="180000"/>
           </a:xfrm>
           <a:prstGeom prst="rect">
             <a:avLst/>
           </a:prstGeom>
           <a:noFill/>
+          <a:ln/>
         </p:spPr>
         <p:txBody>
           <a:bodyPr wrap="none" anchor="ctr" lIns="54000" rIns="54000" tIns="21600" bIns="21600">
@@ -14570,13 +13856,14 @@
         </p:nvSpPr>
         <p:spPr>
           <a:xfrm>
-            <a:off x="7200000" y="3783600"/>
+            <a:off x="7200000" y="3774933"/>
             <a:ext cx="1692000" cy="208800"/>
           </a:xfrm>
           <a:prstGeom prst="rect">
             <a:avLst/>
           </a:prstGeom>
           <a:noFill/>
+          <a:ln/>
         </p:spPr>
         <p:txBody>
           <a:bodyPr wrap="none" anchor="ctr" lIns="18000" rIns="18000" tIns="21600" bIns="21600">
@@ -14585,9 +13872,9 @@
           <a:lstStyle/>
           <a:p>
             <a:r>
-              <a:rPr sz="1400" b="0">
-                <a:solidFill>
-                  <a:srgbClr val="4A556B"/>
+              <a:rPr sz="1400" b="1">
+                <a:solidFill>
+                  <a:srgbClr val="5B678A"/>
                 </a:solidFill>
                 <a:latin typeface="HY엽서M"/>
               </a:rPr>
@@ -14604,13 +13891,14 @@
         </p:nvSpPr>
         <p:spPr>
           <a:xfrm>
-            <a:off x="8856000" y="3798000"/>
+            <a:off x="8856000" y="3789333"/>
             <a:ext cx="1440000" cy="180000"/>
           </a:xfrm>
           <a:prstGeom prst="rect">
             <a:avLst/>
           </a:prstGeom>
           <a:noFill/>
+          <a:ln/>
         </p:spPr>
         <p:txBody>
           <a:bodyPr wrap="none" anchor="ctr" lIns="54000" rIns="54000" tIns="21600" bIns="21600">
@@ -14639,13 +13927,14 @@
         </p:nvSpPr>
         <p:spPr>
           <a:xfrm>
-            <a:off x="7200000" y="3985200"/>
+            <a:off x="7200000" y="3987622"/>
             <a:ext cx="1692000" cy="208800"/>
           </a:xfrm>
           <a:prstGeom prst="rect">
             <a:avLst/>
           </a:prstGeom>
           <a:noFill/>
+          <a:ln/>
         </p:spPr>
         <p:txBody>
           <a:bodyPr wrap="none" anchor="ctr" lIns="18000" rIns="18000" tIns="21600" bIns="21600">
@@ -14654,9 +13943,9 @@
           <a:lstStyle/>
           <a:p>
             <a:r>
-              <a:rPr sz="1400" b="0">
-                <a:solidFill>
-                  <a:srgbClr val="4A556B"/>
+              <a:rPr sz="1400" b="1">
+                <a:solidFill>
+                  <a:srgbClr val="5B678A"/>
                 </a:solidFill>
                 <a:latin typeface="HY엽서M"/>
               </a:rPr>
@@ -14673,13 +13962,14 @@
         </p:nvSpPr>
         <p:spPr>
           <a:xfrm>
-            <a:off x="8856000" y="3999600"/>
+            <a:off x="8856000" y="4002022"/>
             <a:ext cx="1440000" cy="180000"/>
           </a:xfrm>
           <a:prstGeom prst="rect">
             <a:avLst/>
           </a:prstGeom>
           <a:noFill/>
+          <a:ln/>
         </p:spPr>
         <p:txBody>
           <a:bodyPr wrap="none" anchor="ctr" lIns="54000" rIns="54000" tIns="21600" bIns="21600">
@@ -14708,13 +13998,14 @@
         </p:nvSpPr>
         <p:spPr>
           <a:xfrm>
-            <a:off x="7200000" y="4186800"/>
+            <a:off x="7200000" y="4200311"/>
             <a:ext cx="1692000" cy="208800"/>
           </a:xfrm>
           <a:prstGeom prst="rect">
             <a:avLst/>
           </a:prstGeom>
           <a:noFill/>
+          <a:ln/>
         </p:spPr>
         <p:txBody>
           <a:bodyPr wrap="none" anchor="ctr" lIns="18000" rIns="18000" tIns="21600" bIns="21600">
@@ -14723,9 +14014,9 @@
           <a:lstStyle/>
           <a:p>
             <a:r>
-              <a:rPr sz="1400" b="0">
-                <a:solidFill>
-                  <a:srgbClr val="4A556B"/>
+              <a:rPr sz="1400" b="1">
+                <a:solidFill>
+                  <a:srgbClr val="5B678A"/>
                 </a:solidFill>
                 <a:latin typeface="HY엽서M"/>
               </a:rPr>
@@ -14742,13 +14033,14 @@
         </p:nvSpPr>
         <p:spPr>
           <a:xfrm>
-            <a:off x="8856000" y="4201200"/>
+            <a:off x="8856000" y="4214711"/>
             <a:ext cx="1440000" cy="180000"/>
           </a:xfrm>
           <a:prstGeom prst="rect">
             <a:avLst/>
           </a:prstGeom>
           <a:noFill/>
+          <a:ln/>
         </p:spPr>
         <p:txBody>
           <a:bodyPr wrap="none" anchor="ctr" lIns="54000" rIns="54000" tIns="21600" bIns="21600">
@@ -14777,13 +14069,14 @@
         </p:nvSpPr>
         <p:spPr>
           <a:xfrm>
-            <a:off x="7200000" y="4388400"/>
+            <a:off x="7200000" y="4413000"/>
             <a:ext cx="1692000" cy="208800"/>
           </a:xfrm>
           <a:prstGeom prst="rect">
             <a:avLst/>
           </a:prstGeom>
           <a:noFill/>
+          <a:ln/>
         </p:spPr>
         <p:txBody>
           <a:bodyPr wrap="none" anchor="ctr" lIns="18000" rIns="18000" tIns="21600" bIns="21600">
@@ -14792,9 +14085,9 @@
           <a:lstStyle/>
           <a:p>
             <a:r>
-              <a:rPr sz="1400" b="0">
-                <a:solidFill>
-                  <a:srgbClr val="4A556B"/>
+              <a:rPr sz="1400" b="1">
+                <a:solidFill>
+                  <a:srgbClr val="5B678A"/>
                 </a:solidFill>
                 <a:latin typeface="HY엽서M"/>
               </a:rPr>
@@ -14811,13 +14104,14 @@
         </p:nvSpPr>
         <p:spPr>
           <a:xfrm>
-            <a:off x="8856000" y="4402800"/>
+            <a:off x="8856000" y="4427400"/>
             <a:ext cx="1440000" cy="180000"/>
           </a:xfrm>
           <a:prstGeom prst="rect">
             <a:avLst/>
           </a:prstGeom>
           <a:noFill/>
+          <a:ln/>
         </p:spPr>
         <p:txBody>
           <a:bodyPr wrap="none" anchor="ctr" lIns="54000" rIns="54000" tIns="21600" bIns="21600">
@@ -14853,6 +14147,7 @@
             <a:avLst/>
           </a:prstGeom>
           <a:noFill/>
+          <a:ln/>
         </p:spPr>
         <p:txBody>
           <a:bodyPr wrap="none" anchor="ctr" lIns="54000" rIns="54000" tIns="21600" bIns="21600">
@@ -14874,53 +14169,20 @@
       </p:sp>
       <p:sp>
         <p:nvSpPr>
-          <p:cNvPr id="318" name="SUB"/>
-          <p:cNvSpPr txBox="1"/>
-          <p:nvPr/>
-        </p:nvSpPr>
-        <p:spPr>
-          <a:xfrm>
-            <a:off x="7200000" y="5065200"/>
-            <a:ext cx="3060000" cy="180000"/>
-          </a:xfrm>
-          <a:prstGeom prst="rect">
-            <a:avLst/>
-          </a:prstGeom>
-          <a:noFill/>
-        </p:spPr>
-        <p:txBody>
-          <a:bodyPr wrap="none" anchor="t" lIns="54000" rIns="54000" tIns="21600" bIns="21600">
-            <a:noAutofit/>
-          </a:bodyPr>
-          <a:lstStyle/>
-          <a:p>
-            <a:r>
-              <a:rPr sz="910" b="0">
-                <a:solidFill>
-                  <a:srgbClr val="8A94A6"/>
-                </a:solidFill>
-                <a:latin typeface="HY엽서M"/>
-              </a:rPr>
-              <a:t>상해 · 질병 각 3% · 80%</a:t>
-            </a:r>
-          </a:p>
-        </p:txBody>
-      </p:sp>
-      <p:sp>
-        <p:nvSpPr>
           <p:cNvPr id="319" name="L_TextBox 8|질병 3%"/>
           <p:cNvSpPr txBox="1"/>
           <p:nvPr/>
         </p:nvSpPr>
         <p:spPr>
           <a:xfrm>
-            <a:off x="7200000" y="5256000"/>
+            <a:off x="7200000" y="5180800"/>
             <a:ext cx="1692000" cy="208800"/>
           </a:xfrm>
           <a:prstGeom prst="rect">
             <a:avLst/>
           </a:prstGeom>
           <a:noFill/>
+          <a:ln/>
         </p:spPr>
         <p:txBody>
           <a:bodyPr wrap="none" anchor="ctr" lIns="18000" rIns="18000" tIns="21600" bIns="21600">
@@ -14929,9 +14191,9 @@
           <a:lstStyle/>
           <a:p>
             <a:r>
-              <a:rPr sz="1400" b="0">
-                <a:solidFill>
-                  <a:srgbClr val="4A556B"/>
+              <a:rPr sz="1400" b="1">
+                <a:solidFill>
+                  <a:srgbClr val="5B678A"/>
                 </a:solidFill>
                 <a:latin typeface="HY엽서M"/>
               </a:rPr>
@@ -14948,13 +14210,14 @@
         </p:nvSpPr>
         <p:spPr>
           <a:xfrm>
-            <a:off x="8856000" y="5270400"/>
+            <a:off x="8856000" y="5195200"/>
             <a:ext cx="1440000" cy="180000"/>
           </a:xfrm>
           <a:prstGeom prst="rect">
             <a:avLst/>
           </a:prstGeom>
           <a:noFill/>
+          <a:ln/>
         </p:spPr>
         <p:txBody>
           <a:bodyPr wrap="none" anchor="ctr" lIns="54000" rIns="54000" tIns="21600" bIns="21600">
@@ -14983,13 +14246,14 @@
         </p:nvSpPr>
         <p:spPr>
           <a:xfrm>
-            <a:off x="7200000" y="5457600"/>
+            <a:off x="7200000" y="5407349"/>
             <a:ext cx="1692000" cy="208800"/>
           </a:xfrm>
           <a:prstGeom prst="rect">
             <a:avLst/>
           </a:prstGeom>
           <a:noFill/>
+          <a:ln/>
         </p:spPr>
         <p:txBody>
           <a:bodyPr wrap="none" anchor="ctr" lIns="18000" rIns="18000" tIns="21600" bIns="21600">
@@ -14998,9 +14262,9 @@
           <a:lstStyle/>
           <a:p>
             <a:r>
-              <a:rPr sz="1400" b="0">
-                <a:solidFill>
-                  <a:srgbClr val="4A556B"/>
+              <a:rPr sz="1400" b="1">
+                <a:solidFill>
+                  <a:srgbClr val="5B678A"/>
                 </a:solidFill>
                 <a:latin typeface="HY엽서M"/>
               </a:rPr>
@@ -15017,13 +14281,14 @@
         </p:nvSpPr>
         <p:spPr>
           <a:xfrm>
-            <a:off x="8856000" y="5472000"/>
+            <a:off x="8856000" y="5421749"/>
             <a:ext cx="1440000" cy="180000"/>
           </a:xfrm>
           <a:prstGeom prst="rect">
             <a:avLst/>
           </a:prstGeom>
           <a:noFill/>
+          <a:ln/>
         </p:spPr>
         <p:txBody>
           <a:bodyPr wrap="none" anchor="ctr" lIns="54000" rIns="54000" tIns="21600" bIns="21600">
@@ -15052,13 +14317,14 @@
         </p:nvSpPr>
         <p:spPr>
           <a:xfrm>
-            <a:off x="7200000" y="5659200"/>
+            <a:off x="7200000" y="5633899"/>
             <a:ext cx="1692000" cy="208800"/>
           </a:xfrm>
           <a:prstGeom prst="rect">
             <a:avLst/>
           </a:prstGeom>
           <a:noFill/>
+          <a:ln/>
         </p:spPr>
         <p:txBody>
           <a:bodyPr wrap="none" anchor="ctr" lIns="18000" rIns="18000" tIns="21600" bIns="21600">
@@ -15067,9 +14333,9 @@
           <a:lstStyle/>
           <a:p>
             <a:r>
-              <a:rPr sz="1400" b="0">
-                <a:solidFill>
-                  <a:srgbClr val="4A556B"/>
+              <a:rPr sz="1400" b="1">
+                <a:solidFill>
+                  <a:srgbClr val="5B678A"/>
                 </a:solidFill>
                 <a:latin typeface="HY엽서M"/>
               </a:rPr>
@@ -15086,13 +14352,14 @@
         </p:nvSpPr>
         <p:spPr>
           <a:xfrm>
-            <a:off x="8856000" y="5673600"/>
+            <a:off x="8856000" y="5648299"/>
             <a:ext cx="1440000" cy="180000"/>
           </a:xfrm>
           <a:prstGeom prst="rect">
             <a:avLst/>
           </a:prstGeom>
           <a:noFill/>
+          <a:ln/>
         </p:spPr>
         <p:txBody>
           <a:bodyPr wrap="none" anchor="ctr" lIns="54000" rIns="54000" tIns="21600" bIns="21600">
@@ -15121,13 +14388,14 @@
         </p:nvSpPr>
         <p:spPr>
           <a:xfrm>
-            <a:off x="7200000" y="5860800"/>
+            <a:off x="7200000" y="5860449"/>
             <a:ext cx="1692000" cy="208800"/>
           </a:xfrm>
           <a:prstGeom prst="rect">
             <a:avLst/>
           </a:prstGeom>
           <a:noFill/>
+          <a:ln/>
         </p:spPr>
         <p:txBody>
           <a:bodyPr wrap="none" anchor="ctr" lIns="18000" rIns="18000" tIns="21600" bIns="21600">
@@ -15136,9 +14404,9 @@
           <a:lstStyle/>
           <a:p>
             <a:r>
-              <a:rPr sz="1400" b="0">
-                <a:solidFill>
-                  <a:srgbClr val="4A556B"/>
+              <a:rPr sz="1400" b="1">
+                <a:solidFill>
+                  <a:srgbClr val="5B678A"/>
                 </a:solidFill>
                 <a:latin typeface="HY엽서M"/>
               </a:rPr>
@@ -15155,13 +14423,14 @@
         </p:nvSpPr>
         <p:spPr>
           <a:xfrm>
-            <a:off x="8856000" y="5875200"/>
+            <a:off x="8856000" y="5874849"/>
             <a:ext cx="1440000" cy="180000"/>
           </a:xfrm>
           <a:prstGeom prst="rect">
             <a:avLst/>
           </a:prstGeom>
           <a:noFill/>
+          <a:ln/>
         </p:spPr>
         <p:txBody>
           <a:bodyPr wrap="none" anchor="ctr" lIns="54000" rIns="54000" tIns="21600" bIns="21600">
@@ -15190,13 +14459,14 @@
         </p:nvSpPr>
         <p:spPr>
           <a:xfrm>
-            <a:off x="7200000" y="6062400"/>
+            <a:off x="7200000" y="6086999"/>
             <a:ext cx="1692000" cy="208800"/>
           </a:xfrm>
           <a:prstGeom prst="rect">
             <a:avLst/>
           </a:prstGeom>
           <a:noFill/>
+          <a:ln/>
         </p:spPr>
         <p:txBody>
           <a:bodyPr wrap="none" anchor="ctr" lIns="18000" rIns="18000" tIns="21600" bIns="21600">
@@ -15205,9 +14475,9 @@
           <a:lstStyle/>
           <a:p>
             <a:r>
-              <a:rPr sz="1400" b="0">
-                <a:solidFill>
-                  <a:srgbClr val="4A556B"/>
+              <a:rPr sz="1400" b="1">
+                <a:solidFill>
+                  <a:srgbClr val="5B678A"/>
                 </a:solidFill>
                 <a:latin typeface="HY엽서M"/>
               </a:rPr>
@@ -15224,13 +14494,14 @@
         </p:nvSpPr>
         <p:spPr>
           <a:xfrm>
-            <a:off x="8856000" y="6076800"/>
+            <a:off x="8856000" y="6101399"/>
             <a:ext cx="1440000" cy="180000"/>
           </a:xfrm>
           <a:prstGeom prst="rect">
             <a:avLst/>
           </a:prstGeom>
           <a:noFill/>
+          <a:ln/>
         </p:spPr>
         <p:txBody>
           <a:bodyPr wrap="none" anchor="ctr" lIns="54000" rIns="54000" tIns="21600" bIns="21600">
@@ -15266,6 +14537,7 @@
             <a:avLst/>
           </a:prstGeom>
           <a:noFill/>
+          <a:ln/>
         </p:spPr>
         <p:txBody>
           <a:bodyPr wrap="none" anchor="ctr" lIns="54000" rIns="54000" tIns="21600" bIns="21600">
@@ -15287,53 +14559,20 @@
       </p:sp>
       <p:sp>
         <p:nvSpPr>
-          <p:cNvPr id="336" name="SUB"/>
-          <p:cNvSpPr txBox="1"/>
-          <p:nvPr/>
-        </p:nvSpPr>
-        <p:spPr>
-          <a:xfrm>
-            <a:off x="7200000" y="6739200"/>
-            <a:ext cx="3060000" cy="180000"/>
-          </a:xfrm>
-          <a:prstGeom prst="rect">
-            <a:avLst/>
-          </a:prstGeom>
-          <a:noFill/>
-        </p:spPr>
-        <p:txBody>
-          <a:bodyPr wrap="none" anchor="t" lIns="54000" rIns="54000" tIns="21600" bIns="21600">
-            <a:noAutofit/>
-          </a:bodyPr>
-          <a:lstStyle/>
-          <a:p>
-            <a:r>
-              <a:rPr sz="910" b="0">
-                <a:solidFill>
-                  <a:srgbClr val="8A94A6"/>
-                </a:solidFill>
-                <a:latin typeface="HY엽서M"/>
-              </a:rPr>
-              <a:t>질병 · 상해 · 종신</a:t>
-            </a:r>
-          </a:p>
-        </p:txBody>
-      </p:sp>
-      <p:sp>
-        <p:nvSpPr>
           <p:cNvPr id="337" name="L_TextBox 10|세"/>
           <p:cNvSpPr txBox="1"/>
           <p:nvPr/>
         </p:nvSpPr>
         <p:spPr>
           <a:xfrm>
-            <a:off x="7200000" y="6930000"/>
+            <a:off x="7200000" y="6854800"/>
             <a:ext cx="1692000" cy="208800"/>
           </a:xfrm>
           <a:prstGeom prst="rect">
             <a:avLst/>
           </a:prstGeom>
           <a:noFill/>
+          <a:ln/>
         </p:spPr>
         <p:txBody>
           <a:bodyPr wrap="none" anchor="ctr" lIns="18000" rIns="18000" tIns="21600" bIns="21600">
@@ -15342,9 +14581,9 @@
           <a:lstStyle/>
           <a:p>
             <a:r>
-              <a:rPr sz="1400" b="0">
-                <a:solidFill>
-                  <a:srgbClr val="4A556B"/>
+              <a:rPr sz="1400" b="1">
+                <a:solidFill>
+                  <a:srgbClr val="5B678A"/>
                 </a:solidFill>
                 <a:latin typeface="HY엽서M"/>
               </a:rPr>
@@ -15361,13 +14600,14 @@
         </p:nvSpPr>
         <p:spPr>
           <a:xfrm>
-            <a:off x="8856000" y="6944400"/>
+            <a:off x="8856000" y="6869200"/>
             <a:ext cx="1440000" cy="180000"/>
           </a:xfrm>
           <a:prstGeom prst="rect">
             <a:avLst/>
           </a:prstGeom>
           <a:noFill/>
+          <a:ln/>
         </p:spPr>
         <p:txBody>
           <a:bodyPr wrap="none" anchor="ctr" lIns="54000" rIns="54000" tIns="21600" bIns="21600">
@@ -15396,13 +14636,14 @@
         </p:nvSpPr>
         <p:spPr>
           <a:xfrm>
-            <a:off x="7200000" y="7131600"/>
+            <a:off x="7200000" y="7089666"/>
             <a:ext cx="1692000" cy="208800"/>
           </a:xfrm>
           <a:prstGeom prst="rect">
             <a:avLst/>
           </a:prstGeom>
           <a:noFill/>
+          <a:ln/>
         </p:spPr>
         <p:txBody>
           <a:bodyPr wrap="none" anchor="ctr" lIns="18000" rIns="18000" tIns="21600" bIns="21600">
@@ -15411,9 +14652,9 @@
           <a:lstStyle/>
           <a:p>
             <a:r>
-              <a:rPr sz="1400" b="0">
-                <a:solidFill>
-                  <a:srgbClr val="4A556B"/>
+              <a:rPr sz="1400" b="1">
+                <a:solidFill>
+                  <a:srgbClr val="5B678A"/>
                 </a:solidFill>
                 <a:latin typeface="HY엽서M"/>
               </a:rPr>
@@ -15430,13 +14671,14 @@
         </p:nvSpPr>
         <p:spPr>
           <a:xfrm>
-            <a:off x="8856000" y="7146000"/>
+            <a:off x="8856000" y="7104066"/>
             <a:ext cx="1440000" cy="180000"/>
           </a:xfrm>
           <a:prstGeom prst="rect">
             <a:avLst/>
           </a:prstGeom>
           <a:noFill/>
+          <a:ln/>
         </p:spPr>
         <p:txBody>
           <a:bodyPr wrap="none" anchor="ctr" lIns="54000" rIns="54000" tIns="21600" bIns="21600">
@@ -15465,13 +14707,14 @@
         </p:nvSpPr>
         <p:spPr>
           <a:xfrm>
-            <a:off x="7200000" y="7333200"/>
+            <a:off x="7200000" y="7324533"/>
             <a:ext cx="1692000" cy="208800"/>
           </a:xfrm>
           <a:prstGeom prst="rect">
             <a:avLst/>
           </a:prstGeom>
           <a:noFill/>
+          <a:ln/>
         </p:spPr>
         <p:txBody>
           <a:bodyPr wrap="none" anchor="ctr" lIns="18000" rIns="18000" tIns="21600" bIns="21600">
@@ -15480,9 +14723,9 @@
           <a:lstStyle/>
           <a:p>
             <a:r>
-              <a:rPr sz="1400" b="0">
-                <a:solidFill>
-                  <a:srgbClr val="4A556B"/>
+              <a:rPr sz="1400" b="1">
+                <a:solidFill>
+                  <a:srgbClr val="5B678A"/>
                 </a:solidFill>
                 <a:latin typeface="HY엽서M"/>
               </a:rPr>
@@ -15499,13 +14742,14 @@
         </p:nvSpPr>
         <p:spPr>
           <a:xfrm>
-            <a:off x="8856000" y="7347600"/>
+            <a:off x="8856000" y="7338933"/>
             <a:ext cx="1440000" cy="180000"/>
           </a:xfrm>
           <a:prstGeom prst="rect">
             <a:avLst/>
           </a:prstGeom>
           <a:noFill/>
+          <a:ln/>
         </p:spPr>
         <p:txBody>
           <a:bodyPr wrap="none" anchor="ctr" lIns="54000" rIns="54000" tIns="21600" bIns="21600">
@@ -15534,13 +14778,14 @@
         </p:nvSpPr>
         <p:spPr>
           <a:xfrm>
-            <a:off x="7200000" y="7534800"/>
+            <a:off x="7200000" y="7559399"/>
             <a:ext cx="1692000" cy="208800"/>
           </a:xfrm>
           <a:prstGeom prst="rect">
             <a:avLst/>
           </a:prstGeom>
           <a:noFill/>
+          <a:ln/>
         </p:spPr>
         <p:txBody>
           <a:bodyPr wrap="none" anchor="ctr" lIns="18000" rIns="18000" tIns="21600" bIns="21600">
@@ -15549,9 +14794,9 @@
           <a:lstStyle/>
           <a:p>
             <a:r>
-              <a:rPr sz="1400" b="0">
-                <a:solidFill>
-                  <a:srgbClr val="4A556B"/>
+              <a:rPr sz="1400" b="1">
+                <a:solidFill>
+                  <a:srgbClr val="5B678A"/>
                 </a:solidFill>
                 <a:latin typeface="HY엽서M"/>
               </a:rPr>
@@ -15568,13 +14813,14 @@
         </p:nvSpPr>
         <p:spPr>
           <a:xfrm>
-            <a:off x="8856000" y="7549200"/>
+            <a:off x="8856000" y="7573799"/>
             <a:ext cx="1440000" cy="180000"/>
           </a:xfrm>
           <a:prstGeom prst="rect">
             <a:avLst/>
           </a:prstGeom>
           <a:noFill/>
+          <a:ln/>
         </p:spPr>
         <p:txBody>
           <a:bodyPr wrap="none" anchor="ctr" lIns="54000" rIns="54000" tIns="21600" bIns="21600">
@@ -15610,6 +14856,7 @@
             <a:avLst/>
           </a:prstGeom>
           <a:noFill/>
+          <a:ln/>
         </p:spPr>
         <p:txBody>
           <a:bodyPr wrap="none" anchor="ctr" lIns="54000" rIns="54000" tIns="21600" bIns="21600">
@@ -15644,6 +14891,7 @@
             <a:avLst/>
           </a:prstGeom>
           <a:noFill/>
+          <a:ln/>
         </p:spPr>
         <p:txBody>
           <a:bodyPr wrap="none" anchor="ctr" lIns="54000" rIns="54000" tIns="21600" bIns="21600">
@@ -15683,53 +14931,20 @@
       </p:sp>
       <p:sp>
         <p:nvSpPr>
-          <p:cNvPr id="353" name="SUB"/>
-          <p:cNvSpPr txBox="1"/>
-          <p:nvPr/>
-        </p:nvSpPr>
-        <p:spPr>
-          <a:xfrm>
-            <a:off x="7200000" y="8661600"/>
-            <a:ext cx="3060000" cy="180000"/>
-          </a:xfrm>
-          <a:prstGeom prst="rect">
-            <a:avLst/>
-          </a:prstGeom>
-          <a:noFill/>
-        </p:spPr>
-        <p:txBody>
-          <a:bodyPr wrap="none" anchor="t" lIns="54000" rIns="54000" tIns="21600" bIns="21600">
-            <a:noAutofit/>
-          </a:bodyPr>
-          <a:lstStyle/>
-          <a:p>
-            <a:r>
-              <a:rPr sz="910" b="0">
-                <a:solidFill>
-                  <a:srgbClr val="8A94A6"/>
-                </a:solidFill>
-                <a:latin typeface="HY엽서M"/>
-              </a:rPr>
-              <a:t>일당 · 중환자실 · 1인실 · 간병인</a:t>
-            </a:r>
-          </a:p>
-        </p:txBody>
-      </p:sp>
-      <p:sp>
-        <p:nvSpPr>
           <p:cNvPr id="354" name="L_TextBox 22|질병일당"/>
           <p:cNvSpPr txBox="1"/>
           <p:nvPr/>
         </p:nvSpPr>
         <p:spPr>
           <a:xfrm>
-            <a:off x="7200000" y="8852400"/>
+            <a:off x="7200000" y="8777200"/>
             <a:ext cx="1692000" cy="208800"/>
           </a:xfrm>
           <a:prstGeom prst="rect">
             <a:avLst/>
           </a:prstGeom>
           <a:noFill/>
+          <a:ln/>
         </p:spPr>
         <p:txBody>
           <a:bodyPr wrap="none" anchor="ctr" lIns="18000" rIns="18000" tIns="21600" bIns="21600">
@@ -15738,9 +14953,9 @@
           <a:lstStyle/>
           <a:p>
             <a:r>
-              <a:rPr sz="1400" b="0">
-                <a:solidFill>
-                  <a:srgbClr val="4A556B"/>
+              <a:rPr sz="1400" b="1">
+                <a:solidFill>
+                  <a:srgbClr val="5B678A"/>
                 </a:solidFill>
                 <a:latin typeface="HY엽서M"/>
               </a:rPr>
@@ -15757,13 +14972,14 @@
         </p:nvSpPr>
         <p:spPr>
           <a:xfrm>
-            <a:off x="8856000" y="8866800"/>
+            <a:off x="8856000" y="8791600"/>
             <a:ext cx="1440000" cy="180000"/>
           </a:xfrm>
           <a:prstGeom prst="rect">
             <a:avLst/>
           </a:prstGeom>
           <a:noFill/>
+          <a:ln/>
         </p:spPr>
         <p:txBody>
           <a:bodyPr wrap="none" anchor="ctr" lIns="54000" rIns="54000" tIns="21600" bIns="21600">
@@ -15792,13 +15008,14 @@
         </p:nvSpPr>
         <p:spPr>
           <a:xfrm>
-            <a:off x="7200000" y="9054000"/>
+            <a:off x="7200000" y="8986476"/>
             <a:ext cx="1692000" cy="208800"/>
           </a:xfrm>
           <a:prstGeom prst="rect">
             <a:avLst/>
           </a:prstGeom>
           <a:noFill/>
+          <a:ln/>
         </p:spPr>
         <p:txBody>
           <a:bodyPr wrap="none" anchor="ctr" lIns="18000" rIns="18000" tIns="21600" bIns="21600">
@@ -15807,9 +15024,9 @@
           <a:lstStyle/>
           <a:p>
             <a:r>
-              <a:rPr sz="1400" b="0">
-                <a:solidFill>
-                  <a:srgbClr val="4A556B"/>
+              <a:rPr sz="1400" b="1">
+                <a:solidFill>
+                  <a:srgbClr val="5B678A"/>
                 </a:solidFill>
                 <a:latin typeface="HY엽서M"/>
               </a:rPr>
@@ -15826,13 +15043,14 @@
         </p:nvSpPr>
         <p:spPr>
           <a:xfrm>
-            <a:off x="8856000" y="9068400"/>
+            <a:off x="8856000" y="9000876"/>
             <a:ext cx="1440000" cy="180000"/>
           </a:xfrm>
           <a:prstGeom prst="rect">
             <a:avLst/>
           </a:prstGeom>
           <a:noFill/>
+          <a:ln/>
         </p:spPr>
         <p:txBody>
           <a:bodyPr wrap="none" anchor="ctr" lIns="54000" rIns="54000" tIns="21600" bIns="21600">
@@ -15861,13 +15079,14 @@
         </p:nvSpPr>
         <p:spPr>
           <a:xfrm>
-            <a:off x="7200000" y="9255600"/>
+            <a:off x="7200000" y="9195753"/>
             <a:ext cx="1692000" cy="208800"/>
           </a:xfrm>
           <a:prstGeom prst="rect">
             <a:avLst/>
           </a:prstGeom>
           <a:noFill/>
+          <a:ln/>
         </p:spPr>
         <p:txBody>
           <a:bodyPr wrap="none" anchor="ctr" lIns="18000" rIns="18000" tIns="21600" bIns="21600">
@@ -15876,9 +15095,9 @@
           <a:lstStyle/>
           <a:p>
             <a:r>
-              <a:rPr sz="1400" b="0">
-                <a:solidFill>
-                  <a:srgbClr val="4A556B"/>
+              <a:rPr sz="1400" b="1">
+                <a:solidFill>
+                  <a:srgbClr val="5B678A"/>
                 </a:solidFill>
                 <a:latin typeface="HY엽서M"/>
               </a:rPr>
@@ -15895,13 +15114,14 @@
         </p:nvSpPr>
         <p:spPr>
           <a:xfrm>
-            <a:off x="8856000" y="9270000"/>
+            <a:off x="8856000" y="9210153"/>
             <a:ext cx="1440000" cy="180000"/>
           </a:xfrm>
           <a:prstGeom prst="rect">
             <a:avLst/>
           </a:prstGeom>
           <a:noFill/>
+          <a:ln/>
         </p:spPr>
         <p:txBody>
           <a:bodyPr wrap="none" anchor="ctr" lIns="54000" rIns="54000" tIns="21600" bIns="21600">
@@ -15930,13 +15150,14 @@
         </p:nvSpPr>
         <p:spPr>
           <a:xfrm>
-            <a:off x="7200000" y="9457200"/>
+            <a:off x="7200000" y="9405030"/>
             <a:ext cx="1692000" cy="208800"/>
           </a:xfrm>
           <a:prstGeom prst="rect">
             <a:avLst/>
           </a:prstGeom>
           <a:noFill/>
+          <a:ln/>
         </p:spPr>
         <p:txBody>
           <a:bodyPr wrap="none" anchor="ctr" lIns="18000" rIns="18000" tIns="21600" bIns="21600">
@@ -15945,9 +15166,9 @@
           <a:lstStyle/>
           <a:p>
             <a:r>
-              <a:rPr sz="1400" b="0">
-                <a:solidFill>
-                  <a:srgbClr val="4A556B"/>
+              <a:rPr sz="1400" b="1">
+                <a:solidFill>
+                  <a:srgbClr val="5B678A"/>
                 </a:solidFill>
                 <a:latin typeface="HY엽서M"/>
               </a:rPr>
@@ -15964,13 +15185,14 @@
         </p:nvSpPr>
         <p:spPr>
           <a:xfrm>
-            <a:off x="8856000" y="9471600"/>
+            <a:off x="8856000" y="9419430"/>
             <a:ext cx="1440000" cy="180000"/>
           </a:xfrm>
           <a:prstGeom prst="rect">
             <a:avLst/>
           </a:prstGeom>
           <a:noFill/>
+          <a:ln/>
         </p:spPr>
         <p:txBody>
           <a:bodyPr wrap="none" anchor="ctr" lIns="54000" rIns="54000" tIns="21600" bIns="21600">
@@ -15999,13 +15221,14 @@
         </p:nvSpPr>
         <p:spPr>
           <a:xfrm>
-            <a:off x="7200000" y="9658800"/>
+            <a:off x="7200000" y="9614307"/>
             <a:ext cx="1692000" cy="208800"/>
           </a:xfrm>
           <a:prstGeom prst="rect">
             <a:avLst/>
           </a:prstGeom>
           <a:noFill/>
+          <a:ln/>
         </p:spPr>
         <p:txBody>
           <a:bodyPr wrap="none" anchor="ctr" lIns="18000" rIns="18000" tIns="21600" bIns="21600">
@@ -16014,9 +15237,9 @@
           <a:lstStyle/>
           <a:p>
             <a:r>
-              <a:rPr sz="1400" b="0">
-                <a:solidFill>
-                  <a:srgbClr val="4A556B"/>
+              <a:rPr sz="1400" b="1">
+                <a:solidFill>
+                  <a:srgbClr val="5B678A"/>
                 </a:solidFill>
                 <a:latin typeface="HY엽서M"/>
               </a:rPr>
@@ -16033,13 +15256,14 @@
         </p:nvSpPr>
         <p:spPr>
           <a:xfrm>
-            <a:off x="8856000" y="9673200"/>
+            <a:off x="8856000" y="9628707"/>
             <a:ext cx="1440000" cy="180000"/>
           </a:xfrm>
           <a:prstGeom prst="rect">
             <a:avLst/>
           </a:prstGeom>
           <a:noFill/>
+          <a:ln/>
         </p:spPr>
         <p:txBody>
           <a:bodyPr wrap="none" anchor="ctr" lIns="54000" rIns="54000" tIns="21600" bIns="21600">
@@ -16068,13 +15292,14 @@
         </p:nvSpPr>
         <p:spPr>
           <a:xfrm>
-            <a:off x="7200000" y="9860399"/>
+            <a:off x="7200000" y="9823584"/>
             <a:ext cx="1692000" cy="208800"/>
           </a:xfrm>
           <a:prstGeom prst="rect">
             <a:avLst/>
           </a:prstGeom>
           <a:noFill/>
+          <a:ln/>
         </p:spPr>
         <p:txBody>
           <a:bodyPr wrap="none" anchor="ctr" lIns="18000" rIns="18000" tIns="21600" bIns="21600">
@@ -16083,9 +15308,9 @@
           <a:lstStyle/>
           <a:p>
             <a:r>
-              <a:rPr sz="1400" b="0">
-                <a:solidFill>
-                  <a:srgbClr val="4A556B"/>
+              <a:rPr sz="1400" b="1">
+                <a:solidFill>
+                  <a:srgbClr val="5B678A"/>
                 </a:solidFill>
                 <a:latin typeface="HY엽서M"/>
               </a:rPr>
@@ -16102,13 +15327,14 @@
         </p:nvSpPr>
         <p:spPr>
           <a:xfrm>
-            <a:off x="8856000" y="9874799"/>
+            <a:off x="8856000" y="9837984"/>
             <a:ext cx="1440000" cy="180000"/>
           </a:xfrm>
           <a:prstGeom prst="rect">
             <a:avLst/>
           </a:prstGeom>
           <a:noFill/>
+          <a:ln/>
         </p:spPr>
         <p:txBody>
           <a:bodyPr wrap="none" anchor="ctr" lIns="54000" rIns="54000" tIns="21600" bIns="21600">
@@ -16137,13 +15363,14 @@
         </p:nvSpPr>
         <p:spPr>
           <a:xfrm>
-            <a:off x="7200000" y="10061999"/>
+            <a:off x="7200000" y="10032861"/>
             <a:ext cx="1692000" cy="208800"/>
           </a:xfrm>
           <a:prstGeom prst="rect">
             <a:avLst/>
           </a:prstGeom>
           <a:noFill/>
+          <a:ln/>
         </p:spPr>
         <p:txBody>
           <a:bodyPr wrap="none" anchor="ctr" lIns="18000" rIns="18000" tIns="21600" bIns="21600">
@@ -16152,9 +15379,9 @@
           <a:lstStyle/>
           <a:p>
             <a:r>
-              <a:rPr sz="1400" b="0">
-                <a:solidFill>
-                  <a:srgbClr val="4A556B"/>
+              <a:rPr sz="1400" b="1">
+                <a:solidFill>
+                  <a:srgbClr val="5B678A"/>
                 </a:solidFill>
                 <a:latin typeface="HY엽서M"/>
               </a:rPr>
@@ -16171,13 +15398,14 @@
         </p:nvSpPr>
         <p:spPr>
           <a:xfrm>
-            <a:off x="8856000" y="10076399"/>
+            <a:off x="8856000" y="10047261"/>
             <a:ext cx="1440000" cy="180000"/>
           </a:xfrm>
           <a:prstGeom prst="rect">
             <a:avLst/>
           </a:prstGeom>
           <a:noFill/>
+          <a:ln/>
         </p:spPr>
         <p:txBody>
           <a:bodyPr wrap="none" anchor="ctr" lIns="54000" rIns="54000" tIns="21600" bIns="21600">
@@ -16206,13 +15434,14 @@
         </p:nvSpPr>
         <p:spPr>
           <a:xfrm>
-            <a:off x="7200000" y="10263599"/>
+            <a:off x="7200000" y="10242138"/>
             <a:ext cx="1692000" cy="208800"/>
           </a:xfrm>
           <a:prstGeom prst="rect">
             <a:avLst/>
           </a:prstGeom>
           <a:noFill/>
+          <a:ln/>
         </p:spPr>
         <p:txBody>
           <a:bodyPr wrap="none" anchor="ctr" lIns="18000" rIns="18000" tIns="21600" bIns="21600">
@@ -16221,9 +15450,9 @@
           <a:lstStyle/>
           <a:p>
             <a:r>
-              <a:rPr sz="1400" b="0">
-                <a:solidFill>
-                  <a:srgbClr val="4A556B"/>
+              <a:rPr sz="1400" b="1">
+                <a:solidFill>
+                  <a:srgbClr val="5B678A"/>
                 </a:solidFill>
                 <a:latin typeface="HY엽서M"/>
               </a:rPr>
@@ -16240,13 +15469,14 @@
         </p:nvSpPr>
         <p:spPr>
           <a:xfrm>
-            <a:off x="8856000" y="10277999"/>
+            <a:off x="8856000" y="10256538"/>
             <a:ext cx="1440000" cy="180000"/>
           </a:xfrm>
           <a:prstGeom prst="rect">
             <a:avLst/>
           </a:prstGeom>
           <a:noFill/>
+          <a:ln/>
         </p:spPr>
         <p:txBody>
           <a:bodyPr wrap="none" anchor="ctr" lIns="54000" rIns="54000" tIns="21600" bIns="21600">
@@ -16275,13 +15505,14 @@
         </p:nvSpPr>
         <p:spPr>
           <a:xfrm>
-            <a:off x="7200000" y="10465199"/>
+            <a:off x="7200000" y="10451415"/>
             <a:ext cx="1692000" cy="208800"/>
           </a:xfrm>
           <a:prstGeom prst="rect">
             <a:avLst/>
           </a:prstGeom>
           <a:noFill/>
+          <a:ln/>
         </p:spPr>
         <p:txBody>
           <a:bodyPr wrap="none" anchor="ctr" lIns="18000" rIns="18000" tIns="21600" bIns="21600">
@@ -16290,9 +15521,9 @@
           <a:lstStyle/>
           <a:p>
             <a:r>
-              <a:rPr sz="1400" b="0">
-                <a:solidFill>
-                  <a:srgbClr val="4A556B"/>
+              <a:rPr sz="1400" b="1">
+                <a:solidFill>
+                  <a:srgbClr val="5B678A"/>
                 </a:solidFill>
                 <a:latin typeface="HY엽서M"/>
               </a:rPr>
@@ -16309,13 +15540,14 @@
         </p:nvSpPr>
         <p:spPr>
           <a:xfrm>
-            <a:off x="8856000" y="10479599"/>
+            <a:off x="8856000" y="10465815"/>
             <a:ext cx="1440000" cy="180000"/>
           </a:xfrm>
           <a:prstGeom prst="rect">
             <a:avLst/>
           </a:prstGeom>
           <a:noFill/>
+          <a:ln/>
         </p:spPr>
         <p:txBody>
           <a:bodyPr wrap="none" anchor="ctr" lIns="54000" rIns="54000" tIns="21600" bIns="21600">
@@ -16344,13 +15576,14 @@
         </p:nvSpPr>
         <p:spPr>
           <a:xfrm>
-            <a:off x="7200000" y="10666799"/>
+            <a:off x="7200000" y="10660692"/>
             <a:ext cx="1692000" cy="208800"/>
           </a:xfrm>
           <a:prstGeom prst="rect">
             <a:avLst/>
           </a:prstGeom>
           <a:noFill/>
+          <a:ln/>
         </p:spPr>
         <p:txBody>
           <a:bodyPr wrap="none" anchor="ctr" lIns="18000" rIns="18000" tIns="21600" bIns="21600">
@@ -16359,9 +15592,9 @@
           <a:lstStyle/>
           <a:p>
             <a:r>
-              <a:rPr sz="1400" b="0">
-                <a:solidFill>
-                  <a:srgbClr val="4A556B"/>
+              <a:rPr sz="1400" b="1">
+                <a:solidFill>
+                  <a:srgbClr val="5B678A"/>
                 </a:solidFill>
                 <a:latin typeface="HY엽서M"/>
               </a:rPr>
@@ -16378,13 +15611,14 @@
         </p:nvSpPr>
         <p:spPr>
           <a:xfrm>
-            <a:off x="8856000" y="10681199"/>
+            <a:off x="8856000" y="10675092"/>
             <a:ext cx="1440000" cy="180000"/>
           </a:xfrm>
           <a:prstGeom prst="rect">
             <a:avLst/>
           </a:prstGeom>
           <a:noFill/>
+          <a:ln/>
         </p:spPr>
         <p:txBody>
           <a:bodyPr wrap="none" anchor="ctr" lIns="54000" rIns="54000" tIns="21600" bIns="21600">
@@ -16413,13 +15647,14 @@
         </p:nvSpPr>
         <p:spPr>
           <a:xfrm>
-            <a:off x="7200000" y="10868399"/>
+            <a:off x="7200000" y="10869969"/>
             <a:ext cx="1692000" cy="208800"/>
           </a:xfrm>
           <a:prstGeom prst="rect">
             <a:avLst/>
           </a:prstGeom>
           <a:noFill/>
+          <a:ln/>
         </p:spPr>
         <p:txBody>
           <a:bodyPr wrap="none" anchor="ctr" lIns="18000" rIns="18000" tIns="21600" bIns="21600">
@@ -16428,9 +15663,9 @@
           <a:lstStyle/>
           <a:p>
             <a:r>
-              <a:rPr sz="1400" b="0">
-                <a:solidFill>
-                  <a:srgbClr val="4A556B"/>
+              <a:rPr sz="1400" b="1">
+                <a:solidFill>
+                  <a:srgbClr val="5B678A"/>
                 </a:solidFill>
                 <a:latin typeface="HY엽서M"/>
               </a:rPr>
@@ -16447,13 +15682,14 @@
         </p:nvSpPr>
         <p:spPr>
           <a:xfrm>
-            <a:off x="8856000" y="10882799"/>
+            <a:off x="8856000" y="10884369"/>
             <a:ext cx="1440000" cy="180000"/>
           </a:xfrm>
           <a:prstGeom prst="rect">
             <a:avLst/>
           </a:prstGeom>
           <a:noFill/>
+          <a:ln/>
         </p:spPr>
         <p:txBody>
           <a:bodyPr wrap="none" anchor="ctr" lIns="54000" rIns="54000" tIns="21600" bIns="21600">
@@ -16482,13 +15718,14 @@
         </p:nvSpPr>
         <p:spPr>
           <a:xfrm>
-            <a:off x="7200000" y="11069999"/>
+            <a:off x="7200000" y="11079246"/>
             <a:ext cx="1692000" cy="208800"/>
           </a:xfrm>
           <a:prstGeom prst="rect">
             <a:avLst/>
           </a:prstGeom>
           <a:noFill/>
+          <a:ln/>
         </p:spPr>
         <p:txBody>
           <a:bodyPr wrap="none" anchor="ctr" lIns="18000" rIns="18000" tIns="21600" bIns="21600">
@@ -16497,9 +15734,9 @@
           <a:lstStyle/>
           <a:p>
             <a:r>
-              <a:rPr sz="1400" b="0">
-                <a:solidFill>
-                  <a:srgbClr val="4A556B"/>
+              <a:rPr sz="1400" b="1">
+                <a:solidFill>
+                  <a:srgbClr val="5B678A"/>
                 </a:solidFill>
                 <a:latin typeface="HY엽서M"/>
               </a:rPr>
@@ -16516,13 +15753,14 @@
         </p:nvSpPr>
         <p:spPr>
           <a:xfrm>
-            <a:off x="8856000" y="11084399"/>
+            <a:off x="8856000" y="11093646"/>
             <a:ext cx="1440000" cy="180000"/>
           </a:xfrm>
           <a:prstGeom prst="rect">
             <a:avLst/>
           </a:prstGeom>
           <a:noFill/>
+          <a:ln/>
         </p:spPr>
         <p:txBody>
           <a:bodyPr wrap="none" anchor="ctr" lIns="54000" rIns="54000" tIns="21600" bIns="21600">
@@ -16551,13 +15789,14 @@
         </p:nvSpPr>
         <p:spPr>
           <a:xfrm>
-            <a:off x="7200000" y="11271599"/>
+            <a:off x="7200000" y="11288523"/>
             <a:ext cx="1692000" cy="208800"/>
           </a:xfrm>
           <a:prstGeom prst="rect">
             <a:avLst/>
           </a:prstGeom>
           <a:noFill/>
+          <a:ln/>
         </p:spPr>
         <p:txBody>
           <a:bodyPr wrap="none" anchor="ctr" lIns="18000" rIns="18000" tIns="21600" bIns="21600">
@@ -16566,9 +15805,9 @@
           <a:lstStyle/>
           <a:p>
             <a:r>
-              <a:rPr sz="1400" b="0">
-                <a:solidFill>
-                  <a:srgbClr val="4A556B"/>
+              <a:rPr sz="1400" b="1">
+                <a:solidFill>
+                  <a:srgbClr val="5B678A"/>
                 </a:solidFill>
                 <a:latin typeface="HY엽서M"/>
               </a:rPr>
@@ -16585,13 +15824,14 @@
         </p:nvSpPr>
         <p:spPr>
           <a:xfrm>
-            <a:off x="8856000" y="11285999"/>
+            <a:off x="8856000" y="11302923"/>
             <a:ext cx="1440000" cy="180000"/>
           </a:xfrm>
           <a:prstGeom prst="rect">
             <a:avLst/>
           </a:prstGeom>
           <a:noFill/>
+          <a:ln/>
         </p:spPr>
         <p:txBody>
           <a:bodyPr wrap="none" anchor="ctr" lIns="54000" rIns="54000" tIns="21600" bIns="21600">
@@ -16620,13 +15860,14 @@
         </p:nvSpPr>
         <p:spPr>
           <a:xfrm>
-            <a:off x="7200000" y="11473199"/>
+            <a:off x="7200000" y="11497800"/>
             <a:ext cx="1692000" cy="208800"/>
           </a:xfrm>
           <a:prstGeom prst="rect">
             <a:avLst/>
           </a:prstGeom>
           <a:noFill/>
+          <a:ln/>
         </p:spPr>
         <p:txBody>
           <a:bodyPr wrap="none" anchor="ctr" lIns="18000" rIns="18000" tIns="21600" bIns="21600">
@@ -16635,9 +15876,9 @@
           <a:lstStyle/>
           <a:p>
             <a:r>
-              <a:rPr sz="1400" b="0">
-                <a:solidFill>
-                  <a:srgbClr val="4A556B"/>
+              <a:rPr sz="1400" b="1">
+                <a:solidFill>
+                  <a:srgbClr val="5B678A"/>
                 </a:solidFill>
                 <a:latin typeface="HY엽서M"/>
               </a:rPr>
@@ -16654,13 +15895,14 @@
         </p:nvSpPr>
         <p:spPr>
           <a:xfrm>
-            <a:off x="8856000" y="11487599"/>
+            <a:off x="8856000" y="11512200"/>
             <a:ext cx="1440000" cy="180000"/>
           </a:xfrm>
           <a:prstGeom prst="rect">
             <a:avLst/>
           </a:prstGeom>
           <a:noFill/>
+          <a:ln/>
         </p:spPr>
         <p:txBody>
           <a:bodyPr wrap="none" anchor="ctr" lIns="54000" rIns="54000" tIns="21600" bIns="21600">
@@ -16696,6 +15938,7 @@
             <a:avLst/>
           </a:prstGeom>
           <a:noFill/>
+          <a:ln/>
         </p:spPr>
         <p:txBody>
           <a:bodyPr wrap="none" anchor="ctr" lIns="54000" rIns="54000" tIns="21600" bIns="21600">
@@ -16730,6 +15973,7 @@
             <a:avLst/>
           </a:prstGeom>
           <a:noFill/>
+          <a:ln/>
         </p:spPr>
         <p:txBody>
           <a:bodyPr wrap="none" anchor="t" lIns="54000" rIns="54000" tIns="21600" bIns="21600">
@@ -16751,7 +15995,7 @@
             <a:r>
               <a:rPr sz="910" b="0">
                 <a:solidFill>
-                  <a:srgbClr val="8A94A6"/>
+                  <a:srgbClr val="6B7590"/>
                 </a:solidFill>
                 <a:latin typeface="HY엽서M"/>
               </a:rPr>
@@ -16760,7 +16004,7 @@
             <a:r>
               <a:rPr sz="910" b="0">
                 <a:solidFill>
-                  <a:srgbClr val="8A94A6"/>
+                  <a:srgbClr val="6B7590"/>
                 </a:solidFill>
                 <a:latin typeface="HY엽서M"/>
               </a:rPr>
@@ -16769,7 +16013,7 @@
             <a:r>
               <a:rPr sz="910" b="0">
                 <a:solidFill>
-                  <a:srgbClr val="8A94A6"/>
+                  <a:srgbClr val="6B7590"/>
                 </a:solidFill>
                 <a:latin typeface="HY엽서M"/>
               </a:rPr>
@@ -16786,13 +16030,14 @@
         </p:nvSpPr>
         <p:spPr>
           <a:xfrm>
-            <a:off x="7200000" y="12826800"/>
+            <a:off x="7200000" y="12895600"/>
             <a:ext cx="1692000" cy="208800"/>
           </a:xfrm>
           <a:prstGeom prst="rect">
             <a:avLst/>
           </a:prstGeom>
           <a:noFill/>
+          <a:ln/>
         </p:spPr>
         <p:txBody>
           <a:bodyPr wrap="none" anchor="ctr" lIns="18000" rIns="18000" tIns="21600" bIns="21600">
@@ -16801,9 +16046,9 @@
           <a:lstStyle/>
           <a:p>
             <a:r>
-              <a:rPr sz="1400" b="0">
-                <a:solidFill>
-                  <a:srgbClr val="4A556B"/>
+              <a:rPr sz="1400" b="1">
+                <a:solidFill>
+                  <a:srgbClr val="5B678A"/>
                 </a:solidFill>
                 <a:latin typeface="HY엽서M"/>
               </a:rPr>
@@ -16820,13 +16065,14 @@
         </p:nvSpPr>
         <p:spPr>
           <a:xfrm>
-            <a:off x="8856000" y="12841200"/>
+            <a:off x="8856000" y="12910000"/>
             <a:ext cx="1440000" cy="180000"/>
           </a:xfrm>
           <a:prstGeom prst="rect">
             <a:avLst/>
           </a:prstGeom>
           <a:noFill/>
+          <a:ln/>
         </p:spPr>
         <p:txBody>
           <a:bodyPr wrap="none" anchor="ctr" lIns="54000" rIns="54000" tIns="21600" bIns="21600">
@@ -16855,13 +16101,14 @@
         </p:nvSpPr>
         <p:spPr>
           <a:xfrm>
-            <a:off x="7200000" y="13028400"/>
+            <a:off x="7200000" y="13086833"/>
             <a:ext cx="1692000" cy="208800"/>
           </a:xfrm>
           <a:prstGeom prst="rect">
             <a:avLst/>
           </a:prstGeom>
           <a:noFill/>
+          <a:ln/>
         </p:spPr>
         <p:txBody>
           <a:bodyPr wrap="none" anchor="ctr" lIns="18000" rIns="18000" tIns="21600" bIns="21600">
@@ -16870,9 +16117,9 @@
           <a:lstStyle/>
           <a:p>
             <a:r>
-              <a:rPr sz="1400" b="0">
-                <a:solidFill>
-                  <a:srgbClr val="4A556B"/>
+              <a:rPr sz="1400" b="1">
+                <a:solidFill>
+                  <a:srgbClr val="5B678A"/>
                 </a:solidFill>
                 <a:latin typeface="HY엽서M"/>
               </a:rPr>
@@ -16889,13 +16136,14 @@
         </p:nvSpPr>
         <p:spPr>
           <a:xfrm>
-            <a:off x="8856000" y="13042800"/>
+            <a:off x="8856000" y="13101233"/>
             <a:ext cx="1440000" cy="180000"/>
           </a:xfrm>
           <a:prstGeom prst="rect">
             <a:avLst/>
           </a:prstGeom>
           <a:noFill/>
+          <a:ln/>
         </p:spPr>
         <p:txBody>
           <a:bodyPr wrap="none" anchor="ctr" lIns="54000" rIns="54000" tIns="21600" bIns="21600">
@@ -16924,13 +16172,14 @@
         </p:nvSpPr>
         <p:spPr>
           <a:xfrm>
-            <a:off x="7200000" y="13230000"/>
+            <a:off x="7200000" y="13278066"/>
             <a:ext cx="1692000" cy="208800"/>
           </a:xfrm>
           <a:prstGeom prst="rect">
             <a:avLst/>
           </a:prstGeom>
           <a:noFill/>
+          <a:ln/>
         </p:spPr>
         <p:txBody>
           <a:bodyPr wrap="none" anchor="ctr" lIns="18000" rIns="18000" tIns="21600" bIns="21600">
@@ -16939,9 +16188,9 @@
           <a:lstStyle/>
           <a:p>
             <a:r>
-              <a:rPr sz="1400" b="0">
-                <a:solidFill>
-                  <a:srgbClr val="4A556B"/>
+              <a:rPr sz="1400" b="1">
+                <a:solidFill>
+                  <a:srgbClr val="5B678A"/>
                 </a:solidFill>
                 <a:latin typeface="HY엽서M"/>
               </a:rPr>
@@ -16958,13 +16207,14 @@
         </p:nvSpPr>
         <p:spPr>
           <a:xfrm>
-            <a:off x="8856000" y="13244400"/>
+            <a:off x="8856000" y="13292466"/>
             <a:ext cx="1440000" cy="180000"/>
           </a:xfrm>
           <a:prstGeom prst="rect">
             <a:avLst/>
           </a:prstGeom>
           <a:noFill/>
+          <a:ln/>
         </p:spPr>
         <p:txBody>
           <a:bodyPr wrap="none" anchor="ctr" lIns="54000" rIns="54000" tIns="21600" bIns="21600">
@@ -16993,13 +16243,14 @@
         </p:nvSpPr>
         <p:spPr>
           <a:xfrm>
-            <a:off x="7200000" y="13431600"/>
+            <a:off x="7200000" y="13469299"/>
             <a:ext cx="1692000" cy="208800"/>
           </a:xfrm>
           <a:prstGeom prst="rect">
             <a:avLst/>
           </a:prstGeom>
           <a:noFill/>
+          <a:ln/>
         </p:spPr>
         <p:txBody>
           <a:bodyPr wrap="none" anchor="ctr" lIns="18000" rIns="18000" tIns="21600" bIns="21600">
@@ -17008,9 +16259,9 @@
           <a:lstStyle/>
           <a:p>
             <a:r>
-              <a:rPr sz="1400" b="0">
-                <a:solidFill>
-                  <a:srgbClr val="4A556B"/>
+              <a:rPr sz="1400" b="1">
+                <a:solidFill>
+                  <a:srgbClr val="5B678A"/>
                 </a:solidFill>
                 <a:latin typeface="HY엽서M"/>
               </a:rPr>
@@ -17027,13 +16278,14 @@
         </p:nvSpPr>
         <p:spPr>
           <a:xfrm>
-            <a:off x="8856000" y="13446000"/>
+            <a:off x="8856000" y="13483699"/>
             <a:ext cx="1440000" cy="180000"/>
           </a:xfrm>
           <a:prstGeom prst="rect">
             <a:avLst/>
           </a:prstGeom>
           <a:noFill/>
+          <a:ln/>
         </p:spPr>
         <p:txBody>
           <a:bodyPr wrap="none" anchor="ctr" lIns="54000" rIns="54000" tIns="21600" bIns="21600">
@@ -17062,13 +16314,14 @@
         </p:nvSpPr>
         <p:spPr>
           <a:xfrm>
-            <a:off x="7200000" y="13633200"/>
+            <a:off x="7200000" y="13660532"/>
             <a:ext cx="1692000" cy="208800"/>
           </a:xfrm>
           <a:prstGeom prst="rect">
             <a:avLst/>
           </a:prstGeom>
           <a:noFill/>
+          <a:ln/>
         </p:spPr>
         <p:txBody>
           <a:bodyPr wrap="none" anchor="ctr" lIns="18000" rIns="18000" tIns="21600" bIns="21600">
@@ -17077,9 +16330,9 @@
           <a:lstStyle/>
           <a:p>
             <a:r>
-              <a:rPr sz="1400" b="0">
-                <a:solidFill>
-                  <a:srgbClr val="4A556B"/>
+              <a:rPr sz="1400" b="1">
+                <a:solidFill>
+                  <a:srgbClr val="5B678A"/>
                 </a:solidFill>
                 <a:latin typeface="HY엽서M"/>
               </a:rPr>
@@ -17096,13 +16349,14 @@
         </p:nvSpPr>
         <p:spPr>
           <a:xfrm>
-            <a:off x="8856000" y="13647600"/>
+            <a:off x="8856000" y="13674932"/>
             <a:ext cx="1440000" cy="180000"/>
           </a:xfrm>
           <a:prstGeom prst="rect">
             <a:avLst/>
           </a:prstGeom>
           <a:noFill/>
+          <a:ln/>
         </p:spPr>
         <p:txBody>
           <a:bodyPr wrap="none" anchor="ctr" lIns="54000" rIns="54000" tIns="21600" bIns="21600">
@@ -17131,13 +16385,14 @@
         </p:nvSpPr>
         <p:spPr>
           <a:xfrm>
-            <a:off x="7200000" y="13834800"/>
+            <a:off x="7200000" y="13851765"/>
             <a:ext cx="1692000" cy="208800"/>
           </a:xfrm>
           <a:prstGeom prst="rect">
             <a:avLst/>
           </a:prstGeom>
           <a:noFill/>
+          <a:ln/>
         </p:spPr>
         <p:txBody>
           <a:bodyPr wrap="none" anchor="ctr" lIns="18000" rIns="18000" tIns="21600" bIns="21600">
@@ -17146,9 +16401,9 @@
           <a:lstStyle/>
           <a:p>
             <a:r>
-              <a:rPr sz="1400" b="0">
-                <a:solidFill>
-                  <a:srgbClr val="4A556B"/>
+              <a:rPr sz="1400" b="1">
+                <a:solidFill>
+                  <a:srgbClr val="5B678A"/>
                 </a:solidFill>
                 <a:latin typeface="HY엽서M"/>
               </a:rPr>
@@ -17165,13 +16420,14 @@
         </p:nvSpPr>
         <p:spPr>
           <a:xfrm>
-            <a:off x="8856000" y="13849200"/>
+            <a:off x="8856000" y="13866165"/>
             <a:ext cx="1440000" cy="180000"/>
           </a:xfrm>
           <a:prstGeom prst="rect">
             <a:avLst/>
           </a:prstGeom>
           <a:noFill/>
+          <a:ln/>
         </p:spPr>
         <p:txBody>
           <a:bodyPr wrap="none" anchor="ctr" lIns="54000" rIns="54000" tIns="21600" bIns="21600">
@@ -17200,13 +16456,14 @@
         </p:nvSpPr>
         <p:spPr>
           <a:xfrm>
-            <a:off x="7200000" y="14036400"/>
+            <a:off x="7200000" y="14042999"/>
             <a:ext cx="1692000" cy="208800"/>
           </a:xfrm>
           <a:prstGeom prst="rect">
             <a:avLst/>
           </a:prstGeom>
           <a:noFill/>
+          <a:ln/>
         </p:spPr>
         <p:txBody>
           <a:bodyPr wrap="none" anchor="ctr" lIns="18000" rIns="18000" tIns="21600" bIns="21600">
@@ -17215,9 +16472,9 @@
           <a:lstStyle/>
           <a:p>
             <a:r>
-              <a:rPr sz="1400" b="0">
-                <a:solidFill>
-                  <a:srgbClr val="4A556B"/>
+              <a:rPr sz="1400" b="1">
+                <a:solidFill>
+                  <a:srgbClr val="5B678A"/>
                 </a:solidFill>
                 <a:latin typeface="HY엽서M"/>
               </a:rPr>
@@ -17234,13 +16491,14 @@
         </p:nvSpPr>
         <p:spPr>
           <a:xfrm>
-            <a:off x="8856000" y="14050800"/>
+            <a:off x="8856000" y="14057399"/>
             <a:ext cx="1440000" cy="180000"/>
           </a:xfrm>
           <a:prstGeom prst="rect">
             <a:avLst/>
           </a:prstGeom>
           <a:noFill/>
+          <a:ln/>
         </p:spPr>
         <p:txBody>
           <a:bodyPr wrap="none" anchor="ctr" lIns="54000" rIns="54000" tIns="21600" bIns="21600">
@@ -17276,6 +16534,7 @@
             <a:avLst/>
           </a:prstGeom>
           <a:noFill/>
+          <a:ln/>
         </p:spPr>
         <p:txBody>
           <a:bodyPr wrap="square" anchor="ctr" lIns="54000" rIns="54000" tIns="21600" bIns="21600">
@@ -17310,6 +16569,7 @@
             <a:avLst/>
           </a:prstGeom>
           <a:noFill/>
+          <a:ln/>
         </p:spPr>
         <p:txBody>
           <a:bodyPr wrap="square" anchor="ctr" lIns="54000" rIns="54000" tIns="21600" bIns="21600">
@@ -17319,36 +16579,36 @@
           <a:p>
             <a:pPr algn="r"/>
             <a:r>
-              <a:rPr sz="979" b="0">
-                <a:solidFill>
-                  <a:srgbClr val="C9D0E0"/>
+              <a:rPr sz="979" b="1">
+                <a:solidFill>
+                  <a:srgbClr val="8A94A6"/>
                 </a:solidFill>
                 <a:latin typeface="HY엽서M"/>
               </a:rPr>
               <a:t>참고용 입니다</a:t>
             </a:r>
             <a:r>
-              <a:rPr sz="979" b="0">
-                <a:solidFill>
-                  <a:srgbClr val="C9D0E0"/>
+              <a:rPr sz="979" b="1">
+                <a:solidFill>
+                  <a:srgbClr val="8A94A6"/>
                 </a:solidFill>
                 <a:latin typeface="HY엽서M"/>
               </a:rPr>
               <a:t> </a:t>
             </a:r>
             <a:r>
-              <a:rPr sz="979" b="0">
-                <a:solidFill>
-                  <a:srgbClr val="C9D0E0"/>
+              <a:rPr sz="979" b="1">
+                <a:solidFill>
+                  <a:srgbClr val="8A94A6"/>
                 </a:solidFill>
                 <a:latin typeface="HY엽서M"/>
               </a:rPr>
               <a:t>자세한건</a:t>
             </a:r>
             <a:r>
-              <a:rPr sz="979" b="0">
-                <a:solidFill>
-                  <a:srgbClr val="C9D0E0"/>
+              <a:rPr sz="979" b="1">
+                <a:solidFill>
+                  <a:srgbClr val="8A94A6"/>
                 </a:solidFill>
                 <a:latin typeface="HY엽서M"/>
               </a:rPr>
